--- a/output/presentations/11-evaluation-observability.pptx
+++ b/output/presentations/11-evaluation-observability.pptx
@@ -2,22 +2,24 @@
 <file path=ppt/presentation.xml><?xml version="1.0" encoding="utf-8"?>
 <p:presentation xmlns:p="http://schemas.openxmlformats.org/presentationml/2006/main">
   <p:sldMasterIdLst>
-    <p:sldMasterId xmlns:r="http://schemas.openxmlformats.org/officeDocument/2006/relationships" id="2147483648" r:id="Rb03046c04c9b4cdc"/>
+    <p:sldMasterId xmlns:r="http://schemas.openxmlformats.org/officeDocument/2006/relationships" id="2147483648" r:id="R13f5f263cf5c455a"/>
   </p:sldMasterIdLst>
   <p:notesMasterIdLst>
-    <p:notesMasterId xmlns:r="http://schemas.openxmlformats.org/officeDocument/2006/relationships" r:id="Rc978c1630cb3429f"/>
+    <p:notesMasterId xmlns:r="http://schemas.openxmlformats.org/officeDocument/2006/relationships" r:id="Rc0da66dfdc9540de"/>
   </p:notesMasterIdLst>
   <p:sldIdLst>
-    <p:sldId xmlns:r="http://schemas.openxmlformats.org/officeDocument/2006/relationships" id="256" r:id="R5b71eeddbb434709"/>
-    <p:sldId xmlns:r="http://schemas.openxmlformats.org/officeDocument/2006/relationships" id="257" r:id="Rfd8a2f3c0bbe4b05"/>
-    <p:sldId xmlns:r="http://schemas.openxmlformats.org/officeDocument/2006/relationships" id="258" r:id="Rd30d0c0d8c974d66"/>
-    <p:sldId xmlns:r="http://schemas.openxmlformats.org/officeDocument/2006/relationships" id="259" r:id="R520cfa0b21e84550"/>
-    <p:sldId xmlns:r="http://schemas.openxmlformats.org/officeDocument/2006/relationships" id="260" r:id="Rd670be6fc2a14138"/>
-    <p:sldId xmlns:r="http://schemas.openxmlformats.org/officeDocument/2006/relationships" id="261" r:id="R50e995e23d504031"/>
-    <p:sldId xmlns:r="http://schemas.openxmlformats.org/officeDocument/2006/relationships" id="262" r:id="Raac84d0d870d4567"/>
-    <p:sldId xmlns:r="http://schemas.openxmlformats.org/officeDocument/2006/relationships" id="263" r:id="Rb74c7bcebf54462c"/>
-    <p:sldId xmlns:r="http://schemas.openxmlformats.org/officeDocument/2006/relationships" id="264" r:id="Rf5a6b0ab5d0c4ba6"/>
-    <p:sldId xmlns:r="http://schemas.openxmlformats.org/officeDocument/2006/relationships" id="265" r:id="Ra71efdaf903944c2"/>
+    <p:sldId xmlns:r="http://schemas.openxmlformats.org/officeDocument/2006/relationships" id="256" r:id="R689c4a30a7b547ed"/>
+    <p:sldId xmlns:r="http://schemas.openxmlformats.org/officeDocument/2006/relationships" id="257" r:id="Rfece4af047ee49b1"/>
+    <p:sldId xmlns:r="http://schemas.openxmlformats.org/officeDocument/2006/relationships" id="258" r:id="Rfe21ceb47ac54af1"/>
+    <p:sldId xmlns:r="http://schemas.openxmlformats.org/officeDocument/2006/relationships" id="259" r:id="Rc84ddd733c574b8a"/>
+    <p:sldId xmlns:r="http://schemas.openxmlformats.org/officeDocument/2006/relationships" id="260" r:id="R0c48559d5cc24d14"/>
+    <p:sldId xmlns:r="http://schemas.openxmlformats.org/officeDocument/2006/relationships" id="261" r:id="R938746434a5a4629"/>
+    <p:sldId xmlns:r="http://schemas.openxmlformats.org/officeDocument/2006/relationships" id="262" r:id="R11f7f14a0f3e4df6"/>
+    <p:sldId xmlns:r="http://schemas.openxmlformats.org/officeDocument/2006/relationships" id="263" r:id="Refd6f73879f84a5e"/>
+    <p:sldId xmlns:r="http://schemas.openxmlformats.org/officeDocument/2006/relationships" id="264" r:id="R534641cc0f0147ee"/>
+    <p:sldId xmlns:r="http://schemas.openxmlformats.org/officeDocument/2006/relationships" id="265" r:id="R812fd4977a72466d"/>
+    <p:sldId xmlns:r="http://schemas.openxmlformats.org/officeDocument/2006/relationships" id="266" r:id="R97f3a22527ba4dca"/>
+    <p:sldId xmlns:r="http://schemas.openxmlformats.org/officeDocument/2006/relationships" id="267" r:id="R756d675ed7c842dd"/>
   </p:sldIdLst>
   <p:sldSz cx="12192000" cy="6858000"/>
   <p:notesSz cx="6858000" cy="9144000"/>
@@ -461,12 +463,57 @@
           </a:p>
           <a:p xmlns:a="http://schemas.openxmlformats.org/drawingml/2006/main">
             <a:r>
+              <a:t>Edition: 2026-09-09</a:t>
+            </a:r>
+          </a:p>
+          <a:p xmlns:a="http://schemas.openxmlformats.org/drawingml/2006/main">
+            <a:r>
+              <a:t/>
+            </a:r>
+          </a:p>
+          <a:p xmlns:a="http://schemas.openxmlformats.org/drawingml/2006/main">
+            <a:r>
               <a:t>[Sources]</a:t>
             </a:r>
           </a:p>
           <a:p xmlns:a="http://schemas.openxmlformats.org/drawingml/2006/main">
             <a:r>
-              <a:t>- Supplied source presentation: 11-evaluation-observability.pdf</a:t>
+              <a:t>- Original source presentation: 11-evaluation-observability.pdf</a:t>
+            </a:r>
+          </a:p>
+          <a:p xmlns:a="http://schemas.openxmlformats.org/drawingml/2006/main">
+            <a:r>
+              <a:t>- P3: Would this change your answer?. Anthropic/Fellows preprint, arXiv v1, 2026-08-17. https://arxiv.org/abs/2608.16747 CHIVE tests counterfactual prompt changes. Generated explanations remain hypotheses. Official post: August 21.</a:t>
+            </a:r>
+          </a:p>
+          <a:p xmlns:a="http://schemas.openxmlformats.org/drawingml/2006/main">
+            <a:r>
+              <a:t>- R2: How enabling two settings tripled our scores on the ARC-AGI-3 benchmark. OpenAI research post, 2026-07-29. https://openai.com/index/how-two-settings-tripled-our-arc-agi-3-scores/ A specific harness experiment. Its result does not estimate the effect of context changes in Gemini.</a:t>
+            </a:r>
+          </a:p>
+          <a:p xmlns:a="http://schemas.openxmlformats.org/drawingml/2006/main">
+            <a:r>
+              <a:t/>
+            </a:r>
+          </a:p>
+          <a:p xmlns:a="http://schemas.openxmlformats.org/drawingml/2006/main">
+            <a:r>
+              <a:t>[Assessed practice]</a:t>
+            </a:r>
+          </a:p>
+          <a:p xmlns:a="http://schemas.openxmlformats.org/drawingml/2006/main">
+            <a:r>
+              <a:t>Run the offline evaluation command, inspect its JSONL records, and test the failure path. For live inference, predeclare a model and budget before using the held-out split.</a:t>
+            </a:r>
+          </a:p>
+          <a:p xmlns:a="http://schemas.openxmlformats.org/drawingml/2006/main">
+            <a:r>
+              <a:t>Acceptance: A fresh rerun produces a manifest and one record per attempted case. Interrupted or failed requests do not disappear from the denominator.</a:t>
+            </a:r>
+          </a:p>
+          <a:p xmlns:a="http://schemas.openxmlformats.org/drawingml/2006/main">
+            <a:r>
+              <a:t>Lab: labs/07_agents_sdk_evaluation.ipynb</a:t>
             </a:r>
           </a:p>
         </p:txBody>
@@ -536,6 +583,136 @@
           <a:lstStyle xmlns:a="http://schemas.openxmlformats.org/drawingml/2006/main"/>
           <a:p xmlns:a="http://schemas.openxmlformats.org/drawingml/2006/main">
             <a:r>
+              <a:t>Use as retrieval practice. Ask for an answer that defines, compares, traces, and evaluates.</a:t>
+            </a:r>
+          </a:p>
+          <a:p xmlns:a="http://schemas.openxmlformats.org/drawingml/2006/main">
+            <a:r>
+              <a:t/>
+            </a:r>
+          </a:p>
+          <a:p xmlns:a="http://schemas.openxmlformats.org/drawingml/2006/main">
+            <a:r>
+              <a:t>Edition: 2026-09-09</a:t>
+            </a:r>
+          </a:p>
+          <a:p xmlns:a="http://schemas.openxmlformats.org/drawingml/2006/main">
+            <a:r>
+              <a:t/>
+            </a:r>
+          </a:p>
+          <a:p xmlns:a="http://schemas.openxmlformats.org/drawingml/2006/main">
+            <a:r>
+              <a:t>[Sources]</a:t>
+            </a:r>
+          </a:p>
+          <a:p xmlns:a="http://schemas.openxmlformats.org/drawingml/2006/main">
+            <a:r>
+              <a:t>- Original source presentation: 11-evaluation-observability.pdf</a:t>
+            </a:r>
+          </a:p>
+          <a:p xmlns:a="http://schemas.openxmlformats.org/drawingml/2006/main">
+            <a:r>
+              <a:t>- P3: Would this change your answer?. Anthropic/Fellows preprint, arXiv v1, 2026-08-17. https://arxiv.org/abs/2608.16747 CHIVE tests counterfactual prompt changes. Generated explanations remain hypotheses. Official post: August 21.</a:t>
+            </a:r>
+          </a:p>
+          <a:p xmlns:a="http://schemas.openxmlformats.org/drawingml/2006/main">
+            <a:r>
+              <a:t>- R2: How enabling two settings tripled our scores on the ARC-AGI-3 benchmark. OpenAI research post, 2026-07-29. https://openai.com/index/how-two-settings-tripled-our-arc-agi-3-scores/ A specific harness experiment. Its result does not estimate the effect of context changes in Gemini.</a:t>
+            </a:r>
+          </a:p>
+          <a:p xmlns:a="http://schemas.openxmlformats.org/drawingml/2006/main">
+            <a:r>
+              <a:t/>
+            </a:r>
+          </a:p>
+          <a:p xmlns:a="http://schemas.openxmlformats.org/drawingml/2006/main">
+            <a:r>
+              <a:t>[Assessed practice]</a:t>
+            </a:r>
+          </a:p>
+          <a:p xmlns:a="http://schemas.openxmlformats.org/drawingml/2006/main">
+            <a:r>
+              <a:t>Run the offline evaluation command, inspect its JSONL records, and test the failure path. For live inference, predeclare a model and budget before using the held-out split.</a:t>
+            </a:r>
+          </a:p>
+          <a:p xmlns:a="http://schemas.openxmlformats.org/drawingml/2006/main">
+            <a:r>
+              <a:t>Acceptance: A fresh rerun produces a manifest and one record per attempted case. Interrupted or failed requests do not disappear from the denominator.</a:t>
+            </a:r>
+          </a:p>
+          <a:p xmlns:a="http://schemas.openxmlformats.org/drawingml/2006/main">
+            <a:r>
+              <a:t>Lab: labs/07_agents_sdk_evaluation.ipynb</a:t>
+            </a:r>
+          </a:p>
+        </p:txBody>
+      </p:sp>
+      <p:sp>
+        <p:nvSpPr>
+          <p:cNvPr id="4" name="Slide Number Placeholder 3"/>
+          <p:cNvSpPr>
+            <a:spLocks xmlns:a="http://schemas.openxmlformats.org/drawingml/2006/main" noGrp="1"/>
+          </p:cNvSpPr>
+          <p:nvPr>
+            <p:ph type="sldNum" idx="5"/>
+          </p:nvPr>
+        </p:nvSpPr>
+        <p:spPr/>
+        <p:txBody>
+          <a:bodyPr xmlns:a="http://schemas.openxmlformats.org/drawingml/2006/main"/>
+          <a:lstStyle xmlns:a="http://schemas.openxmlformats.org/drawingml/2006/main"/>
+          <a:p xmlns:a="http://schemas.openxmlformats.org/drawingml/2006/main"/>
+        </p:txBody>
+      </p:sp>
+    </p:spTree>
+  </p:cSld>
+  <p:clrMapOvr>
+    <a:masterClrMapping xmlns:a="http://schemas.openxmlformats.org/drawingml/2006/main"/>
+  </p:clrMapOvr>
+</p:notes>
+</file>
+
+<file path=ppt/notesSlides/notesSlide11.xml><?xml version="1.0" encoding="utf-8"?>
+<p:notes xmlns:p="http://schemas.openxmlformats.org/presentationml/2006/main">
+  <p:cSld>
+    <p:spTree>
+      <p:nvGrpSpPr>
+        <p:cNvPr id="1" name=""/>
+        <p:cNvGrpSpPr/>
+        <p:nvPr/>
+      </p:nvGrpSpPr>
+      <p:grpSpPr>
+        <a:xfrm xmlns:a="http://schemas.openxmlformats.org/drawingml/2006/main"/>
+      </p:grpSpPr>
+      <p:sp>
+        <p:nvSpPr>
+          <p:cNvPr id="2" name="Slide Image Placeholder 1"/>
+          <p:cNvSpPr>
+            <a:spLocks xmlns:a="http://schemas.openxmlformats.org/drawingml/2006/main" noGrp="1"/>
+          </p:cNvSpPr>
+          <p:nvPr>
+            <p:ph type="sldImg" idx="0"/>
+          </p:nvPr>
+        </p:nvSpPr>
+        <p:spPr/>
+      </p:sp>
+      <p:sp>
+        <p:nvSpPr>
+          <p:cNvPr id="3" name="Notes Placeholder 2"/>
+          <p:cNvSpPr>
+            <a:spLocks xmlns:a="http://schemas.openxmlformats.org/drawingml/2006/main" noGrp="1"/>
+          </p:cNvSpPr>
+          <p:nvPr>
+            <p:ph type="body" idx="1"/>
+          </p:nvPr>
+        </p:nvSpPr>
+        <p:spPr/>
+        <p:txBody>
+          <a:bodyPr xmlns:a="http://schemas.openxmlformats.org/drawingml/2006/main"/>
+          <a:lstStyle xmlns:a="http://schemas.openxmlformats.org/drawingml/2006/main"/>
+          <a:p xmlns:a="http://schemas.openxmlformats.org/drawingml/2006/main">
+            <a:r>
               <a:t>Close by restating the four durable ideas and linking forward to the next chapter.</a:t>
             </a:r>
           </a:p>
@@ -546,12 +723,187 @@
           </a:p>
           <a:p xmlns:a="http://schemas.openxmlformats.org/drawingml/2006/main">
             <a:r>
+              <a:t>Edition: 2026-09-09</a:t>
+            </a:r>
+          </a:p>
+          <a:p xmlns:a="http://schemas.openxmlformats.org/drawingml/2006/main">
+            <a:r>
+              <a:t/>
+            </a:r>
+          </a:p>
+          <a:p xmlns:a="http://schemas.openxmlformats.org/drawingml/2006/main">
+            <a:r>
               <a:t>[Sources]</a:t>
             </a:r>
           </a:p>
           <a:p xmlns:a="http://schemas.openxmlformats.org/drawingml/2006/main">
             <a:r>
-              <a:t>- Supplied source presentation: 11-evaluation-observability.pdf</a:t>
+              <a:t>- Original source presentation: 11-evaluation-observability.pdf</a:t>
+            </a:r>
+          </a:p>
+          <a:p xmlns:a="http://schemas.openxmlformats.org/drawingml/2006/main">
+            <a:r>
+              <a:t>- P3: Would this change your answer?. Anthropic/Fellows preprint, arXiv v1, 2026-08-17. https://arxiv.org/abs/2608.16747 CHIVE tests counterfactual prompt changes. Generated explanations remain hypotheses. Official post: August 21.</a:t>
+            </a:r>
+          </a:p>
+          <a:p xmlns:a="http://schemas.openxmlformats.org/drawingml/2006/main">
+            <a:r>
+              <a:t>- R2: How enabling two settings tripled our scores on the ARC-AGI-3 benchmark. OpenAI research post, 2026-07-29. https://openai.com/index/how-two-settings-tripled-our-arc-agi-3-scores/ A specific harness experiment. Its result does not estimate the effect of context changes in Gemini.</a:t>
+            </a:r>
+          </a:p>
+          <a:p xmlns:a="http://schemas.openxmlformats.org/drawingml/2006/main">
+            <a:r>
+              <a:t/>
+            </a:r>
+          </a:p>
+          <a:p xmlns:a="http://schemas.openxmlformats.org/drawingml/2006/main">
+            <a:r>
+              <a:t>[Assessed practice]</a:t>
+            </a:r>
+          </a:p>
+          <a:p xmlns:a="http://schemas.openxmlformats.org/drawingml/2006/main">
+            <a:r>
+              <a:t>Run the offline evaluation command, inspect its JSONL records, and test the failure path. For live inference, predeclare a model and budget before using the held-out split.</a:t>
+            </a:r>
+          </a:p>
+          <a:p xmlns:a="http://schemas.openxmlformats.org/drawingml/2006/main">
+            <a:r>
+              <a:t>Acceptance: A fresh rerun produces a manifest and one record per attempted case. Interrupted or failed requests do not disappear from the denominator.</a:t>
+            </a:r>
+          </a:p>
+          <a:p xmlns:a="http://schemas.openxmlformats.org/drawingml/2006/main">
+            <a:r>
+              <a:t>Lab: labs/07_agents_sdk_evaluation.ipynb</a:t>
+            </a:r>
+          </a:p>
+        </p:txBody>
+      </p:sp>
+      <p:sp>
+        <p:nvSpPr>
+          <p:cNvPr id="4" name="Slide Number Placeholder 3"/>
+          <p:cNvSpPr>
+            <a:spLocks xmlns:a="http://schemas.openxmlformats.org/drawingml/2006/main" noGrp="1"/>
+          </p:cNvSpPr>
+          <p:nvPr>
+            <p:ph type="sldNum" idx="5"/>
+          </p:nvPr>
+        </p:nvSpPr>
+        <p:spPr/>
+        <p:txBody>
+          <a:bodyPr xmlns:a="http://schemas.openxmlformats.org/drawingml/2006/main"/>
+          <a:lstStyle xmlns:a="http://schemas.openxmlformats.org/drawingml/2006/main"/>
+          <a:p xmlns:a="http://schemas.openxmlformats.org/drawingml/2006/main"/>
+        </p:txBody>
+      </p:sp>
+    </p:spTree>
+  </p:cSld>
+  <p:clrMapOvr>
+    <a:masterClrMapping xmlns:a="http://schemas.openxmlformats.org/drawingml/2006/main"/>
+  </p:clrMapOvr>
+</p:notes>
+</file>
+
+<file path=ppt/notesSlides/notesSlide12.xml><?xml version="1.0" encoding="utf-8"?>
+<p:notes xmlns:p="http://schemas.openxmlformats.org/presentationml/2006/main">
+  <p:cSld>
+    <p:spTree>
+      <p:nvGrpSpPr>
+        <p:cNvPr id="1" name=""/>
+        <p:cNvGrpSpPr/>
+        <p:nvPr/>
+      </p:nvGrpSpPr>
+      <p:grpSpPr>
+        <a:xfrm xmlns:a="http://schemas.openxmlformats.org/drawingml/2006/main"/>
+      </p:grpSpPr>
+      <p:sp>
+        <p:nvSpPr>
+          <p:cNvPr id="2" name="Slide Image Placeholder 1"/>
+          <p:cNvSpPr>
+            <a:spLocks xmlns:a="http://schemas.openxmlformats.org/drawingml/2006/main" noGrp="1"/>
+          </p:cNvSpPr>
+          <p:nvPr>
+            <p:ph type="sldImg" idx="0"/>
+          </p:nvPr>
+        </p:nvSpPr>
+        <p:spPr/>
+      </p:sp>
+      <p:sp>
+        <p:nvSpPr>
+          <p:cNvPr id="3" name="Notes Placeholder 2"/>
+          <p:cNvSpPr>
+            <a:spLocks xmlns:a="http://schemas.openxmlformats.org/drawingml/2006/main" noGrp="1"/>
+          </p:cNvSpPr>
+          <p:nvPr>
+            <p:ph type="body" idx="1"/>
+          </p:nvPr>
+        </p:nvSpPr>
+        <p:spPr/>
+        <p:txBody>
+          <a:bodyPr xmlns:a="http://schemas.openxmlformats.org/drawingml/2006/main"/>
+          <a:lstStyle xmlns:a="http://schemas.openxmlformats.org/drawingml/2006/main"/>
+          <a:p xmlns:a="http://schemas.openxmlformats.org/drawingml/2006/main">
+            <a:r>
+              <a:t>Assess the submitted evidence with the stated acceptance check. Reading links and limitations follow.</a:t>
+            </a:r>
+          </a:p>
+          <a:p xmlns:a="http://schemas.openxmlformats.org/drawingml/2006/main">
+            <a:r>
+              <a:t/>
+            </a:r>
+          </a:p>
+          <a:p xmlns:a="http://schemas.openxmlformats.org/drawingml/2006/main">
+            <a:r>
+              <a:t>Edition: 2026-09-09</a:t>
+            </a:r>
+          </a:p>
+          <a:p xmlns:a="http://schemas.openxmlformats.org/drawingml/2006/main">
+            <a:r>
+              <a:t/>
+            </a:r>
+          </a:p>
+          <a:p xmlns:a="http://schemas.openxmlformats.org/drawingml/2006/main">
+            <a:r>
+              <a:t>[Sources]</a:t>
+            </a:r>
+          </a:p>
+          <a:p xmlns:a="http://schemas.openxmlformats.org/drawingml/2006/main">
+            <a:r>
+              <a:t>- Original source presentation: 11-evaluation-observability.pdf</a:t>
+            </a:r>
+          </a:p>
+          <a:p xmlns:a="http://schemas.openxmlformats.org/drawingml/2006/main">
+            <a:r>
+              <a:t>- P3: Would this change your answer?. Anthropic/Fellows preprint, arXiv v1, 2026-08-17. https://arxiv.org/abs/2608.16747 CHIVE tests counterfactual prompt changes. Generated explanations remain hypotheses. Official post: August 21.</a:t>
+            </a:r>
+          </a:p>
+          <a:p xmlns:a="http://schemas.openxmlformats.org/drawingml/2006/main">
+            <a:r>
+              <a:t>- R2: How enabling two settings tripled our scores on the ARC-AGI-3 benchmark. OpenAI research post, 2026-07-29. https://openai.com/index/how-two-settings-tripled-our-arc-agi-3-scores/ A specific harness experiment. Its result does not estimate the effect of context changes in Gemini.</a:t>
+            </a:r>
+          </a:p>
+          <a:p xmlns:a="http://schemas.openxmlformats.org/drawingml/2006/main">
+            <a:r>
+              <a:t/>
+            </a:r>
+          </a:p>
+          <a:p xmlns:a="http://schemas.openxmlformats.org/drawingml/2006/main">
+            <a:r>
+              <a:t>[Assessed practice]</a:t>
+            </a:r>
+          </a:p>
+          <a:p xmlns:a="http://schemas.openxmlformats.org/drawingml/2006/main">
+            <a:r>
+              <a:t>Run the offline evaluation command, inspect its JSONL records, and test the failure path. For live inference, predeclare a model and budget before using the held-out split.</a:t>
+            </a:r>
+          </a:p>
+          <a:p xmlns:a="http://schemas.openxmlformats.org/drawingml/2006/main">
+            <a:r>
+              <a:t>Acceptance: A fresh rerun produces a manifest and one record per attempted case. Interrupted or failed requests do not disappear from the denominator.</a:t>
+            </a:r>
+          </a:p>
+          <a:p xmlns:a="http://schemas.openxmlformats.org/drawingml/2006/main">
+            <a:r>
+              <a:t>Lab: labs/07_agents_sdk_evaluation.ipynb</a:t>
             </a:r>
           </a:p>
         </p:txBody>
@@ -631,12 +983,57 @@
           </a:p>
           <a:p xmlns:a="http://schemas.openxmlformats.org/drawingml/2006/main">
             <a:r>
+              <a:t>Edition: 2026-09-09</a:t>
+            </a:r>
+          </a:p>
+          <a:p xmlns:a="http://schemas.openxmlformats.org/drawingml/2006/main">
+            <a:r>
+              <a:t/>
+            </a:r>
+          </a:p>
+          <a:p xmlns:a="http://schemas.openxmlformats.org/drawingml/2006/main">
+            <a:r>
               <a:t>[Sources]</a:t>
             </a:r>
           </a:p>
           <a:p xmlns:a="http://schemas.openxmlformats.org/drawingml/2006/main">
             <a:r>
-              <a:t>- Supplied source presentation: 11-evaluation-observability.pdf</a:t>
+              <a:t>- Original source presentation: 11-evaluation-observability.pdf</a:t>
+            </a:r>
+          </a:p>
+          <a:p xmlns:a="http://schemas.openxmlformats.org/drawingml/2006/main">
+            <a:r>
+              <a:t>- P3: Would this change your answer?. Anthropic/Fellows preprint, arXiv v1, 2026-08-17. https://arxiv.org/abs/2608.16747 CHIVE tests counterfactual prompt changes. Generated explanations remain hypotheses. Official post: August 21.</a:t>
+            </a:r>
+          </a:p>
+          <a:p xmlns:a="http://schemas.openxmlformats.org/drawingml/2006/main">
+            <a:r>
+              <a:t>- R2: How enabling two settings tripled our scores on the ARC-AGI-3 benchmark. OpenAI research post, 2026-07-29. https://openai.com/index/how-two-settings-tripled-our-arc-agi-3-scores/ A specific harness experiment. Its result does not estimate the effect of context changes in Gemini.</a:t>
+            </a:r>
+          </a:p>
+          <a:p xmlns:a="http://schemas.openxmlformats.org/drawingml/2006/main">
+            <a:r>
+              <a:t/>
+            </a:r>
+          </a:p>
+          <a:p xmlns:a="http://schemas.openxmlformats.org/drawingml/2006/main">
+            <a:r>
+              <a:t>[Assessed practice]</a:t>
+            </a:r>
+          </a:p>
+          <a:p xmlns:a="http://schemas.openxmlformats.org/drawingml/2006/main">
+            <a:r>
+              <a:t>Run the offline evaluation command, inspect its JSONL records, and test the failure path. For live inference, predeclare a model and budget before using the held-out split.</a:t>
+            </a:r>
+          </a:p>
+          <a:p xmlns:a="http://schemas.openxmlformats.org/drawingml/2006/main">
+            <a:r>
+              <a:t>Acceptance: A fresh rerun produces a manifest and one record per attempted case. Interrupted or failed requests do not disappear from the denominator.</a:t>
+            </a:r>
+          </a:p>
+          <a:p xmlns:a="http://schemas.openxmlformats.org/drawingml/2006/main">
+            <a:r>
+              <a:t>Lab: labs/07_agents_sdk_evaluation.ipynb</a:t>
             </a:r>
           </a:p>
         </p:txBody>
@@ -716,12 +1113,57 @@
           </a:p>
           <a:p xmlns:a="http://schemas.openxmlformats.org/drawingml/2006/main">
             <a:r>
+              <a:t>Edition: 2026-09-09</a:t>
+            </a:r>
+          </a:p>
+          <a:p xmlns:a="http://schemas.openxmlformats.org/drawingml/2006/main">
+            <a:r>
+              <a:t/>
+            </a:r>
+          </a:p>
+          <a:p xmlns:a="http://schemas.openxmlformats.org/drawingml/2006/main">
+            <a:r>
               <a:t>[Sources]</a:t>
             </a:r>
           </a:p>
           <a:p xmlns:a="http://schemas.openxmlformats.org/drawingml/2006/main">
             <a:r>
-              <a:t>- Supplied source presentation: 11-evaluation-observability.pdf</a:t>
+              <a:t>- Original source presentation: 11-evaluation-observability.pdf</a:t>
+            </a:r>
+          </a:p>
+          <a:p xmlns:a="http://schemas.openxmlformats.org/drawingml/2006/main">
+            <a:r>
+              <a:t>- P3: Would this change your answer?. Anthropic/Fellows preprint, arXiv v1, 2026-08-17. https://arxiv.org/abs/2608.16747 CHIVE tests counterfactual prompt changes. Generated explanations remain hypotheses. Official post: August 21.</a:t>
+            </a:r>
+          </a:p>
+          <a:p xmlns:a="http://schemas.openxmlformats.org/drawingml/2006/main">
+            <a:r>
+              <a:t>- R2: How enabling two settings tripled our scores on the ARC-AGI-3 benchmark. OpenAI research post, 2026-07-29. https://openai.com/index/how-two-settings-tripled-our-arc-agi-3-scores/ A specific harness experiment. Its result does not estimate the effect of context changes in Gemini.</a:t>
+            </a:r>
+          </a:p>
+          <a:p xmlns:a="http://schemas.openxmlformats.org/drawingml/2006/main">
+            <a:r>
+              <a:t/>
+            </a:r>
+          </a:p>
+          <a:p xmlns:a="http://schemas.openxmlformats.org/drawingml/2006/main">
+            <a:r>
+              <a:t>[Assessed practice]</a:t>
+            </a:r>
+          </a:p>
+          <a:p xmlns:a="http://schemas.openxmlformats.org/drawingml/2006/main">
+            <a:r>
+              <a:t>Run the offline evaluation command, inspect its JSONL records, and test the failure path. For live inference, predeclare a model and budget before using the held-out split.</a:t>
+            </a:r>
+          </a:p>
+          <a:p xmlns:a="http://schemas.openxmlformats.org/drawingml/2006/main">
+            <a:r>
+              <a:t>Acceptance: A fresh rerun produces a manifest and one record per attempted case. Interrupted or failed requests do not disappear from the denominator.</a:t>
+            </a:r>
+          </a:p>
+          <a:p xmlns:a="http://schemas.openxmlformats.org/drawingml/2006/main">
+            <a:r>
+              <a:t>Lab: labs/07_agents_sdk_evaluation.ipynb</a:t>
             </a:r>
           </a:p>
         </p:txBody>
@@ -801,12 +1243,57 @@
           </a:p>
           <a:p xmlns:a="http://schemas.openxmlformats.org/drawingml/2006/main">
             <a:r>
+              <a:t>Edition: 2026-09-09</a:t>
+            </a:r>
+          </a:p>
+          <a:p xmlns:a="http://schemas.openxmlformats.org/drawingml/2006/main">
+            <a:r>
+              <a:t/>
+            </a:r>
+          </a:p>
+          <a:p xmlns:a="http://schemas.openxmlformats.org/drawingml/2006/main">
+            <a:r>
               <a:t>[Sources]</a:t>
             </a:r>
           </a:p>
           <a:p xmlns:a="http://schemas.openxmlformats.org/drawingml/2006/main">
             <a:r>
-              <a:t>- Supplied source presentation: 11-evaluation-observability.pdf</a:t>
+              <a:t>- Original source presentation: 11-evaluation-observability.pdf</a:t>
+            </a:r>
+          </a:p>
+          <a:p xmlns:a="http://schemas.openxmlformats.org/drawingml/2006/main">
+            <a:r>
+              <a:t>- P3: Would this change your answer?. Anthropic/Fellows preprint, arXiv v1, 2026-08-17. https://arxiv.org/abs/2608.16747 CHIVE tests counterfactual prompt changes. Generated explanations remain hypotheses. Official post: August 21.</a:t>
+            </a:r>
+          </a:p>
+          <a:p xmlns:a="http://schemas.openxmlformats.org/drawingml/2006/main">
+            <a:r>
+              <a:t>- R2: How enabling two settings tripled our scores on the ARC-AGI-3 benchmark. OpenAI research post, 2026-07-29. https://openai.com/index/how-two-settings-tripled-our-arc-agi-3-scores/ A specific harness experiment. Its result does not estimate the effect of context changes in Gemini.</a:t>
+            </a:r>
+          </a:p>
+          <a:p xmlns:a="http://schemas.openxmlformats.org/drawingml/2006/main">
+            <a:r>
+              <a:t/>
+            </a:r>
+          </a:p>
+          <a:p xmlns:a="http://schemas.openxmlformats.org/drawingml/2006/main">
+            <a:r>
+              <a:t>[Assessed practice]</a:t>
+            </a:r>
+          </a:p>
+          <a:p xmlns:a="http://schemas.openxmlformats.org/drawingml/2006/main">
+            <a:r>
+              <a:t>Run the offline evaluation command, inspect its JSONL records, and test the failure path. For live inference, predeclare a model and budget before using the held-out split.</a:t>
+            </a:r>
+          </a:p>
+          <a:p xmlns:a="http://schemas.openxmlformats.org/drawingml/2006/main">
+            <a:r>
+              <a:t>Acceptance: A fresh rerun produces a manifest and one record per attempted case. Interrupted or failed requests do not disappear from the denominator.</a:t>
+            </a:r>
+          </a:p>
+          <a:p xmlns:a="http://schemas.openxmlformats.org/drawingml/2006/main">
+            <a:r>
+              <a:t>Lab: labs/07_agents_sdk_evaluation.ipynb</a:t>
             </a:r>
           </a:p>
         </p:txBody>
@@ -886,12 +1373,57 @@
           </a:p>
           <a:p xmlns:a="http://schemas.openxmlformats.org/drawingml/2006/main">
             <a:r>
+              <a:t>Edition: 2026-09-09</a:t>
+            </a:r>
+          </a:p>
+          <a:p xmlns:a="http://schemas.openxmlformats.org/drawingml/2006/main">
+            <a:r>
+              <a:t/>
+            </a:r>
+          </a:p>
+          <a:p xmlns:a="http://schemas.openxmlformats.org/drawingml/2006/main">
+            <a:r>
               <a:t>[Sources]</a:t>
             </a:r>
           </a:p>
           <a:p xmlns:a="http://schemas.openxmlformats.org/drawingml/2006/main">
             <a:r>
-              <a:t>- Supplied source presentation: 11-evaluation-observability.pdf</a:t>
+              <a:t>- Original source presentation: 11-evaluation-observability.pdf</a:t>
+            </a:r>
+          </a:p>
+          <a:p xmlns:a="http://schemas.openxmlformats.org/drawingml/2006/main">
+            <a:r>
+              <a:t>- P3: Would this change your answer?. Anthropic/Fellows preprint, arXiv v1, 2026-08-17. https://arxiv.org/abs/2608.16747 CHIVE tests counterfactual prompt changes. Generated explanations remain hypotheses. Official post: August 21.</a:t>
+            </a:r>
+          </a:p>
+          <a:p xmlns:a="http://schemas.openxmlformats.org/drawingml/2006/main">
+            <a:r>
+              <a:t>- R2: How enabling two settings tripled our scores on the ARC-AGI-3 benchmark. OpenAI research post, 2026-07-29. https://openai.com/index/how-two-settings-tripled-our-arc-agi-3-scores/ A specific harness experiment. Its result does not estimate the effect of context changes in Gemini.</a:t>
+            </a:r>
+          </a:p>
+          <a:p xmlns:a="http://schemas.openxmlformats.org/drawingml/2006/main">
+            <a:r>
+              <a:t/>
+            </a:r>
+          </a:p>
+          <a:p xmlns:a="http://schemas.openxmlformats.org/drawingml/2006/main">
+            <a:r>
+              <a:t>[Assessed practice]</a:t>
+            </a:r>
+          </a:p>
+          <a:p xmlns:a="http://schemas.openxmlformats.org/drawingml/2006/main">
+            <a:r>
+              <a:t>Run the offline evaluation command, inspect its JSONL records, and test the failure path. For live inference, predeclare a model and budget before using the held-out split.</a:t>
+            </a:r>
+          </a:p>
+          <a:p xmlns:a="http://schemas.openxmlformats.org/drawingml/2006/main">
+            <a:r>
+              <a:t>Acceptance: A fresh rerun produces a manifest and one record per attempted case. Interrupted or failed requests do not disappear from the denominator.</a:t>
+            </a:r>
+          </a:p>
+          <a:p xmlns:a="http://schemas.openxmlformats.org/drawingml/2006/main">
+            <a:r>
+              <a:t>Lab: labs/07_agents_sdk_evaluation.ipynb</a:t>
             </a:r>
           </a:p>
         </p:txBody>
@@ -971,12 +1503,57 @@
           </a:p>
           <a:p xmlns:a="http://schemas.openxmlformats.org/drawingml/2006/main">
             <a:r>
+              <a:t>Edition: 2026-09-09</a:t>
+            </a:r>
+          </a:p>
+          <a:p xmlns:a="http://schemas.openxmlformats.org/drawingml/2006/main">
+            <a:r>
+              <a:t/>
+            </a:r>
+          </a:p>
+          <a:p xmlns:a="http://schemas.openxmlformats.org/drawingml/2006/main">
+            <a:r>
               <a:t>[Sources]</a:t>
             </a:r>
           </a:p>
           <a:p xmlns:a="http://schemas.openxmlformats.org/drawingml/2006/main">
             <a:r>
-              <a:t>- Supplied source presentation: 11-evaluation-observability.pdf</a:t>
+              <a:t>- Original source presentation: 11-evaluation-observability.pdf</a:t>
+            </a:r>
+          </a:p>
+          <a:p xmlns:a="http://schemas.openxmlformats.org/drawingml/2006/main">
+            <a:r>
+              <a:t>- P3: Would this change your answer?. Anthropic/Fellows preprint, arXiv v1, 2026-08-17. https://arxiv.org/abs/2608.16747 CHIVE tests counterfactual prompt changes. Generated explanations remain hypotheses. Official post: August 21.</a:t>
+            </a:r>
+          </a:p>
+          <a:p xmlns:a="http://schemas.openxmlformats.org/drawingml/2006/main">
+            <a:r>
+              <a:t>- R2: How enabling two settings tripled our scores on the ARC-AGI-3 benchmark. OpenAI research post, 2026-07-29. https://openai.com/index/how-two-settings-tripled-our-arc-agi-3-scores/ A specific harness experiment. Its result does not estimate the effect of context changes in Gemini.</a:t>
+            </a:r>
+          </a:p>
+          <a:p xmlns:a="http://schemas.openxmlformats.org/drawingml/2006/main">
+            <a:r>
+              <a:t/>
+            </a:r>
+          </a:p>
+          <a:p xmlns:a="http://schemas.openxmlformats.org/drawingml/2006/main">
+            <a:r>
+              <a:t>[Assessed practice]</a:t>
+            </a:r>
+          </a:p>
+          <a:p xmlns:a="http://schemas.openxmlformats.org/drawingml/2006/main">
+            <a:r>
+              <a:t>Run the offline evaluation command, inspect its JSONL records, and test the failure path. For live inference, predeclare a model and budget before using the held-out split.</a:t>
+            </a:r>
+          </a:p>
+          <a:p xmlns:a="http://schemas.openxmlformats.org/drawingml/2006/main">
+            <a:r>
+              <a:t>Acceptance: A fresh rerun produces a manifest and one record per attempted case. Interrupted or failed requests do not disappear from the denominator.</a:t>
+            </a:r>
+          </a:p>
+          <a:p xmlns:a="http://schemas.openxmlformats.org/drawingml/2006/main">
+            <a:r>
+              <a:t>Lab: labs/07_agents_sdk_evaluation.ipynb</a:t>
             </a:r>
           </a:p>
         </p:txBody>
@@ -1056,12 +1633,57 @@
           </a:p>
           <a:p xmlns:a="http://schemas.openxmlformats.org/drawingml/2006/main">
             <a:r>
+              <a:t>Edition: 2026-09-09</a:t>
+            </a:r>
+          </a:p>
+          <a:p xmlns:a="http://schemas.openxmlformats.org/drawingml/2006/main">
+            <a:r>
+              <a:t/>
+            </a:r>
+          </a:p>
+          <a:p xmlns:a="http://schemas.openxmlformats.org/drawingml/2006/main">
+            <a:r>
               <a:t>[Sources]</a:t>
             </a:r>
           </a:p>
           <a:p xmlns:a="http://schemas.openxmlformats.org/drawingml/2006/main">
             <a:r>
-              <a:t>- Supplied source presentation: 11-evaluation-observability.pdf</a:t>
+              <a:t>- Original source presentation: 11-evaluation-observability.pdf</a:t>
+            </a:r>
+          </a:p>
+          <a:p xmlns:a="http://schemas.openxmlformats.org/drawingml/2006/main">
+            <a:r>
+              <a:t>- P3: Would this change your answer?. Anthropic/Fellows preprint, arXiv v1, 2026-08-17. https://arxiv.org/abs/2608.16747 CHIVE tests counterfactual prompt changes. Generated explanations remain hypotheses. Official post: August 21.</a:t>
+            </a:r>
+          </a:p>
+          <a:p xmlns:a="http://schemas.openxmlformats.org/drawingml/2006/main">
+            <a:r>
+              <a:t>- R2: How enabling two settings tripled our scores on the ARC-AGI-3 benchmark. OpenAI research post, 2026-07-29. https://openai.com/index/how-two-settings-tripled-our-arc-agi-3-scores/ A specific harness experiment. Its result does not estimate the effect of context changes in Gemini.</a:t>
+            </a:r>
+          </a:p>
+          <a:p xmlns:a="http://schemas.openxmlformats.org/drawingml/2006/main">
+            <a:r>
+              <a:t/>
+            </a:r>
+          </a:p>
+          <a:p xmlns:a="http://schemas.openxmlformats.org/drawingml/2006/main">
+            <a:r>
+              <a:t>[Assessed practice]</a:t>
+            </a:r>
+          </a:p>
+          <a:p xmlns:a="http://schemas.openxmlformats.org/drawingml/2006/main">
+            <a:r>
+              <a:t>Run the offline evaluation command, inspect its JSONL records, and test the failure path. For live inference, predeclare a model and budget before using the held-out split.</a:t>
+            </a:r>
+          </a:p>
+          <a:p xmlns:a="http://schemas.openxmlformats.org/drawingml/2006/main">
+            <a:r>
+              <a:t>Acceptance: A fresh rerun produces a manifest and one record per attempted case. Interrupted or failed requests do not disappear from the denominator.</a:t>
+            </a:r>
+          </a:p>
+          <a:p xmlns:a="http://schemas.openxmlformats.org/drawingml/2006/main">
+            <a:r>
+              <a:t>Lab: labs/07_agents_sdk_evaluation.ipynb</a:t>
             </a:r>
           </a:p>
         </p:txBody>
@@ -1141,12 +1763,57 @@
           </a:p>
           <a:p xmlns:a="http://schemas.openxmlformats.org/drawingml/2006/main">
             <a:r>
+              <a:t>Edition: 2026-09-09</a:t>
+            </a:r>
+          </a:p>
+          <a:p xmlns:a="http://schemas.openxmlformats.org/drawingml/2006/main">
+            <a:r>
+              <a:t/>
+            </a:r>
+          </a:p>
+          <a:p xmlns:a="http://schemas.openxmlformats.org/drawingml/2006/main">
+            <a:r>
               <a:t>[Sources]</a:t>
             </a:r>
           </a:p>
           <a:p xmlns:a="http://schemas.openxmlformats.org/drawingml/2006/main">
             <a:r>
-              <a:t>- Supplied source presentation: 11-evaluation-observability.pdf</a:t>
+              <a:t>- Original source presentation: 11-evaluation-observability.pdf</a:t>
+            </a:r>
+          </a:p>
+          <a:p xmlns:a="http://schemas.openxmlformats.org/drawingml/2006/main">
+            <a:r>
+              <a:t>- P3: Would this change your answer?. Anthropic/Fellows preprint, arXiv v1, 2026-08-17. https://arxiv.org/abs/2608.16747 CHIVE tests counterfactual prompt changes. Generated explanations remain hypotheses. Official post: August 21.</a:t>
+            </a:r>
+          </a:p>
+          <a:p xmlns:a="http://schemas.openxmlformats.org/drawingml/2006/main">
+            <a:r>
+              <a:t>- R2: How enabling two settings tripled our scores on the ARC-AGI-3 benchmark. OpenAI research post, 2026-07-29. https://openai.com/index/how-two-settings-tripled-our-arc-agi-3-scores/ A specific harness experiment. Its result does not estimate the effect of context changes in Gemini.</a:t>
+            </a:r>
+          </a:p>
+          <a:p xmlns:a="http://schemas.openxmlformats.org/drawingml/2006/main">
+            <a:r>
+              <a:t/>
+            </a:r>
+          </a:p>
+          <a:p xmlns:a="http://schemas.openxmlformats.org/drawingml/2006/main">
+            <a:r>
+              <a:t>[Assessed practice]</a:t>
+            </a:r>
+          </a:p>
+          <a:p xmlns:a="http://schemas.openxmlformats.org/drawingml/2006/main">
+            <a:r>
+              <a:t>Run the offline evaluation command, inspect its JSONL records, and test the failure path. For live inference, predeclare a model and budget before using the held-out split.</a:t>
+            </a:r>
+          </a:p>
+          <a:p xmlns:a="http://schemas.openxmlformats.org/drawingml/2006/main">
+            <a:r>
+              <a:t>Acceptance: A fresh rerun produces a manifest and one record per attempted case. Interrupted or failed requests do not disappear from the denominator.</a:t>
+            </a:r>
+          </a:p>
+          <a:p xmlns:a="http://schemas.openxmlformats.org/drawingml/2006/main">
+            <a:r>
+              <a:t>Lab: labs/07_agents_sdk_evaluation.ipynb</a:t>
             </a:r>
           </a:p>
         </p:txBody>
@@ -1216,7 +1883,7 @@
           <a:lstStyle xmlns:a="http://schemas.openxmlformats.org/drawingml/2006/main"/>
           <a:p xmlns:a="http://schemas.openxmlformats.org/drawingml/2006/main">
             <a:r>
-              <a:t>Use as retrieval practice. Ask for an answer that defines, compares, traces, and evaluates.</a:t>
+              <a:t>Explain the claim first, then use the numbered points as evidence and design consequences.</a:t>
             </a:r>
           </a:p>
           <a:p xmlns:a="http://schemas.openxmlformats.org/drawingml/2006/main">
@@ -1226,12 +1893,57 @@
           </a:p>
           <a:p xmlns:a="http://schemas.openxmlformats.org/drawingml/2006/main">
             <a:r>
+              <a:t>Edition: 2026-09-09</a:t>
+            </a:r>
+          </a:p>
+          <a:p xmlns:a="http://schemas.openxmlformats.org/drawingml/2006/main">
+            <a:r>
+              <a:t/>
+            </a:r>
+          </a:p>
+          <a:p xmlns:a="http://schemas.openxmlformats.org/drawingml/2006/main">
+            <a:r>
               <a:t>[Sources]</a:t>
             </a:r>
           </a:p>
           <a:p xmlns:a="http://schemas.openxmlformats.org/drawingml/2006/main">
             <a:r>
-              <a:t>- Supplied source presentation: 11-evaluation-observability.pdf</a:t>
+              <a:t>- Original source presentation: 11-evaluation-observability.pdf</a:t>
+            </a:r>
+          </a:p>
+          <a:p xmlns:a="http://schemas.openxmlformats.org/drawingml/2006/main">
+            <a:r>
+              <a:t>- P3: Would this change your answer?. Anthropic/Fellows preprint, arXiv v1, 2026-08-17. https://arxiv.org/abs/2608.16747 CHIVE tests counterfactual prompt changes. Generated explanations remain hypotheses. Official post: August 21.</a:t>
+            </a:r>
+          </a:p>
+          <a:p xmlns:a="http://schemas.openxmlformats.org/drawingml/2006/main">
+            <a:r>
+              <a:t>- R2: How enabling two settings tripled our scores on the ARC-AGI-3 benchmark. OpenAI research post, 2026-07-29. https://openai.com/index/how-two-settings-tripled-our-arc-agi-3-scores/ A specific harness experiment. Its result does not estimate the effect of context changes in Gemini.</a:t>
+            </a:r>
+          </a:p>
+          <a:p xmlns:a="http://schemas.openxmlformats.org/drawingml/2006/main">
+            <a:r>
+              <a:t/>
+            </a:r>
+          </a:p>
+          <a:p xmlns:a="http://schemas.openxmlformats.org/drawingml/2006/main">
+            <a:r>
+              <a:t>[Assessed practice]</a:t>
+            </a:r>
+          </a:p>
+          <a:p xmlns:a="http://schemas.openxmlformats.org/drawingml/2006/main">
+            <a:r>
+              <a:t>Run the offline evaluation command, inspect its JSONL records, and test the failure path. For live inference, predeclare a model and budget before using the held-out split.</a:t>
+            </a:r>
+          </a:p>
+          <a:p xmlns:a="http://schemas.openxmlformats.org/drawingml/2006/main">
+            <a:r>
+              <a:t>Acceptance: A fresh rerun produces a manifest and one record per attempted case. Interrupted or failed requests do not disappear from the denominator.</a:t>
+            </a:r>
+          </a:p>
+          <a:p xmlns:a="http://schemas.openxmlformats.org/drawingml/2006/main">
+            <a:r>
+              <a:t>Lab: labs/07_agents_sdk_evaluation.ipynb</a:t>
             </a:r>
           </a:p>
         </p:txBody>
@@ -1299,7 +2011,7 @@
   </p:cSld>
   <p:clrMap bg1="lt1" tx1="dk1" bg2="lt2" tx2="dk2" accent1="accent1" accent2="accent2" accent3="accent3" accent4="accent4" accent5="accent5" accent6="accent6" hlink="hlink" folHlink="folHlink"/>
   <p:sldLayoutIdLst>
-    <p:sldLayoutId xmlns:r="http://schemas.openxmlformats.org/officeDocument/2006/relationships" id="2147483649" r:id="Rb3175d46cd6649ef"/>
+    <p:sldLayoutId xmlns:r="http://schemas.openxmlformats.org/officeDocument/2006/relationships" id="2147483649" r:id="Rb2e052c004684e13"/>
   </p:sldLayoutIdLst>
   <p:txStyles>
     <p:titleStyle>
@@ -1850,7 +2562,7 @@
           <p:cNvPr id="8" name="title-accent">
             <a:extLst xmlns:a="http://schemas.openxmlformats.org/drawingml/2006/main">
               <a:ext uri="{FF2B5EF4-FFF2-40B4-BE49-F238E27FC236}">
-                <a16:creationId xmlns:a16="http://schemas.microsoft.com/office/drawing/2014/main" id="{66C865BE-FA4D-4EB4-8B7C-CC95FDCB5BAC}"/>
+                <a16:creationId xmlns:a16="http://schemas.microsoft.com/office/drawing/2014/main" id="{3D838D4D-D2AF-436B-9CA1-5A9BAA4B59CE}"/>
               </a:ext>
             </a:extLst>
           </p:cNvPr>
@@ -1883,7 +2595,7 @@
           <p:cNvPr id="2" name="course-title">
             <a:extLst xmlns:a="http://schemas.openxmlformats.org/drawingml/2006/main">
               <a:ext uri="{FF2B5EF4-FFF2-40B4-BE49-F238E27FC236}">
-                <a16:creationId xmlns:a16="http://schemas.microsoft.com/office/drawing/2014/main" id="{032EFBBB-3F2B-437C-99F6-3627771B9D2E}"/>
+                <a16:creationId xmlns:a16="http://schemas.microsoft.com/office/drawing/2014/main" id="{0CF7D7E9-E671-4022-ACF8-B1137091DB6F}"/>
               </a:ext>
             </a:extLst>
           </p:cNvPr>
@@ -1941,7 +2653,7 @@
           <p:cNvPr id="3" name="chapter-number">
             <a:extLst xmlns:a="http://schemas.openxmlformats.org/drawingml/2006/main">
               <a:ext uri="{FF2B5EF4-FFF2-40B4-BE49-F238E27FC236}">
-                <a16:creationId xmlns:a16="http://schemas.microsoft.com/office/drawing/2014/main" id="{919B365D-6E97-4155-A9D5-AED8327B4C67}"/>
+                <a16:creationId xmlns:a16="http://schemas.microsoft.com/office/drawing/2014/main" id="{3F51D450-367D-4C73-83DB-248496C31ADC}"/>
               </a:ext>
             </a:extLst>
           </p:cNvPr>
@@ -1999,7 +2711,7 @@
           <p:cNvPr id="4" name="deck-title">
             <a:extLst xmlns:a="http://schemas.openxmlformats.org/drawingml/2006/main">
               <a:ext uri="{FF2B5EF4-FFF2-40B4-BE49-F238E27FC236}">
-                <a16:creationId xmlns:a16="http://schemas.microsoft.com/office/drawing/2014/main" id="{5E4AFF9D-BECD-41FC-9CFC-234B30F130FC}"/>
+                <a16:creationId xmlns:a16="http://schemas.microsoft.com/office/drawing/2014/main" id="{74D262AA-1949-47F6-AE95-BA523B51BD68}"/>
               </a:ext>
             </a:extLst>
           </p:cNvPr>
@@ -2057,7 +2769,7 @@
           <p:cNvPr id="5" name="deck-thesis">
             <a:extLst xmlns:a="http://schemas.openxmlformats.org/drawingml/2006/main">
               <a:ext uri="{FF2B5EF4-FFF2-40B4-BE49-F238E27FC236}">
-                <a16:creationId xmlns:a16="http://schemas.microsoft.com/office/drawing/2014/main" id="{DC0624A5-DFC0-429F-99B7-6EAA64658952}"/>
+                <a16:creationId xmlns:a16="http://schemas.microsoft.com/office/drawing/2014/main" id="{311FC417-471C-418C-98D7-6CF6B212556C}"/>
               </a:ext>
             </a:extLst>
           </p:cNvPr>
@@ -2115,7 +2827,7 @@
           <p:cNvPr id="6" name="title-marker">
             <a:extLst xmlns:a="http://schemas.openxmlformats.org/drawingml/2006/main">
               <a:ext uri="{FF2B5EF4-FFF2-40B4-BE49-F238E27FC236}">
-                <a16:creationId xmlns:a16="http://schemas.microsoft.com/office/drawing/2014/main" id="{445AB2AC-2605-4F55-B8C2-E829AC6E0196}"/>
+                <a16:creationId xmlns:a16="http://schemas.microsoft.com/office/drawing/2014/main" id="{AA67A7D3-D125-4D04-86FA-2E8E914A3E5D}"/>
               </a:ext>
             </a:extLst>
           </p:cNvPr>
@@ -2148,7 +2860,7 @@
           <p:cNvPr id="7" name="title-marker-text">
             <a:extLst xmlns:a="http://schemas.openxmlformats.org/drawingml/2006/main">
               <a:ext uri="{FF2B5EF4-FFF2-40B4-BE49-F238E27FC236}">
-                <a16:creationId xmlns:a16="http://schemas.microsoft.com/office/drawing/2014/main" id="{31A90530-99C7-4CAE-AB31-4D185EE00A36}"/>
+                <a16:creationId xmlns:a16="http://schemas.microsoft.com/office/drawing/2014/main" id="{5EEC9F25-4B9C-4534-A0D7-4898CAEA3108}"/>
               </a:ext>
             </a:extLst>
           </p:cNvPr>
@@ -2227,7 +2939,7 @@
     </p:spTree>
     <p:extLst>
       <p:ext uri="{BB962C8B-B14F-4D97-AF65-F5344CB8AC3E}">
-        <p14:creationId xmlns:p14="http://schemas.microsoft.com/office/powerpoint/2010/main" val="1866412840"/>
+        <p14:creationId xmlns:p14="http://schemas.microsoft.com/office/powerpoint/2010/main" val="775656463"/>
       </p:ext>
     </p:extLst>
   </p:cSld>
@@ -2235,6 +2947,996 @@
 </file>
 
 <file path=ppt/slides/slide10.xml><?xml version="1.0" encoding="utf-8"?>
+<p:sld xmlns:p="http://schemas.openxmlformats.org/presentationml/2006/main">
+  <p:cSld>
+    <p:bg>
+      <p:bgPr>
+        <a:solidFill xmlns:a="http://schemas.openxmlformats.org/drawingml/2006/main">
+          <a:srgbClr val="FFFFFF"/>
+        </a:solidFill>
+      </p:bgPr>
+    </p:bg>
+    <p:spTree>
+      <p:nvGrpSpPr>
+        <p:cNvPr id="1" name=""/>
+        <p:cNvGrpSpPr/>
+        <p:nvPr/>
+      </p:nvGrpSpPr>
+      <p:grpSpPr>
+        <a:xfrm xmlns:a="http://schemas.openxmlformats.org/drawingml/2006/main"/>
+      </p:grpSpPr>
+      <p:sp>
+        <p:nvSpPr>
+          <p:cNvPr id="18" name="accent-line">
+            <a:extLst xmlns:a="http://schemas.openxmlformats.org/drawingml/2006/main">
+              <a:ext uri="{FF2B5EF4-FFF2-40B4-BE49-F238E27FC236}">
+                <a16:creationId xmlns:a16="http://schemas.microsoft.com/office/drawing/2014/main" id="{439E0233-68DA-4916-B697-E873AACCF2C5}"/>
+              </a:ext>
+            </a:extLst>
+          </p:cNvPr>
+          <p:cNvSpPr>
+            <a:spLocks xmlns:a="http://schemas.openxmlformats.org/drawingml/2006/main" noGrp="1"/>
+          </p:cNvSpPr>
+          <p:nvPr/>
+        </p:nvSpPr>
+        <p:spPr>
+          <a:xfrm xmlns:a="http://schemas.openxmlformats.org/drawingml/2006/main">
+            <a:off x="390525" y="304800"/>
+            <a:ext cx="11410950" cy="66675"/>
+          </a:xfrm>
+          <a:prstGeom xmlns:a="http://schemas.openxmlformats.org/drawingml/2006/main" prst="rect">
+            <a:avLst/>
+          </a:prstGeom>
+          <a:solidFill xmlns:a="http://schemas.openxmlformats.org/drawingml/2006/main">
+            <a:srgbClr val="C4A1FF"/>
+          </a:solidFill>
+          <a:ln xmlns:a="http://schemas.openxmlformats.org/drawingml/2006/main" w="0">
+            <a:solidFill>
+              <a:srgbClr val="C4A1FF"/>
+            </a:solidFill>
+            <a:prstDash val="solid"/>
+          </a:ln>
+        </p:spPr>
+      </p:sp>
+      <p:sp>
+        <p:nvSpPr>
+          <p:cNvPr id="2" name="chapter-label">
+            <a:extLst xmlns:a="http://schemas.openxmlformats.org/drawingml/2006/main">
+              <a:ext uri="{FF2B5EF4-FFF2-40B4-BE49-F238E27FC236}">
+                <a16:creationId xmlns:a16="http://schemas.microsoft.com/office/drawing/2014/main" id="{4EDFFA63-856F-498F-97EA-A97B7B4B91E1}"/>
+              </a:ext>
+            </a:extLst>
+          </p:cNvPr>
+          <p:cNvSpPr>
+            <a:spLocks xmlns:a="http://schemas.openxmlformats.org/drawingml/2006/main" noGrp="1"/>
+          </p:cNvSpPr>
+          <p:nvPr/>
+        </p:nvSpPr>
+        <p:spPr>
+          <a:xfrm xmlns:a="http://schemas.openxmlformats.org/drawingml/2006/main">
+            <a:off x="390525" y="466725"/>
+            <a:ext cx="4953000" cy="323850"/>
+          </a:xfrm>
+          <a:prstGeom xmlns:a="http://schemas.openxmlformats.org/drawingml/2006/main" prst="rect">
+            <a:avLst/>
+          </a:prstGeom>
+          <a:noFill xmlns:a="http://schemas.openxmlformats.org/drawingml/2006/main"/>
+          <a:ln xmlns:a="http://schemas.openxmlformats.org/drawingml/2006/main" w="0">
+            <a:noFill/>
+            <a:prstDash val="solid"/>
+          </a:ln>
+        </p:spPr>
+        <p:txBody>
+          <a:bodyPr xmlns:a="http://schemas.openxmlformats.org/drawingml/2006/main" anchor="t">
+            <a:noAutofit/>
+          </a:bodyPr>
+          <a:lstStyle xmlns:a="http://schemas.openxmlformats.org/drawingml/2006/main"/>
+          <a:p xmlns:a="http://schemas.openxmlformats.org/drawingml/2006/main">
+            <a:pPr algn="l">
+              <a:defRPr sz="1275" b="1">
+                <a:solidFill>
+                  <a:srgbClr val="5B5B57"/>
+                </a:solidFill>
+                <a:latin typeface="Helvetica Neue"/>
+                <a:ea typeface="Helvetica Neue"/>
+                <a:cs typeface="Helvetica Neue"/>
+              </a:defRPr>
+            </a:pPr>
+            <a:r>
+              <a:rPr sz="1275" b="1">
+                <a:solidFill>
+                  <a:srgbClr val="5B5B57"/>
+                </a:solidFill>
+                <a:latin typeface="Helvetica Neue"/>
+                <a:ea typeface="Helvetica Neue"/>
+                <a:cs typeface="Helvetica Neue"/>
+              </a:rPr>
+              <a:t>EXAM CHECK  /  11</a:t>
+            </a:r>
+          </a:p>
+        </p:txBody>
+      </p:sp>
+      <p:sp>
+        <p:nvSpPr>
+          <p:cNvPr id="3" name="slide-number">
+            <a:extLst xmlns:a="http://schemas.openxmlformats.org/drawingml/2006/main">
+              <a:ext uri="{FF2B5EF4-FFF2-40B4-BE49-F238E27FC236}">
+                <a16:creationId xmlns:a16="http://schemas.microsoft.com/office/drawing/2014/main" id="{3EE6159A-4978-4A3E-88DC-5D5CFEEFB2BF}"/>
+              </a:ext>
+            </a:extLst>
+          </p:cNvPr>
+          <p:cNvSpPr>
+            <a:spLocks xmlns:a="http://schemas.openxmlformats.org/drawingml/2006/main" noGrp="1"/>
+          </p:cNvSpPr>
+          <p:nvPr/>
+        </p:nvSpPr>
+        <p:spPr>
+          <a:xfrm xmlns:a="http://schemas.openxmlformats.org/drawingml/2006/main">
+            <a:off x="11049000" y="6286500"/>
+            <a:ext cx="742950" cy="266700"/>
+          </a:xfrm>
+          <a:prstGeom xmlns:a="http://schemas.openxmlformats.org/drawingml/2006/main" prst="rect">
+            <a:avLst/>
+          </a:prstGeom>
+          <a:noFill xmlns:a="http://schemas.openxmlformats.org/drawingml/2006/main"/>
+          <a:ln xmlns:a="http://schemas.openxmlformats.org/drawingml/2006/main" w="0">
+            <a:noFill/>
+            <a:prstDash val="solid"/>
+          </a:ln>
+        </p:spPr>
+        <p:txBody>
+          <a:bodyPr xmlns:a="http://schemas.openxmlformats.org/drawingml/2006/main" anchor="t">
+            <a:noAutofit/>
+          </a:bodyPr>
+          <a:lstStyle xmlns:a="http://schemas.openxmlformats.org/drawingml/2006/main"/>
+          <a:p xmlns:a="http://schemas.openxmlformats.org/drawingml/2006/main">
+            <a:pPr algn="r">
+              <a:defRPr sz="1200" b="0">
+                <a:solidFill>
+                  <a:srgbClr val="5B5B57"/>
+                </a:solidFill>
+                <a:latin typeface="Helvetica Neue"/>
+                <a:ea typeface="Helvetica Neue"/>
+                <a:cs typeface="Helvetica Neue"/>
+              </a:defRPr>
+            </a:pPr>
+            <a:r>
+              <a:rPr sz="1200" b="0">
+                <a:solidFill>
+                  <a:srgbClr val="5B5B57"/>
+                </a:solidFill>
+                <a:latin typeface="Helvetica Neue"/>
+                <a:ea typeface="Helvetica Neue"/>
+                <a:cs typeface="Helvetica Neue"/>
+              </a:rPr>
+              <a:t>10</a:t>
+            </a:r>
+          </a:p>
+        </p:txBody>
+      </p:sp>
+      <p:sp>
+        <p:nvSpPr>
+          <p:cNvPr id="4" name="chapter-footer">
+            <a:extLst xmlns:a="http://schemas.openxmlformats.org/drawingml/2006/main">
+              <a:ext uri="{FF2B5EF4-FFF2-40B4-BE49-F238E27FC236}">
+                <a16:creationId xmlns:a16="http://schemas.microsoft.com/office/drawing/2014/main" id="{B041290A-B12B-4354-B2C0-30015250A68A}"/>
+              </a:ext>
+            </a:extLst>
+          </p:cNvPr>
+          <p:cNvSpPr>
+            <a:spLocks xmlns:a="http://schemas.openxmlformats.org/drawingml/2006/main" noGrp="1"/>
+          </p:cNvSpPr>
+          <p:nvPr/>
+        </p:nvSpPr>
+        <p:spPr>
+          <a:xfrm xmlns:a="http://schemas.openxmlformats.org/drawingml/2006/main">
+            <a:off x="390525" y="6286500"/>
+            <a:ext cx="8191500" cy="266700"/>
+          </a:xfrm>
+          <a:prstGeom xmlns:a="http://schemas.openxmlformats.org/drawingml/2006/main" prst="rect">
+            <a:avLst/>
+          </a:prstGeom>
+          <a:noFill xmlns:a="http://schemas.openxmlformats.org/drawingml/2006/main"/>
+          <a:ln xmlns:a="http://schemas.openxmlformats.org/drawingml/2006/main" w="0">
+            <a:noFill/>
+            <a:prstDash val="solid"/>
+          </a:ln>
+        </p:spPr>
+        <p:txBody>
+          <a:bodyPr xmlns:a="http://schemas.openxmlformats.org/drawingml/2006/main" anchor="t">
+            <a:noAutofit/>
+          </a:bodyPr>
+          <a:lstStyle xmlns:a="http://schemas.openxmlformats.org/drawingml/2006/main"/>
+          <a:p xmlns:a="http://schemas.openxmlformats.org/drawingml/2006/main">
+            <a:pPr algn="l">
+              <a:defRPr sz="1125" b="0">
+                <a:solidFill>
+                  <a:srgbClr val="5B5B57"/>
+                </a:solidFill>
+                <a:latin typeface="Helvetica Neue"/>
+                <a:ea typeface="Helvetica Neue"/>
+                <a:cs typeface="Helvetica Neue"/>
+              </a:defRPr>
+            </a:pPr>
+            <a:r>
+              <a:rPr sz="1125" b="0">
+                <a:solidFill>
+                  <a:srgbClr val="5B5B57"/>
+                </a:solidFill>
+                <a:latin typeface="Helvetica Neue"/>
+                <a:ea typeface="Helvetica Neue"/>
+                <a:cs typeface="Helvetica Neue"/>
+              </a:rPr>
+              <a:t>Evaluation and Observability</a:t>
+            </a:r>
+          </a:p>
+        </p:txBody>
+      </p:sp>
+      <p:sp>
+        <p:nvSpPr>
+          <p:cNvPr id="5" name="exam-title">
+            <a:extLst xmlns:a="http://schemas.openxmlformats.org/drawingml/2006/main">
+              <a:ext uri="{FF2B5EF4-FFF2-40B4-BE49-F238E27FC236}">
+                <a16:creationId xmlns:a16="http://schemas.microsoft.com/office/drawing/2014/main" id="{1CD7881E-2511-408B-B5CC-6BD49778FAC7}"/>
+              </a:ext>
+            </a:extLst>
+          </p:cNvPr>
+          <p:cNvSpPr>
+            <a:spLocks xmlns:a="http://schemas.openxmlformats.org/drawingml/2006/main" noGrp="1"/>
+          </p:cNvSpPr>
+          <p:nvPr/>
+        </p:nvSpPr>
+        <p:spPr>
+          <a:xfrm xmlns:a="http://schemas.openxmlformats.org/drawingml/2006/main">
+            <a:off x="390525" y="981075"/>
+            <a:ext cx="10668000" cy="781050"/>
+          </a:xfrm>
+          <a:prstGeom xmlns:a="http://schemas.openxmlformats.org/drawingml/2006/main" prst="rect">
+            <a:avLst/>
+          </a:prstGeom>
+          <a:noFill xmlns:a="http://schemas.openxmlformats.org/drawingml/2006/main"/>
+          <a:ln xmlns:a="http://schemas.openxmlformats.org/drawingml/2006/main" w="0">
+            <a:noFill/>
+            <a:prstDash val="solid"/>
+          </a:ln>
+        </p:spPr>
+        <p:txBody>
+          <a:bodyPr xmlns:a="http://schemas.openxmlformats.org/drawingml/2006/main" anchor="t">
+            <a:noAutofit/>
+          </a:bodyPr>
+          <a:lstStyle xmlns:a="http://schemas.openxmlformats.org/drawingml/2006/main"/>
+          <a:p xmlns:a="http://schemas.openxmlformats.org/drawingml/2006/main">
+            <a:pPr algn="l">
+              <a:defRPr sz="3150" b="1">
+                <a:solidFill>
+                  <a:srgbClr val="111111"/>
+                </a:solidFill>
+                <a:latin typeface="Helvetica Neue"/>
+                <a:ea typeface="Helvetica Neue"/>
+                <a:cs typeface="Helvetica Neue"/>
+              </a:defRPr>
+            </a:pPr>
+            <a:r>
+              <a:rPr sz="3150" b="1">
+                <a:solidFill>
+                  <a:srgbClr val="111111"/>
+                </a:solidFill>
+                <a:latin typeface="Helvetica Neue"/>
+                <a:ea typeface="Helvetica Neue"/>
+                <a:cs typeface="Helvetica Neue"/>
+              </a:rPr>
+              <a:t>Can you answer these without notes?</a:t>
+            </a:r>
+          </a:p>
+        </p:txBody>
+      </p:sp>
+      <p:sp>
+        <p:nvSpPr>
+          <p:cNvPr id="6" name="exam-number-1">
+            <a:extLst xmlns:a="http://schemas.openxmlformats.org/drawingml/2006/main">
+              <a:ext uri="{FF2B5EF4-FFF2-40B4-BE49-F238E27FC236}">
+                <a16:creationId xmlns:a16="http://schemas.microsoft.com/office/drawing/2014/main" id="{DE00FB34-E30A-4060-B881-2842D19B81EC}"/>
+              </a:ext>
+            </a:extLst>
+          </p:cNvPr>
+          <p:cNvSpPr>
+            <a:spLocks xmlns:a="http://schemas.openxmlformats.org/drawingml/2006/main" noGrp="1"/>
+          </p:cNvSpPr>
+          <p:nvPr/>
+        </p:nvSpPr>
+        <p:spPr>
+          <a:xfrm xmlns:a="http://schemas.openxmlformats.org/drawingml/2006/main">
+            <a:off x="390525" y="2238375"/>
+            <a:ext cx="590550" cy="400050"/>
+          </a:xfrm>
+          <a:prstGeom xmlns:a="http://schemas.openxmlformats.org/drawingml/2006/main" prst="rect">
+            <a:avLst/>
+          </a:prstGeom>
+          <a:noFill xmlns:a="http://schemas.openxmlformats.org/drawingml/2006/main"/>
+          <a:ln xmlns:a="http://schemas.openxmlformats.org/drawingml/2006/main" w="0">
+            <a:noFill/>
+            <a:prstDash val="solid"/>
+          </a:ln>
+        </p:spPr>
+        <p:txBody>
+          <a:bodyPr xmlns:a="http://schemas.openxmlformats.org/drawingml/2006/main" anchor="t">
+            <a:noAutofit/>
+          </a:bodyPr>
+          <a:lstStyle xmlns:a="http://schemas.openxmlformats.org/drawingml/2006/main"/>
+          <a:p xmlns:a="http://schemas.openxmlformats.org/drawingml/2006/main">
+            <a:pPr algn="l">
+              <a:defRPr sz="1725" b="1">
+                <a:solidFill>
+                  <a:srgbClr val="C4A1FF"/>
+                </a:solidFill>
+                <a:latin typeface="Helvetica Neue"/>
+                <a:ea typeface="Helvetica Neue"/>
+                <a:cs typeface="Helvetica Neue"/>
+              </a:defRPr>
+            </a:pPr>
+            <a:r>
+              <a:rPr sz="1725" b="1">
+                <a:solidFill>
+                  <a:srgbClr val="C4A1FF"/>
+                </a:solidFill>
+                <a:latin typeface="Helvetica Neue"/>
+                <a:ea typeface="Helvetica Neue"/>
+                <a:cs typeface="Helvetica Neue"/>
+              </a:rPr>
+              <a:t>01</a:t>
+            </a:r>
+          </a:p>
+        </p:txBody>
+      </p:sp>
+      <p:sp>
+        <p:nvSpPr>
+          <p:cNvPr id="7" name="exam-question-1">
+            <a:extLst xmlns:a="http://schemas.openxmlformats.org/drawingml/2006/main">
+              <a:ext uri="{FF2B5EF4-FFF2-40B4-BE49-F238E27FC236}">
+                <a16:creationId xmlns:a16="http://schemas.microsoft.com/office/drawing/2014/main" id="{D96C8362-B9A6-42D2-BD04-A52CD15CA266}"/>
+              </a:ext>
+            </a:extLst>
+          </p:cNvPr>
+          <p:cNvSpPr>
+            <a:spLocks xmlns:a="http://schemas.openxmlformats.org/drawingml/2006/main" noGrp="1"/>
+          </p:cNvSpPr>
+          <p:nvPr/>
+        </p:nvSpPr>
+        <p:spPr>
+          <a:xfrm xmlns:a="http://schemas.openxmlformats.org/drawingml/2006/main">
+            <a:off x="1076325" y="2238375"/>
+            <a:ext cx="4762500" cy="895350"/>
+          </a:xfrm>
+          <a:prstGeom xmlns:a="http://schemas.openxmlformats.org/drawingml/2006/main" prst="rect">
+            <a:avLst/>
+          </a:prstGeom>
+          <a:noFill xmlns:a="http://schemas.openxmlformats.org/drawingml/2006/main"/>
+          <a:ln xmlns:a="http://schemas.openxmlformats.org/drawingml/2006/main" w="0">
+            <a:noFill/>
+            <a:prstDash val="solid"/>
+          </a:ln>
+        </p:spPr>
+        <p:txBody>
+          <a:bodyPr xmlns:a="http://schemas.openxmlformats.org/drawingml/2006/main" anchor="t">
+            <a:normAutofit fontScale="100000"/>
+          </a:bodyPr>
+          <a:lstStyle xmlns:a="http://schemas.openxmlformats.org/drawingml/2006/main"/>
+          <a:p xmlns:a="http://schemas.openxmlformats.org/drawingml/2006/main">
+            <a:pPr algn="l">
+              <a:defRPr sz="1575" b="1">
+                <a:solidFill>
+                  <a:srgbClr val="111111"/>
+                </a:solidFill>
+                <a:latin typeface="Helvetica Neue"/>
+                <a:ea typeface="Helvetica Neue"/>
+                <a:cs typeface="Helvetica Neue"/>
+              </a:defRPr>
+            </a:pPr>
+            <a:r>
+              <a:rPr sz="1575" b="1">
+                <a:solidFill>
+                  <a:srgbClr val="111111"/>
+                </a:solidFill>
+                <a:latin typeface="Helvetica Neue"/>
+                <a:ea typeface="Helvetica Neue"/>
+                <a:cs typeface="Helvetica Neue"/>
+              </a:rPr>
+              <a:t>Why is agent evaluation harder than single-answer evaluation?</a:t>
+            </a:r>
+          </a:p>
+        </p:txBody>
+      </p:sp>
+      <p:sp>
+        <p:nvSpPr>
+          <p:cNvPr id="8" name="exam-number-2">
+            <a:extLst xmlns:a="http://schemas.openxmlformats.org/drawingml/2006/main">
+              <a:ext uri="{FF2B5EF4-FFF2-40B4-BE49-F238E27FC236}">
+                <a16:creationId xmlns:a16="http://schemas.microsoft.com/office/drawing/2014/main" id="{36CC090A-3911-4553-907D-A5EB2BC30A6B}"/>
+              </a:ext>
+            </a:extLst>
+          </p:cNvPr>
+          <p:cNvSpPr>
+            <a:spLocks xmlns:a="http://schemas.openxmlformats.org/drawingml/2006/main" noGrp="1"/>
+          </p:cNvSpPr>
+          <p:nvPr/>
+        </p:nvSpPr>
+        <p:spPr>
+          <a:xfrm xmlns:a="http://schemas.openxmlformats.org/drawingml/2006/main">
+            <a:off x="6191250" y="2238375"/>
+            <a:ext cx="590550" cy="400050"/>
+          </a:xfrm>
+          <a:prstGeom xmlns:a="http://schemas.openxmlformats.org/drawingml/2006/main" prst="rect">
+            <a:avLst/>
+          </a:prstGeom>
+          <a:noFill xmlns:a="http://schemas.openxmlformats.org/drawingml/2006/main"/>
+          <a:ln xmlns:a="http://schemas.openxmlformats.org/drawingml/2006/main" w="0">
+            <a:noFill/>
+            <a:prstDash val="solid"/>
+          </a:ln>
+        </p:spPr>
+        <p:txBody>
+          <a:bodyPr xmlns:a="http://schemas.openxmlformats.org/drawingml/2006/main" anchor="t">
+            <a:noAutofit/>
+          </a:bodyPr>
+          <a:lstStyle xmlns:a="http://schemas.openxmlformats.org/drawingml/2006/main"/>
+          <a:p xmlns:a="http://schemas.openxmlformats.org/drawingml/2006/main">
+            <a:pPr algn="l">
+              <a:defRPr sz="1725" b="1">
+                <a:solidFill>
+                  <a:srgbClr val="C4A1FF"/>
+                </a:solidFill>
+                <a:latin typeface="Helvetica Neue"/>
+                <a:ea typeface="Helvetica Neue"/>
+                <a:cs typeface="Helvetica Neue"/>
+              </a:defRPr>
+            </a:pPr>
+            <a:r>
+              <a:rPr sz="1725" b="1">
+                <a:solidFill>
+                  <a:srgbClr val="C4A1FF"/>
+                </a:solidFill>
+                <a:latin typeface="Helvetica Neue"/>
+                <a:ea typeface="Helvetica Neue"/>
+                <a:cs typeface="Helvetica Neue"/>
+              </a:rPr>
+              <a:t>02</a:t>
+            </a:r>
+          </a:p>
+        </p:txBody>
+      </p:sp>
+      <p:sp>
+        <p:nvSpPr>
+          <p:cNvPr id="9" name="exam-question-2">
+            <a:extLst xmlns:a="http://schemas.openxmlformats.org/drawingml/2006/main">
+              <a:ext uri="{FF2B5EF4-FFF2-40B4-BE49-F238E27FC236}">
+                <a16:creationId xmlns:a16="http://schemas.microsoft.com/office/drawing/2014/main" id="{70200F34-C3C5-4F34-8458-4EA6B9B08524}"/>
+              </a:ext>
+            </a:extLst>
+          </p:cNvPr>
+          <p:cNvSpPr>
+            <a:spLocks xmlns:a="http://schemas.openxmlformats.org/drawingml/2006/main" noGrp="1"/>
+          </p:cNvSpPr>
+          <p:nvPr/>
+        </p:nvSpPr>
+        <p:spPr>
+          <a:xfrm xmlns:a="http://schemas.openxmlformats.org/drawingml/2006/main">
+            <a:off x="6877050" y="2238375"/>
+            <a:ext cx="4762500" cy="895350"/>
+          </a:xfrm>
+          <a:prstGeom xmlns:a="http://schemas.openxmlformats.org/drawingml/2006/main" prst="rect">
+            <a:avLst/>
+          </a:prstGeom>
+          <a:noFill xmlns:a="http://schemas.openxmlformats.org/drawingml/2006/main"/>
+          <a:ln xmlns:a="http://schemas.openxmlformats.org/drawingml/2006/main" w="0">
+            <a:noFill/>
+            <a:prstDash val="solid"/>
+          </a:ln>
+        </p:spPr>
+        <p:txBody>
+          <a:bodyPr xmlns:a="http://schemas.openxmlformats.org/drawingml/2006/main" anchor="t">
+            <a:normAutofit fontScale="100000"/>
+          </a:bodyPr>
+          <a:lstStyle xmlns:a="http://schemas.openxmlformats.org/drawingml/2006/main"/>
+          <a:p xmlns:a="http://schemas.openxmlformats.org/drawingml/2006/main">
+            <a:pPr algn="l">
+              <a:defRPr sz="1575" b="1">
+                <a:solidFill>
+                  <a:srgbClr val="111111"/>
+                </a:solidFill>
+                <a:latin typeface="Helvetica Neue"/>
+                <a:ea typeface="Helvetica Neue"/>
+                <a:cs typeface="Helvetica Neue"/>
+              </a:defRPr>
+            </a:pPr>
+            <a:r>
+              <a:rPr sz="1575" b="1">
+                <a:solidFill>
+                  <a:srgbClr val="111111"/>
+                </a:solidFill>
+                <a:latin typeface="Helvetica Neue"/>
+                <a:ea typeface="Helvetica Neue"/>
+                <a:cs typeface="Helvetica Neue"/>
+              </a:rPr>
+              <a:t>Give four outcome metrics and four trajectory metrics.</a:t>
+            </a:r>
+          </a:p>
+        </p:txBody>
+      </p:sp>
+      <p:sp>
+        <p:nvSpPr>
+          <p:cNvPr id="10" name="exam-number-3">
+            <a:extLst xmlns:a="http://schemas.openxmlformats.org/drawingml/2006/main">
+              <a:ext uri="{FF2B5EF4-FFF2-40B4-BE49-F238E27FC236}">
+                <a16:creationId xmlns:a16="http://schemas.microsoft.com/office/drawing/2014/main" id="{95D18E55-C37B-4922-B4DF-9F76C385D902}"/>
+              </a:ext>
+            </a:extLst>
+          </p:cNvPr>
+          <p:cNvSpPr>
+            <a:spLocks xmlns:a="http://schemas.openxmlformats.org/drawingml/2006/main" noGrp="1"/>
+          </p:cNvSpPr>
+          <p:nvPr/>
+        </p:nvSpPr>
+        <p:spPr>
+          <a:xfrm xmlns:a="http://schemas.openxmlformats.org/drawingml/2006/main">
+            <a:off x="390525" y="3495675"/>
+            <a:ext cx="590550" cy="400050"/>
+          </a:xfrm>
+          <a:prstGeom xmlns:a="http://schemas.openxmlformats.org/drawingml/2006/main" prst="rect">
+            <a:avLst/>
+          </a:prstGeom>
+          <a:noFill xmlns:a="http://schemas.openxmlformats.org/drawingml/2006/main"/>
+          <a:ln xmlns:a="http://schemas.openxmlformats.org/drawingml/2006/main" w="0">
+            <a:noFill/>
+            <a:prstDash val="solid"/>
+          </a:ln>
+        </p:spPr>
+        <p:txBody>
+          <a:bodyPr xmlns:a="http://schemas.openxmlformats.org/drawingml/2006/main" anchor="t">
+            <a:noAutofit/>
+          </a:bodyPr>
+          <a:lstStyle xmlns:a="http://schemas.openxmlformats.org/drawingml/2006/main"/>
+          <a:p xmlns:a="http://schemas.openxmlformats.org/drawingml/2006/main">
+            <a:pPr algn="l">
+              <a:defRPr sz="1725" b="1">
+                <a:solidFill>
+                  <a:srgbClr val="C4A1FF"/>
+                </a:solidFill>
+                <a:latin typeface="Helvetica Neue"/>
+                <a:ea typeface="Helvetica Neue"/>
+                <a:cs typeface="Helvetica Neue"/>
+              </a:defRPr>
+            </a:pPr>
+            <a:r>
+              <a:rPr sz="1725" b="1">
+                <a:solidFill>
+                  <a:srgbClr val="C4A1FF"/>
+                </a:solidFill>
+                <a:latin typeface="Helvetica Neue"/>
+                <a:ea typeface="Helvetica Neue"/>
+                <a:cs typeface="Helvetica Neue"/>
+              </a:rPr>
+              <a:t>03</a:t>
+            </a:r>
+          </a:p>
+        </p:txBody>
+      </p:sp>
+      <p:sp>
+        <p:nvSpPr>
+          <p:cNvPr id="11" name="exam-question-3">
+            <a:extLst xmlns:a="http://schemas.openxmlformats.org/drawingml/2006/main">
+              <a:ext uri="{FF2B5EF4-FFF2-40B4-BE49-F238E27FC236}">
+                <a16:creationId xmlns:a16="http://schemas.microsoft.com/office/drawing/2014/main" id="{CD1AC438-5B52-413D-B194-4F9EEDA2E154}"/>
+              </a:ext>
+            </a:extLst>
+          </p:cNvPr>
+          <p:cNvSpPr>
+            <a:spLocks xmlns:a="http://schemas.openxmlformats.org/drawingml/2006/main" noGrp="1"/>
+          </p:cNvSpPr>
+          <p:nvPr/>
+        </p:nvSpPr>
+        <p:spPr>
+          <a:xfrm xmlns:a="http://schemas.openxmlformats.org/drawingml/2006/main">
+            <a:off x="1076325" y="3495675"/>
+            <a:ext cx="4762500" cy="895350"/>
+          </a:xfrm>
+          <a:prstGeom xmlns:a="http://schemas.openxmlformats.org/drawingml/2006/main" prst="rect">
+            <a:avLst/>
+          </a:prstGeom>
+          <a:noFill xmlns:a="http://schemas.openxmlformats.org/drawingml/2006/main"/>
+          <a:ln xmlns:a="http://schemas.openxmlformats.org/drawingml/2006/main" w="0">
+            <a:noFill/>
+            <a:prstDash val="solid"/>
+          </a:ln>
+        </p:spPr>
+        <p:txBody>
+          <a:bodyPr xmlns:a="http://schemas.openxmlformats.org/drawingml/2006/main" anchor="t">
+            <a:normAutofit fontScale="100000"/>
+          </a:bodyPr>
+          <a:lstStyle xmlns:a="http://schemas.openxmlformats.org/drawingml/2006/main"/>
+          <a:p xmlns:a="http://schemas.openxmlformats.org/drawingml/2006/main">
+            <a:pPr algn="l">
+              <a:defRPr sz="1575" b="1">
+                <a:solidFill>
+                  <a:srgbClr val="111111"/>
+                </a:solidFill>
+                <a:latin typeface="Helvetica Neue"/>
+                <a:ea typeface="Helvetica Neue"/>
+                <a:cs typeface="Helvetica Neue"/>
+              </a:defRPr>
+            </a:pPr>
+            <a:r>
+              <a:rPr sz="1575" b="1">
+                <a:solidFill>
+                  <a:srgbClr val="111111"/>
+                </a:solidFill>
+                <a:latin typeface="Helvetica Neue"/>
+                <a:ea typeface="Helvetica Neue"/>
+                <a:cs typeface="Helvetica Neue"/>
+              </a:rPr>
+              <a:t>What makes execution-based evaluation strong?</a:t>
+            </a:r>
+          </a:p>
+        </p:txBody>
+      </p:sp>
+      <p:sp>
+        <p:nvSpPr>
+          <p:cNvPr id="12" name="exam-number-4">
+            <a:extLst xmlns:a="http://schemas.openxmlformats.org/drawingml/2006/main">
+              <a:ext uri="{FF2B5EF4-FFF2-40B4-BE49-F238E27FC236}">
+                <a16:creationId xmlns:a16="http://schemas.microsoft.com/office/drawing/2014/main" id="{5CC62E09-0EF9-42C8-B32C-9AC0E36DE57C}"/>
+              </a:ext>
+            </a:extLst>
+          </p:cNvPr>
+          <p:cNvSpPr>
+            <a:spLocks xmlns:a="http://schemas.openxmlformats.org/drawingml/2006/main" noGrp="1"/>
+          </p:cNvSpPr>
+          <p:nvPr/>
+        </p:nvSpPr>
+        <p:spPr>
+          <a:xfrm xmlns:a="http://schemas.openxmlformats.org/drawingml/2006/main">
+            <a:off x="6191250" y="3495675"/>
+            <a:ext cx="590550" cy="400050"/>
+          </a:xfrm>
+          <a:prstGeom xmlns:a="http://schemas.openxmlformats.org/drawingml/2006/main" prst="rect">
+            <a:avLst/>
+          </a:prstGeom>
+          <a:noFill xmlns:a="http://schemas.openxmlformats.org/drawingml/2006/main"/>
+          <a:ln xmlns:a="http://schemas.openxmlformats.org/drawingml/2006/main" w="0">
+            <a:noFill/>
+            <a:prstDash val="solid"/>
+          </a:ln>
+        </p:spPr>
+        <p:txBody>
+          <a:bodyPr xmlns:a="http://schemas.openxmlformats.org/drawingml/2006/main" anchor="t">
+            <a:noAutofit/>
+          </a:bodyPr>
+          <a:lstStyle xmlns:a="http://schemas.openxmlformats.org/drawingml/2006/main"/>
+          <a:p xmlns:a="http://schemas.openxmlformats.org/drawingml/2006/main">
+            <a:pPr algn="l">
+              <a:defRPr sz="1725" b="1">
+                <a:solidFill>
+                  <a:srgbClr val="C4A1FF"/>
+                </a:solidFill>
+                <a:latin typeface="Helvetica Neue"/>
+                <a:ea typeface="Helvetica Neue"/>
+                <a:cs typeface="Helvetica Neue"/>
+              </a:defRPr>
+            </a:pPr>
+            <a:r>
+              <a:rPr sz="1725" b="1">
+                <a:solidFill>
+                  <a:srgbClr val="C4A1FF"/>
+                </a:solidFill>
+                <a:latin typeface="Helvetica Neue"/>
+                <a:ea typeface="Helvetica Neue"/>
+                <a:cs typeface="Helvetica Neue"/>
+              </a:rPr>
+              <a:t>04</a:t>
+            </a:r>
+          </a:p>
+        </p:txBody>
+      </p:sp>
+      <p:sp>
+        <p:nvSpPr>
+          <p:cNvPr id="13" name="exam-question-4">
+            <a:extLst xmlns:a="http://schemas.openxmlformats.org/drawingml/2006/main">
+              <a:ext uri="{FF2B5EF4-FFF2-40B4-BE49-F238E27FC236}">
+                <a16:creationId xmlns:a16="http://schemas.microsoft.com/office/drawing/2014/main" id="{F9CBBEA3-DB7D-4A2A-8433-94C87A0CCB85}"/>
+              </a:ext>
+            </a:extLst>
+          </p:cNvPr>
+          <p:cNvSpPr>
+            <a:spLocks xmlns:a="http://schemas.openxmlformats.org/drawingml/2006/main" noGrp="1"/>
+          </p:cNvSpPr>
+          <p:nvPr/>
+        </p:nvSpPr>
+        <p:spPr>
+          <a:xfrm xmlns:a="http://schemas.openxmlformats.org/drawingml/2006/main">
+            <a:off x="6877050" y="3495675"/>
+            <a:ext cx="4762500" cy="895350"/>
+          </a:xfrm>
+          <a:prstGeom xmlns:a="http://schemas.openxmlformats.org/drawingml/2006/main" prst="rect">
+            <a:avLst/>
+          </a:prstGeom>
+          <a:noFill xmlns:a="http://schemas.openxmlformats.org/drawingml/2006/main"/>
+          <a:ln xmlns:a="http://schemas.openxmlformats.org/drawingml/2006/main" w="0">
+            <a:noFill/>
+            <a:prstDash val="solid"/>
+          </a:ln>
+        </p:spPr>
+        <p:txBody>
+          <a:bodyPr xmlns:a="http://schemas.openxmlformats.org/drawingml/2006/main" anchor="t">
+            <a:normAutofit fontScale="100000"/>
+          </a:bodyPr>
+          <a:lstStyle xmlns:a="http://schemas.openxmlformats.org/drawingml/2006/main"/>
+          <a:p xmlns:a="http://schemas.openxmlformats.org/drawingml/2006/main">
+            <a:pPr algn="l">
+              <a:defRPr sz="1575" b="1">
+                <a:solidFill>
+                  <a:srgbClr val="111111"/>
+                </a:solidFill>
+                <a:latin typeface="Helvetica Neue"/>
+                <a:ea typeface="Helvetica Neue"/>
+                <a:cs typeface="Helvetica Neue"/>
+              </a:defRPr>
+            </a:pPr>
+            <a:r>
+              <a:rPr sz="1575" b="1">
+                <a:solidFill>
+                  <a:srgbClr val="111111"/>
+                </a:solidFill>
+                <a:latin typeface="Helvetica Neue"/>
+                <a:ea typeface="Helvetica Neue"/>
+                <a:cs typeface="Helvetica Neue"/>
+              </a:rPr>
+              <a:t>How can benchmark contamination and weak tests mislead?</a:t>
+            </a:r>
+          </a:p>
+        </p:txBody>
+      </p:sp>
+      <p:sp>
+        <p:nvSpPr>
+          <p:cNvPr id="14" name="exam-number-5">
+            <a:extLst xmlns:a="http://schemas.openxmlformats.org/drawingml/2006/main">
+              <a:ext uri="{FF2B5EF4-FFF2-40B4-BE49-F238E27FC236}">
+                <a16:creationId xmlns:a16="http://schemas.microsoft.com/office/drawing/2014/main" id="{3FAFF344-8CBB-4FA5-B574-5B9EA424D9F8}"/>
+              </a:ext>
+            </a:extLst>
+          </p:cNvPr>
+          <p:cNvSpPr>
+            <a:spLocks xmlns:a="http://schemas.openxmlformats.org/drawingml/2006/main" noGrp="1"/>
+          </p:cNvSpPr>
+          <p:nvPr/>
+        </p:nvSpPr>
+        <p:spPr>
+          <a:xfrm xmlns:a="http://schemas.openxmlformats.org/drawingml/2006/main">
+            <a:off x="390525" y="4752975"/>
+            <a:ext cx="590550" cy="400050"/>
+          </a:xfrm>
+          <a:prstGeom xmlns:a="http://schemas.openxmlformats.org/drawingml/2006/main" prst="rect">
+            <a:avLst/>
+          </a:prstGeom>
+          <a:noFill xmlns:a="http://schemas.openxmlformats.org/drawingml/2006/main"/>
+          <a:ln xmlns:a="http://schemas.openxmlformats.org/drawingml/2006/main" w="0">
+            <a:noFill/>
+            <a:prstDash val="solid"/>
+          </a:ln>
+        </p:spPr>
+        <p:txBody>
+          <a:bodyPr xmlns:a="http://schemas.openxmlformats.org/drawingml/2006/main" anchor="t">
+            <a:noAutofit/>
+          </a:bodyPr>
+          <a:lstStyle xmlns:a="http://schemas.openxmlformats.org/drawingml/2006/main"/>
+          <a:p xmlns:a="http://schemas.openxmlformats.org/drawingml/2006/main">
+            <a:pPr algn="l">
+              <a:defRPr sz="1725" b="1">
+                <a:solidFill>
+                  <a:srgbClr val="C4A1FF"/>
+                </a:solidFill>
+                <a:latin typeface="Helvetica Neue"/>
+                <a:ea typeface="Helvetica Neue"/>
+                <a:cs typeface="Helvetica Neue"/>
+              </a:defRPr>
+            </a:pPr>
+            <a:r>
+              <a:rPr sz="1725" b="1">
+                <a:solidFill>
+                  <a:srgbClr val="C4A1FF"/>
+                </a:solidFill>
+                <a:latin typeface="Helvetica Neue"/>
+                <a:ea typeface="Helvetica Neue"/>
+                <a:cs typeface="Helvetica Neue"/>
+              </a:rPr>
+              <a:t>05</a:t>
+            </a:r>
+          </a:p>
+        </p:txBody>
+      </p:sp>
+      <p:sp>
+        <p:nvSpPr>
+          <p:cNvPr id="15" name="exam-question-5">
+            <a:extLst xmlns:a="http://schemas.openxmlformats.org/drawingml/2006/main">
+              <a:ext uri="{FF2B5EF4-FFF2-40B4-BE49-F238E27FC236}">
+                <a16:creationId xmlns:a16="http://schemas.microsoft.com/office/drawing/2014/main" id="{CCA20C4B-F709-43B8-BD6E-ADFBFEEE88C7}"/>
+              </a:ext>
+            </a:extLst>
+          </p:cNvPr>
+          <p:cNvSpPr>
+            <a:spLocks xmlns:a="http://schemas.openxmlformats.org/drawingml/2006/main" noGrp="1"/>
+          </p:cNvSpPr>
+          <p:nvPr/>
+        </p:nvSpPr>
+        <p:spPr>
+          <a:xfrm xmlns:a="http://schemas.openxmlformats.org/drawingml/2006/main">
+            <a:off x="1076325" y="4752975"/>
+            <a:ext cx="4762500" cy="895350"/>
+          </a:xfrm>
+          <a:prstGeom xmlns:a="http://schemas.openxmlformats.org/drawingml/2006/main" prst="rect">
+            <a:avLst/>
+          </a:prstGeom>
+          <a:noFill xmlns:a="http://schemas.openxmlformats.org/drawingml/2006/main"/>
+          <a:ln xmlns:a="http://schemas.openxmlformats.org/drawingml/2006/main" w="0">
+            <a:noFill/>
+            <a:prstDash val="solid"/>
+          </a:ln>
+        </p:spPr>
+        <p:txBody>
+          <a:bodyPr xmlns:a="http://schemas.openxmlformats.org/drawingml/2006/main" anchor="t">
+            <a:normAutofit fontScale="100000"/>
+          </a:bodyPr>
+          <a:lstStyle xmlns:a="http://schemas.openxmlformats.org/drawingml/2006/main"/>
+          <a:p xmlns:a="http://schemas.openxmlformats.org/drawingml/2006/main">
+            <a:pPr algn="l">
+              <a:defRPr sz="1575" b="1">
+                <a:solidFill>
+                  <a:srgbClr val="111111"/>
+                </a:solidFill>
+                <a:latin typeface="Helvetica Neue"/>
+                <a:ea typeface="Helvetica Neue"/>
+                <a:cs typeface="Helvetica Neue"/>
+              </a:defRPr>
+            </a:pPr>
+            <a:r>
+              <a:rPr sz="1575" b="1">
+                <a:solidFill>
+                  <a:srgbClr val="111111"/>
+                </a:solidFill>
+                <a:latin typeface="Helvetica Neue"/>
+                <a:ea typeface="Helvetica Neue"/>
+                <a:cs typeface="Helvetica Neue"/>
+              </a:rPr>
+              <a:t>What biases affect LLM-as-judge?</a:t>
+            </a:r>
+          </a:p>
+        </p:txBody>
+      </p:sp>
+      <p:sp>
+        <p:nvSpPr>
+          <p:cNvPr id="16" name="exam-number-6">
+            <a:extLst xmlns:a="http://schemas.openxmlformats.org/drawingml/2006/main">
+              <a:ext uri="{FF2B5EF4-FFF2-40B4-BE49-F238E27FC236}">
+                <a16:creationId xmlns:a16="http://schemas.microsoft.com/office/drawing/2014/main" id="{5CCFA098-7914-4F7A-88B0-261F784133D0}"/>
+              </a:ext>
+            </a:extLst>
+          </p:cNvPr>
+          <p:cNvSpPr>
+            <a:spLocks xmlns:a="http://schemas.openxmlformats.org/drawingml/2006/main" noGrp="1"/>
+          </p:cNvSpPr>
+          <p:nvPr/>
+        </p:nvSpPr>
+        <p:spPr>
+          <a:xfrm xmlns:a="http://schemas.openxmlformats.org/drawingml/2006/main">
+            <a:off x="6191250" y="4752975"/>
+            <a:ext cx="590550" cy="400050"/>
+          </a:xfrm>
+          <a:prstGeom xmlns:a="http://schemas.openxmlformats.org/drawingml/2006/main" prst="rect">
+            <a:avLst/>
+          </a:prstGeom>
+          <a:noFill xmlns:a="http://schemas.openxmlformats.org/drawingml/2006/main"/>
+          <a:ln xmlns:a="http://schemas.openxmlformats.org/drawingml/2006/main" w="0">
+            <a:noFill/>
+            <a:prstDash val="solid"/>
+          </a:ln>
+        </p:spPr>
+        <p:txBody>
+          <a:bodyPr xmlns:a="http://schemas.openxmlformats.org/drawingml/2006/main" anchor="t">
+            <a:noAutofit/>
+          </a:bodyPr>
+          <a:lstStyle xmlns:a="http://schemas.openxmlformats.org/drawingml/2006/main"/>
+          <a:p xmlns:a="http://schemas.openxmlformats.org/drawingml/2006/main">
+            <a:pPr algn="l">
+              <a:defRPr sz="1725" b="1">
+                <a:solidFill>
+                  <a:srgbClr val="C4A1FF"/>
+                </a:solidFill>
+                <a:latin typeface="Helvetica Neue"/>
+                <a:ea typeface="Helvetica Neue"/>
+                <a:cs typeface="Helvetica Neue"/>
+              </a:defRPr>
+            </a:pPr>
+            <a:r>
+              <a:rPr sz="1725" b="1">
+                <a:solidFill>
+                  <a:srgbClr val="C4A1FF"/>
+                </a:solidFill>
+                <a:latin typeface="Helvetica Neue"/>
+                <a:ea typeface="Helvetica Neue"/>
+                <a:cs typeface="Helvetica Neue"/>
+              </a:rPr>
+              <a:t>06</a:t>
+            </a:r>
+          </a:p>
+        </p:txBody>
+      </p:sp>
+      <p:sp>
+        <p:nvSpPr>
+          <p:cNvPr id="17" name="exam-question-6">
+            <a:extLst xmlns:a="http://schemas.openxmlformats.org/drawingml/2006/main">
+              <a:ext uri="{FF2B5EF4-FFF2-40B4-BE49-F238E27FC236}">
+                <a16:creationId xmlns:a16="http://schemas.microsoft.com/office/drawing/2014/main" id="{EAD304BC-CE7E-47B2-A2D0-899AA667992D}"/>
+              </a:ext>
+            </a:extLst>
+          </p:cNvPr>
+          <p:cNvSpPr>
+            <a:spLocks xmlns:a="http://schemas.openxmlformats.org/drawingml/2006/main" noGrp="1"/>
+          </p:cNvSpPr>
+          <p:nvPr/>
+        </p:nvSpPr>
+        <p:spPr>
+          <a:xfrm xmlns:a="http://schemas.openxmlformats.org/drawingml/2006/main">
+            <a:off x="6877050" y="4752975"/>
+            <a:ext cx="4762500" cy="895350"/>
+          </a:xfrm>
+          <a:prstGeom xmlns:a="http://schemas.openxmlformats.org/drawingml/2006/main" prst="rect">
+            <a:avLst/>
+          </a:prstGeom>
+          <a:noFill xmlns:a="http://schemas.openxmlformats.org/drawingml/2006/main"/>
+          <a:ln xmlns:a="http://schemas.openxmlformats.org/drawingml/2006/main" w="0">
+            <a:noFill/>
+            <a:prstDash val="solid"/>
+          </a:ln>
+        </p:spPr>
+        <p:txBody>
+          <a:bodyPr xmlns:a="http://schemas.openxmlformats.org/drawingml/2006/main" anchor="t">
+            <a:normAutofit fontScale="100000"/>
+          </a:bodyPr>
+          <a:lstStyle xmlns:a="http://schemas.openxmlformats.org/drawingml/2006/main"/>
+          <a:p xmlns:a="http://schemas.openxmlformats.org/drawingml/2006/main">
+            <a:pPr algn="l">
+              <a:defRPr sz="1575" b="1">
+                <a:solidFill>
+                  <a:srgbClr val="111111"/>
+                </a:solidFill>
+                <a:latin typeface="Helvetica Neue"/>
+                <a:ea typeface="Helvetica Neue"/>
+                <a:cs typeface="Helvetica Neue"/>
+              </a:defRPr>
+            </a:pPr>
+            <a:r>
+              <a:rPr sz="1575" b="1">
+                <a:solidFill>
+                  <a:srgbClr val="111111"/>
+                </a:solidFill>
+                <a:latin typeface="Helvetica Neue"/>
+                <a:ea typeface="Helvetica Neue"/>
+                <a:cs typeface="Helvetica Neue"/>
+              </a:rPr>
+              <a:t>How should an evaluation distinguish a wrong answer from an API failure?</a:t>
+            </a:r>
+          </a:p>
+        </p:txBody>
+      </p:sp>
+    </p:spTree>
+    <p:extLst>
+      <p:ext uri="{BB962C8B-B14F-4D97-AF65-F5344CB8AC3E}">
+        <p14:creationId xmlns:p14="http://schemas.microsoft.com/office/powerpoint/2010/main" val="783605354"/>
+      </p:ext>
+    </p:extLst>
+  </p:cSld>
+</p:sld>
+</file>
+
+<file path=ppt/slides/slide11.xml><?xml version="1.0" encoding="utf-8"?>
 <p:sld xmlns:p="http://schemas.openxmlformats.org/presentationml/2006/main">
   <p:cSld>
     <p:bg>
@@ -2258,7 +3960,7 @@
           <p:cNvPr id="14" name="accent-line">
             <a:extLst xmlns:a="http://schemas.openxmlformats.org/drawingml/2006/main">
               <a:ext uri="{FF2B5EF4-FFF2-40B4-BE49-F238E27FC236}">
-                <a16:creationId xmlns:a16="http://schemas.microsoft.com/office/drawing/2014/main" id="{03641E5A-BE49-4347-8320-D42367098650}"/>
+                <a16:creationId xmlns:a16="http://schemas.microsoft.com/office/drawing/2014/main" id="{02968E6B-8D21-4504-A36F-68D9FE88BB44}"/>
               </a:ext>
             </a:extLst>
           </p:cNvPr>
@@ -2291,7 +3993,7 @@
           <p:cNvPr id="2" name="chapter-label">
             <a:extLst xmlns:a="http://schemas.openxmlformats.org/drawingml/2006/main">
               <a:ext uri="{FF2B5EF4-FFF2-40B4-BE49-F238E27FC236}">
-                <a16:creationId xmlns:a16="http://schemas.microsoft.com/office/drawing/2014/main" id="{576CECEB-0ECA-4BBB-89FB-A5D9C93475F5}"/>
+                <a16:creationId xmlns:a16="http://schemas.microsoft.com/office/drawing/2014/main" id="{BFF52A64-B8D8-401F-A7A0-36DFCE251016}"/>
               </a:ext>
             </a:extLst>
           </p:cNvPr>
@@ -2349,7 +4051,7 @@
           <p:cNvPr id="3" name="slide-number">
             <a:extLst xmlns:a="http://schemas.openxmlformats.org/drawingml/2006/main">
               <a:ext uri="{FF2B5EF4-FFF2-40B4-BE49-F238E27FC236}">
-                <a16:creationId xmlns:a16="http://schemas.microsoft.com/office/drawing/2014/main" id="{6DFE5E56-9184-4C41-AC68-677BECB28E21}"/>
+                <a16:creationId xmlns:a16="http://schemas.microsoft.com/office/drawing/2014/main" id="{1B6B3A9E-8D13-4024-B4FD-278A9068C467}"/>
               </a:ext>
             </a:extLst>
           </p:cNvPr>
@@ -2397,7 +4099,7 @@
                 <a:ea typeface="Helvetica Neue"/>
                 <a:cs typeface="Helvetica Neue"/>
               </a:rPr>
-              <a:t>10</a:t>
+              <a:t>11</a:t>
             </a:r>
           </a:p>
         </p:txBody>
@@ -2407,7 +4109,7 @@
           <p:cNvPr id="4" name="chapter-footer">
             <a:extLst xmlns:a="http://schemas.openxmlformats.org/drawingml/2006/main">
               <a:ext uri="{FF2B5EF4-FFF2-40B4-BE49-F238E27FC236}">
-                <a16:creationId xmlns:a16="http://schemas.microsoft.com/office/drawing/2014/main" id="{10EED516-7F52-4271-9945-1853ECF9574D}"/>
+                <a16:creationId xmlns:a16="http://schemas.microsoft.com/office/drawing/2014/main" id="{AE9BB9B4-B85A-4FCD-97C9-A38D08D151E6}"/>
               </a:ext>
             </a:extLst>
           </p:cNvPr>
@@ -2465,7 +4167,7 @@
           <p:cNvPr id="5" name="closing-title">
             <a:extLst xmlns:a="http://schemas.openxmlformats.org/drawingml/2006/main">
               <a:ext uri="{FF2B5EF4-FFF2-40B4-BE49-F238E27FC236}">
-                <a16:creationId xmlns:a16="http://schemas.microsoft.com/office/drawing/2014/main" id="{FDA51122-44B2-473C-A7E2-566EE9D7C291}"/>
+                <a16:creationId xmlns:a16="http://schemas.microsoft.com/office/drawing/2014/main" id="{AEF9FEDE-2C9B-4CD6-8FC0-5359309F67BD}"/>
               </a:ext>
             </a:extLst>
           </p:cNvPr>
@@ -2523,7 +4225,7 @@
           <p:cNvPr id="6" name="takeaway-number-1">
             <a:extLst xmlns:a="http://schemas.openxmlformats.org/drawingml/2006/main">
               <a:ext uri="{FF2B5EF4-FFF2-40B4-BE49-F238E27FC236}">
-                <a16:creationId xmlns:a16="http://schemas.microsoft.com/office/drawing/2014/main" id="{296D9553-B775-41D9-829B-D477900F298B}"/>
+                <a16:creationId xmlns:a16="http://schemas.microsoft.com/office/drawing/2014/main" id="{043DED88-A605-4BBD-BA5C-D1C27831B807}"/>
               </a:ext>
             </a:extLst>
           </p:cNvPr>
@@ -2581,7 +4283,7 @@
           <p:cNvPr id="7" name="takeaway-1">
             <a:extLst xmlns:a="http://schemas.openxmlformats.org/drawingml/2006/main">
               <a:ext uri="{FF2B5EF4-FFF2-40B4-BE49-F238E27FC236}">
-                <a16:creationId xmlns:a16="http://schemas.microsoft.com/office/drawing/2014/main" id="{93992574-B175-49BC-9B2C-BAE69FB5987A}"/>
+                <a16:creationId xmlns:a16="http://schemas.microsoft.com/office/drawing/2014/main" id="{46ADB194-5362-42D6-9511-FD1150D5336A}"/>
               </a:ext>
             </a:extLst>
           </p:cNvPr>
@@ -2639,7 +4341,7 @@
           <p:cNvPr id="8" name="takeaway-number-2">
             <a:extLst xmlns:a="http://schemas.openxmlformats.org/drawingml/2006/main">
               <a:ext uri="{FF2B5EF4-FFF2-40B4-BE49-F238E27FC236}">
-                <a16:creationId xmlns:a16="http://schemas.microsoft.com/office/drawing/2014/main" id="{BFD845F2-C047-4BC2-8CA5-F4B5EC784984}"/>
+                <a16:creationId xmlns:a16="http://schemas.microsoft.com/office/drawing/2014/main" id="{26E632CB-C8FA-46D0-8F41-8FBA35FDBA38}"/>
               </a:ext>
             </a:extLst>
           </p:cNvPr>
@@ -2697,7 +4399,7 @@
           <p:cNvPr id="9" name="takeaway-2">
             <a:extLst xmlns:a="http://schemas.openxmlformats.org/drawingml/2006/main">
               <a:ext uri="{FF2B5EF4-FFF2-40B4-BE49-F238E27FC236}">
-                <a16:creationId xmlns:a16="http://schemas.microsoft.com/office/drawing/2014/main" id="{D5EE4D4F-D72D-4B62-A68E-C4908C8C5B21}"/>
+                <a16:creationId xmlns:a16="http://schemas.microsoft.com/office/drawing/2014/main" id="{4521FE0A-E747-44EF-A512-8BF6A9117770}"/>
               </a:ext>
             </a:extLst>
           </p:cNvPr>
@@ -2755,7 +4457,7 @@
           <p:cNvPr id="10" name="takeaway-number-3">
             <a:extLst xmlns:a="http://schemas.openxmlformats.org/drawingml/2006/main">
               <a:ext uri="{FF2B5EF4-FFF2-40B4-BE49-F238E27FC236}">
-                <a16:creationId xmlns:a16="http://schemas.microsoft.com/office/drawing/2014/main" id="{CFEE0751-977D-413C-8E33-7C4F2B6F60CC}"/>
+                <a16:creationId xmlns:a16="http://schemas.microsoft.com/office/drawing/2014/main" id="{7F3AB078-FABE-44FF-A727-313278A83B47}"/>
               </a:ext>
             </a:extLst>
           </p:cNvPr>
@@ -2813,7 +4515,7 @@
           <p:cNvPr id="11" name="takeaway-3">
             <a:extLst xmlns:a="http://schemas.openxmlformats.org/drawingml/2006/main">
               <a:ext uri="{FF2B5EF4-FFF2-40B4-BE49-F238E27FC236}">
-                <a16:creationId xmlns:a16="http://schemas.microsoft.com/office/drawing/2014/main" id="{CECE80B0-C026-4F74-A5C9-484064F0E243}"/>
+                <a16:creationId xmlns:a16="http://schemas.microsoft.com/office/drawing/2014/main" id="{5AE7C400-8CFC-4F75-A669-DE5D2EFDDA19}"/>
               </a:ext>
             </a:extLst>
           </p:cNvPr>
@@ -2871,7 +4573,7 @@
           <p:cNvPr id="12" name="takeaway-number-4">
             <a:extLst xmlns:a="http://schemas.openxmlformats.org/drawingml/2006/main">
               <a:ext uri="{FF2B5EF4-FFF2-40B4-BE49-F238E27FC236}">
-                <a16:creationId xmlns:a16="http://schemas.microsoft.com/office/drawing/2014/main" id="{80A8116C-7C1D-4FC5-8A88-05835B9DA2C5}"/>
+                <a16:creationId xmlns:a16="http://schemas.microsoft.com/office/drawing/2014/main" id="{64C8A898-442D-4DA2-B4C9-2D1FFBF59B10}"/>
               </a:ext>
             </a:extLst>
           </p:cNvPr>
@@ -2929,7 +4631,7 @@
           <p:cNvPr id="13" name="takeaway-4">
             <a:extLst xmlns:a="http://schemas.openxmlformats.org/drawingml/2006/main">
               <a:ext uri="{FF2B5EF4-FFF2-40B4-BE49-F238E27FC236}">
-                <a16:creationId xmlns:a16="http://schemas.microsoft.com/office/drawing/2014/main" id="{C108DF99-429F-462B-8955-8384C3B326BF}"/>
+                <a16:creationId xmlns:a16="http://schemas.microsoft.com/office/drawing/2014/main" id="{6A61F5C2-3ADB-47DE-9999-E78E60CC04B6}"/>
               </a:ext>
             </a:extLst>
           </p:cNvPr>
@@ -2985,7 +4687,556 @@
     </p:spTree>
     <p:extLst>
       <p:ext uri="{BB962C8B-B14F-4D97-AF65-F5344CB8AC3E}">
-        <p14:creationId xmlns:p14="http://schemas.microsoft.com/office/powerpoint/2010/main" val="1559497078"/>
+        <p14:creationId xmlns:p14="http://schemas.microsoft.com/office/powerpoint/2010/main" val="894713018"/>
+      </p:ext>
+    </p:extLst>
+  </p:cSld>
+</p:sld>
+</file>
+
+<file path=ppt/slides/slide12.xml><?xml version="1.0" encoding="utf-8"?>
+<p:sld xmlns:p="http://schemas.openxmlformats.org/presentationml/2006/main">
+  <p:cSld>
+    <p:bg>
+      <p:bgPr>
+        <a:solidFill xmlns:a="http://schemas.openxmlformats.org/drawingml/2006/main">
+          <a:srgbClr val="FFFFFF"/>
+        </a:solidFill>
+      </p:bgPr>
+    </p:bg>
+    <p:spTree>
+      <p:nvGrpSpPr>
+        <p:cNvPr id="1" name=""/>
+        <p:cNvGrpSpPr/>
+        <p:nvPr/>
+      </p:nvGrpSpPr>
+      <p:grpSpPr>
+        <a:xfrm xmlns:a="http://schemas.openxmlformats.org/drawingml/2006/main"/>
+      </p:grpSpPr>
+      <p:sp>
+        <p:nvSpPr>
+          <p:cNvPr id="10" name="accent-line">
+            <a:extLst xmlns:a="http://schemas.openxmlformats.org/drawingml/2006/main">
+              <a:ext uri="{FF2B5EF4-FFF2-40B4-BE49-F238E27FC236}">
+                <a16:creationId xmlns:a16="http://schemas.microsoft.com/office/drawing/2014/main" id="{E638A137-85B1-45F6-BF50-A0E968775609}"/>
+              </a:ext>
+            </a:extLst>
+          </p:cNvPr>
+          <p:cNvSpPr>
+            <a:spLocks xmlns:a="http://schemas.openxmlformats.org/drawingml/2006/main" noGrp="1"/>
+          </p:cNvSpPr>
+          <p:nvPr/>
+        </p:nvSpPr>
+        <p:spPr>
+          <a:xfrm xmlns:a="http://schemas.openxmlformats.org/drawingml/2006/main">
+            <a:off x="390525" y="304800"/>
+            <a:ext cx="11410950" cy="66675"/>
+          </a:xfrm>
+          <a:prstGeom xmlns:a="http://schemas.openxmlformats.org/drawingml/2006/main" prst="rect">
+            <a:avLst/>
+          </a:prstGeom>
+          <a:solidFill xmlns:a="http://schemas.openxmlformats.org/drawingml/2006/main">
+            <a:srgbClr val="C4A1FF"/>
+          </a:solidFill>
+          <a:ln xmlns:a="http://schemas.openxmlformats.org/drawingml/2006/main" w="0">
+            <a:solidFill>
+              <a:srgbClr val="C4A1FF"/>
+            </a:solidFill>
+            <a:prstDash val="solid"/>
+          </a:ln>
+        </p:spPr>
+      </p:sp>
+      <p:sp>
+        <p:nvSpPr>
+          <p:cNvPr id="2" name="chapter-label">
+            <a:extLst xmlns:a="http://schemas.openxmlformats.org/drawingml/2006/main">
+              <a:ext uri="{FF2B5EF4-FFF2-40B4-BE49-F238E27FC236}">
+                <a16:creationId xmlns:a16="http://schemas.microsoft.com/office/drawing/2014/main" id="{5FC8627F-C290-41A8-AD13-32F9D1F56D42}"/>
+              </a:ext>
+            </a:extLst>
+          </p:cNvPr>
+          <p:cNvSpPr>
+            <a:spLocks xmlns:a="http://schemas.openxmlformats.org/drawingml/2006/main" noGrp="1"/>
+          </p:cNvSpPr>
+          <p:nvPr/>
+        </p:nvSpPr>
+        <p:spPr>
+          <a:xfrm xmlns:a="http://schemas.openxmlformats.org/drawingml/2006/main">
+            <a:off x="390525" y="466725"/>
+            <a:ext cx="4953000" cy="323850"/>
+          </a:xfrm>
+          <a:prstGeom xmlns:a="http://schemas.openxmlformats.org/drawingml/2006/main" prst="rect">
+            <a:avLst/>
+          </a:prstGeom>
+          <a:noFill xmlns:a="http://schemas.openxmlformats.org/drawingml/2006/main"/>
+          <a:ln xmlns:a="http://schemas.openxmlformats.org/drawingml/2006/main" w="0">
+            <a:noFill/>
+            <a:prstDash val="solid"/>
+          </a:ln>
+        </p:spPr>
+        <p:txBody>
+          <a:bodyPr xmlns:a="http://schemas.openxmlformats.org/drawingml/2006/main" anchor="t">
+            <a:noAutofit/>
+          </a:bodyPr>
+          <a:lstStyle xmlns:a="http://schemas.openxmlformats.org/drawingml/2006/main"/>
+          <a:p xmlns:a="http://schemas.openxmlformats.org/drawingml/2006/main">
+            <a:pPr algn="l">
+              <a:defRPr sz="1275" b="1">
+                <a:solidFill>
+                  <a:srgbClr val="5B5B57"/>
+                </a:solidFill>
+                <a:latin typeface="Helvetica Neue"/>
+                <a:ea typeface="Helvetica Neue"/>
+                <a:cs typeface="Helvetica Neue"/>
+              </a:defRPr>
+            </a:pPr>
+            <a:r>
+              <a:rPr sz="1275" b="1">
+                <a:solidFill>
+                  <a:srgbClr val="5B5B57"/>
+                </a:solidFill>
+                <a:latin typeface="Helvetica Neue"/>
+                <a:ea typeface="Helvetica Neue"/>
+                <a:cs typeface="Helvetica Neue"/>
+              </a:rPr>
+              <a:t>PRACTICE AND READING  /  11</a:t>
+            </a:r>
+          </a:p>
+        </p:txBody>
+      </p:sp>
+      <p:sp>
+        <p:nvSpPr>
+          <p:cNvPr id="3" name="slide-number">
+            <a:extLst xmlns:a="http://schemas.openxmlformats.org/drawingml/2006/main">
+              <a:ext uri="{FF2B5EF4-FFF2-40B4-BE49-F238E27FC236}">
+                <a16:creationId xmlns:a16="http://schemas.microsoft.com/office/drawing/2014/main" id="{D9F9C814-6870-46BD-AEAA-89E6D0BE1CBD}"/>
+              </a:ext>
+            </a:extLst>
+          </p:cNvPr>
+          <p:cNvSpPr>
+            <a:spLocks xmlns:a="http://schemas.openxmlformats.org/drawingml/2006/main" noGrp="1"/>
+          </p:cNvSpPr>
+          <p:nvPr/>
+        </p:nvSpPr>
+        <p:spPr>
+          <a:xfrm xmlns:a="http://schemas.openxmlformats.org/drawingml/2006/main">
+            <a:off x="11049000" y="6286500"/>
+            <a:ext cx="742950" cy="266700"/>
+          </a:xfrm>
+          <a:prstGeom xmlns:a="http://schemas.openxmlformats.org/drawingml/2006/main" prst="rect">
+            <a:avLst/>
+          </a:prstGeom>
+          <a:noFill xmlns:a="http://schemas.openxmlformats.org/drawingml/2006/main"/>
+          <a:ln xmlns:a="http://schemas.openxmlformats.org/drawingml/2006/main" w="0">
+            <a:noFill/>
+            <a:prstDash val="solid"/>
+          </a:ln>
+        </p:spPr>
+        <p:txBody>
+          <a:bodyPr xmlns:a="http://schemas.openxmlformats.org/drawingml/2006/main" anchor="t">
+            <a:noAutofit/>
+          </a:bodyPr>
+          <a:lstStyle xmlns:a="http://schemas.openxmlformats.org/drawingml/2006/main"/>
+          <a:p xmlns:a="http://schemas.openxmlformats.org/drawingml/2006/main">
+            <a:pPr algn="r">
+              <a:defRPr sz="1200" b="0">
+                <a:solidFill>
+                  <a:srgbClr val="5B5B57"/>
+                </a:solidFill>
+                <a:latin typeface="Helvetica Neue"/>
+                <a:ea typeface="Helvetica Neue"/>
+                <a:cs typeface="Helvetica Neue"/>
+              </a:defRPr>
+            </a:pPr>
+            <a:r>
+              <a:rPr sz="1200" b="0">
+                <a:solidFill>
+                  <a:srgbClr val="5B5B57"/>
+                </a:solidFill>
+                <a:latin typeface="Helvetica Neue"/>
+                <a:ea typeface="Helvetica Neue"/>
+                <a:cs typeface="Helvetica Neue"/>
+              </a:rPr>
+              <a:t>12</a:t>
+            </a:r>
+          </a:p>
+        </p:txBody>
+      </p:sp>
+      <p:sp>
+        <p:nvSpPr>
+          <p:cNvPr id="4" name="chapter-footer">
+            <a:extLst xmlns:a="http://schemas.openxmlformats.org/drawingml/2006/main">
+              <a:ext uri="{FF2B5EF4-FFF2-40B4-BE49-F238E27FC236}">
+                <a16:creationId xmlns:a16="http://schemas.microsoft.com/office/drawing/2014/main" id="{CD3F6C17-906D-443E-BFFB-D0957458CBE6}"/>
+              </a:ext>
+            </a:extLst>
+          </p:cNvPr>
+          <p:cNvSpPr>
+            <a:spLocks xmlns:a="http://schemas.openxmlformats.org/drawingml/2006/main" noGrp="1"/>
+          </p:cNvSpPr>
+          <p:nvPr/>
+        </p:nvSpPr>
+        <p:spPr>
+          <a:xfrm xmlns:a="http://schemas.openxmlformats.org/drawingml/2006/main">
+            <a:off x="390525" y="6286500"/>
+            <a:ext cx="8191500" cy="266700"/>
+          </a:xfrm>
+          <a:prstGeom xmlns:a="http://schemas.openxmlformats.org/drawingml/2006/main" prst="rect">
+            <a:avLst/>
+          </a:prstGeom>
+          <a:noFill xmlns:a="http://schemas.openxmlformats.org/drawingml/2006/main"/>
+          <a:ln xmlns:a="http://schemas.openxmlformats.org/drawingml/2006/main" w="0">
+            <a:noFill/>
+            <a:prstDash val="solid"/>
+          </a:ln>
+        </p:spPr>
+        <p:txBody>
+          <a:bodyPr xmlns:a="http://schemas.openxmlformats.org/drawingml/2006/main" anchor="t">
+            <a:noAutofit/>
+          </a:bodyPr>
+          <a:lstStyle xmlns:a="http://schemas.openxmlformats.org/drawingml/2006/main"/>
+          <a:p xmlns:a="http://schemas.openxmlformats.org/drawingml/2006/main">
+            <a:pPr algn="l">
+              <a:defRPr sz="1125" b="0">
+                <a:solidFill>
+                  <a:srgbClr val="5B5B57"/>
+                </a:solidFill>
+                <a:latin typeface="Helvetica Neue"/>
+                <a:ea typeface="Helvetica Neue"/>
+                <a:cs typeface="Helvetica Neue"/>
+              </a:defRPr>
+            </a:pPr>
+            <a:r>
+              <a:rPr sz="1125" b="0">
+                <a:solidFill>
+                  <a:srgbClr val="5B5B57"/>
+                </a:solidFill>
+                <a:latin typeface="Helvetica Neue"/>
+                <a:ea typeface="Helvetica Neue"/>
+                <a:cs typeface="Helvetica Neue"/>
+              </a:rPr>
+              <a:t>Evaluation and Observability</a:t>
+            </a:r>
+          </a:p>
+        </p:txBody>
+      </p:sp>
+      <p:sp>
+        <p:nvSpPr>
+          <p:cNvPr id="5" name="practice-title">
+            <a:extLst xmlns:a="http://schemas.openxmlformats.org/drawingml/2006/main">
+              <a:ext uri="{FF2B5EF4-FFF2-40B4-BE49-F238E27FC236}">
+                <a16:creationId xmlns:a16="http://schemas.microsoft.com/office/drawing/2014/main" id="{413CE755-A5D3-4795-BDAE-99F6D7D37D32}"/>
+              </a:ext>
+            </a:extLst>
+          </p:cNvPr>
+          <p:cNvSpPr>
+            <a:spLocks xmlns:a="http://schemas.openxmlformats.org/drawingml/2006/main" noGrp="1"/>
+          </p:cNvSpPr>
+          <p:nvPr/>
+        </p:nvSpPr>
+        <p:spPr>
+          <a:xfrm xmlns:a="http://schemas.openxmlformats.org/drawingml/2006/main">
+            <a:off x="390525" y="1000125"/>
+            <a:ext cx="11144250" cy="666750"/>
+          </a:xfrm>
+          <a:prstGeom xmlns:a="http://schemas.openxmlformats.org/drawingml/2006/main" prst="rect">
+            <a:avLst/>
+          </a:prstGeom>
+          <a:noFill xmlns:a="http://schemas.openxmlformats.org/drawingml/2006/main"/>
+          <a:ln xmlns:a="http://schemas.openxmlformats.org/drawingml/2006/main" w="0">
+            <a:noFill/>
+            <a:prstDash val="solid"/>
+          </a:ln>
+        </p:spPr>
+        <p:txBody>
+          <a:bodyPr xmlns:a="http://schemas.openxmlformats.org/drawingml/2006/main" anchor="t">
+            <a:normAutofit fontScale="100000"/>
+          </a:bodyPr>
+          <a:lstStyle xmlns:a="http://schemas.openxmlformats.org/drawingml/2006/main"/>
+          <a:p xmlns:a="http://schemas.openxmlformats.org/drawingml/2006/main">
+            <a:pPr algn="l">
+              <a:defRPr sz="3000" b="1">
+                <a:solidFill>
+                  <a:srgbClr val="111111"/>
+                </a:solidFill>
+                <a:latin typeface="Helvetica Neue"/>
+                <a:ea typeface="Helvetica Neue"/>
+                <a:cs typeface="Helvetica Neue"/>
+              </a:defRPr>
+            </a:pPr>
+            <a:r>
+              <a:rPr sz="3000" b="1">
+                <a:solidFill>
+                  <a:srgbClr val="111111"/>
+                </a:solidFill>
+                <a:latin typeface="Helvetica Neue"/>
+                <a:ea typeface="Helvetica Neue"/>
+                <a:cs typeface="Helvetica Neue"/>
+              </a:rPr>
+              <a:t>Evidence to submit</a:t>
+            </a:r>
+          </a:p>
+        </p:txBody>
+      </p:sp>
+      <p:sp>
+        <p:nvSpPr>
+          <p:cNvPr id="6" name="practice-task">
+            <a:extLst xmlns:a="http://schemas.openxmlformats.org/drawingml/2006/main">
+              <a:ext uri="{FF2B5EF4-FFF2-40B4-BE49-F238E27FC236}">
+                <a16:creationId xmlns:a16="http://schemas.microsoft.com/office/drawing/2014/main" id="{BBBF20BA-62FD-4212-B125-44814560940A}"/>
+              </a:ext>
+            </a:extLst>
+          </p:cNvPr>
+          <p:cNvSpPr>
+            <a:spLocks xmlns:a="http://schemas.openxmlformats.org/drawingml/2006/main" noGrp="1"/>
+          </p:cNvSpPr>
+          <p:nvPr/>
+        </p:nvSpPr>
+        <p:spPr>
+          <a:xfrm xmlns:a="http://schemas.openxmlformats.org/drawingml/2006/main">
+            <a:off x="390525" y="2000250"/>
+            <a:ext cx="10953750" cy="1238250"/>
+          </a:xfrm>
+          <a:prstGeom xmlns:a="http://schemas.openxmlformats.org/drawingml/2006/main" prst="rect">
+            <a:avLst/>
+          </a:prstGeom>
+          <a:noFill xmlns:a="http://schemas.openxmlformats.org/drawingml/2006/main"/>
+          <a:ln xmlns:a="http://schemas.openxmlformats.org/drawingml/2006/main" w="0">
+            <a:noFill/>
+            <a:prstDash val="solid"/>
+          </a:ln>
+        </p:spPr>
+        <p:txBody>
+          <a:bodyPr xmlns:a="http://schemas.openxmlformats.org/drawingml/2006/main" anchor="t">
+            <a:normAutofit fontScale="100000"/>
+          </a:bodyPr>
+          <a:lstStyle xmlns:a="http://schemas.openxmlformats.org/drawingml/2006/main"/>
+          <a:p xmlns:a="http://schemas.openxmlformats.org/drawingml/2006/main">
+            <a:pPr algn="l">
+              <a:defRPr sz="1950" b="0">
+                <a:solidFill>
+                  <a:srgbClr val="111111"/>
+                </a:solidFill>
+                <a:latin typeface="Helvetica Neue"/>
+                <a:ea typeface="Helvetica Neue"/>
+                <a:cs typeface="Helvetica Neue"/>
+              </a:defRPr>
+            </a:pPr>
+            <a:r>
+              <a:rPr sz="1950" b="0">
+                <a:solidFill>
+                  <a:srgbClr val="111111"/>
+                </a:solidFill>
+                <a:latin typeface="Helvetica Neue"/>
+                <a:ea typeface="Helvetica Neue"/>
+                <a:cs typeface="Helvetica Neue"/>
+              </a:rPr>
+              <a:t>Run the offline evaluation command, inspect its JSONL records, and test the failure path. For live inference, predeclare a model and budget before using the held-out split.</a:t>
+            </a:r>
+          </a:p>
+        </p:txBody>
+      </p:sp>
+      <p:sp>
+        <p:nvSpPr>
+          <p:cNvPr id="7" name="practice-check">
+            <a:extLst xmlns:a="http://schemas.openxmlformats.org/drawingml/2006/main">
+              <a:ext uri="{FF2B5EF4-FFF2-40B4-BE49-F238E27FC236}">
+                <a16:creationId xmlns:a16="http://schemas.microsoft.com/office/drawing/2014/main" id="{8082EF0B-5BE8-4F11-A664-BB5FCDA20499}"/>
+              </a:ext>
+            </a:extLst>
+          </p:cNvPr>
+          <p:cNvSpPr>
+            <a:spLocks xmlns:a="http://schemas.openxmlformats.org/drawingml/2006/main" noGrp="1"/>
+          </p:cNvSpPr>
+          <p:nvPr/>
+        </p:nvSpPr>
+        <p:spPr>
+          <a:xfrm xmlns:a="http://schemas.openxmlformats.org/drawingml/2006/main">
+            <a:off x="390525" y="3381375"/>
+            <a:ext cx="10953750" cy="1095375"/>
+          </a:xfrm>
+          <a:prstGeom xmlns:a="http://schemas.openxmlformats.org/drawingml/2006/main" prst="rect">
+            <a:avLst/>
+          </a:prstGeom>
+          <a:noFill xmlns:a="http://schemas.openxmlformats.org/drawingml/2006/main"/>
+          <a:ln xmlns:a="http://schemas.openxmlformats.org/drawingml/2006/main" w="0">
+            <a:noFill/>
+            <a:prstDash val="solid"/>
+          </a:ln>
+        </p:spPr>
+        <p:txBody>
+          <a:bodyPr xmlns:a="http://schemas.openxmlformats.org/drawingml/2006/main" anchor="t">
+            <a:normAutofit fontScale="100000"/>
+          </a:bodyPr>
+          <a:lstStyle xmlns:a="http://schemas.openxmlformats.org/drawingml/2006/main"/>
+          <a:p xmlns:a="http://schemas.openxmlformats.org/drawingml/2006/main">
+            <a:pPr algn="l">
+              <a:defRPr sz="1800" b="0">
+                <a:solidFill>
+                  <a:srgbClr val="5B5B57"/>
+                </a:solidFill>
+                <a:latin typeface="Helvetica Neue"/>
+                <a:ea typeface="Helvetica Neue"/>
+                <a:cs typeface="Helvetica Neue"/>
+              </a:defRPr>
+            </a:pPr>
+            <a:r>
+              <a:rPr sz="1800" b="0">
+                <a:solidFill>
+                  <a:srgbClr val="5B5B57"/>
+                </a:solidFill>
+                <a:latin typeface="Helvetica Neue"/>
+                <a:ea typeface="Helvetica Neue"/>
+                <a:cs typeface="Helvetica Neue"/>
+              </a:rPr>
+              <a:t>A fresh rerun produces a manifest and one record per attempted case. Interrupted or failed requests do not disappear from the denominator.</a:t>
+            </a:r>
+          </a:p>
+        </p:txBody>
+      </p:sp>
+      <p:sp>
+        <p:nvSpPr>
+          <p:cNvPr id="8" name="practice-readings">
+            <a:extLst xmlns:a="http://schemas.openxmlformats.org/drawingml/2006/main">
+              <a:ext uri="{FF2B5EF4-FFF2-40B4-BE49-F238E27FC236}">
+                <a16:creationId xmlns:a16="http://schemas.microsoft.com/office/drawing/2014/main" id="{7DA2B8EA-02A6-4AE0-AD42-61010D5E2B7E}"/>
+              </a:ext>
+            </a:extLst>
+          </p:cNvPr>
+          <p:cNvSpPr>
+            <a:spLocks xmlns:a="http://schemas.openxmlformats.org/drawingml/2006/main" noGrp="1"/>
+          </p:cNvSpPr>
+          <p:nvPr/>
+        </p:nvSpPr>
+        <p:spPr>
+          <a:xfrm xmlns:a="http://schemas.openxmlformats.org/drawingml/2006/main">
+            <a:off x="390525" y="4667250"/>
+            <a:ext cx="10953750" cy="1000125"/>
+          </a:xfrm>
+          <a:prstGeom xmlns:a="http://schemas.openxmlformats.org/drawingml/2006/main" prst="rect">
+            <a:avLst/>
+          </a:prstGeom>
+          <a:noFill xmlns:a="http://schemas.openxmlformats.org/drawingml/2006/main"/>
+          <a:ln xmlns:a="http://schemas.openxmlformats.org/drawingml/2006/main" w="0">
+            <a:noFill/>
+            <a:prstDash val="solid"/>
+          </a:ln>
+        </p:spPr>
+        <p:txBody>
+          <a:bodyPr xmlns:a="http://schemas.openxmlformats.org/drawingml/2006/main" anchor="t">
+            <a:normAutofit fontScale="100000"/>
+          </a:bodyPr>
+          <a:lstStyle xmlns:a="http://schemas.openxmlformats.org/drawingml/2006/main"/>
+          <a:p xmlns:a="http://schemas.openxmlformats.org/drawingml/2006/main">
+            <a:pPr algn="l">
+              <a:defRPr sz="1425" b="0">
+                <a:solidFill>
+                  <a:srgbClr val="111111"/>
+                </a:solidFill>
+                <a:latin typeface="Helvetica Neue"/>
+                <a:ea typeface="Helvetica Neue"/>
+                <a:cs typeface="Helvetica Neue"/>
+              </a:defRPr>
+            </a:pPr>
+            <a:r>
+              <a:rPr sz="1425" b="0">
+                <a:solidFill>
+                  <a:srgbClr val="111111"/>
+                </a:solidFill>
+                <a:latin typeface="Helvetica Neue"/>
+                <a:ea typeface="Helvetica Neue"/>
+                <a:cs typeface="Helvetica Neue"/>
+              </a:rPr>
+              <a:t>P3  Would this change your answer?</a:t>
+            </a:r>
+          </a:p>
+          <a:p xmlns:a="http://schemas.openxmlformats.org/drawingml/2006/main">
+            <a:pPr algn="l">
+              <a:defRPr sz="1425" b="0">
+                <a:solidFill>
+                  <a:srgbClr val="111111"/>
+                </a:solidFill>
+                <a:latin typeface="Helvetica Neue"/>
+                <a:ea typeface="Helvetica Neue"/>
+                <a:cs typeface="Helvetica Neue"/>
+              </a:defRPr>
+            </a:pPr>
+            <a:r>
+              <a:rPr sz="1425" b="0">
+                <a:solidFill>
+                  <a:srgbClr val="111111"/>
+                </a:solidFill>
+                <a:latin typeface="Helvetica Neue"/>
+                <a:ea typeface="Helvetica Neue"/>
+                <a:cs typeface="Helvetica Neue"/>
+              </a:rPr>
+              <a:t>R2  How enabling two settings tripled our scores on the ARC-AGI-3 benchmark</a:t>
+            </a:r>
+          </a:p>
+        </p:txBody>
+      </p:sp>
+      <p:sp>
+        <p:nvSpPr>
+          <p:cNvPr id="9" name="practice-lab">
+            <a:extLst xmlns:a="http://schemas.openxmlformats.org/drawingml/2006/main">
+              <a:ext uri="{FF2B5EF4-FFF2-40B4-BE49-F238E27FC236}">
+                <a16:creationId xmlns:a16="http://schemas.microsoft.com/office/drawing/2014/main" id="{F0068B5B-7541-4D03-A039-4657B68B05AC}"/>
+              </a:ext>
+            </a:extLst>
+          </p:cNvPr>
+          <p:cNvSpPr>
+            <a:spLocks xmlns:a="http://schemas.openxmlformats.org/drawingml/2006/main" noGrp="1"/>
+          </p:cNvSpPr>
+          <p:nvPr/>
+        </p:nvSpPr>
+        <p:spPr>
+          <a:xfrm xmlns:a="http://schemas.openxmlformats.org/drawingml/2006/main">
+            <a:off x="390525" y="5857875"/>
+            <a:ext cx="10953750" cy="266700"/>
+          </a:xfrm>
+          <a:prstGeom xmlns:a="http://schemas.openxmlformats.org/drawingml/2006/main" prst="rect">
+            <a:avLst/>
+          </a:prstGeom>
+          <a:noFill xmlns:a="http://schemas.openxmlformats.org/drawingml/2006/main"/>
+          <a:ln xmlns:a="http://schemas.openxmlformats.org/drawingml/2006/main" w="0">
+            <a:noFill/>
+            <a:prstDash val="solid"/>
+          </a:ln>
+        </p:spPr>
+        <p:txBody>
+          <a:bodyPr xmlns:a="http://schemas.openxmlformats.org/drawingml/2006/main" anchor="t">
+            <a:normAutofit fontScale="90196"/>
+          </a:bodyPr>
+          <a:lstStyle xmlns:a="http://schemas.openxmlformats.org/drawingml/2006/main"/>
+          <a:p xmlns:a="http://schemas.openxmlformats.org/drawingml/2006/main">
+            <a:pPr algn="l">
+              <a:defRPr sz="1275" b="0">
+                <a:solidFill>
+                  <a:srgbClr val="5B5B57"/>
+                </a:solidFill>
+                <a:latin typeface="Helvetica Neue"/>
+                <a:ea typeface="Helvetica Neue"/>
+                <a:cs typeface="Helvetica Neue"/>
+              </a:defRPr>
+            </a:pPr>
+            <a:r>
+              <a:rPr sz="1275" b="0">
+                <a:solidFill>
+                  <a:srgbClr val="5B5B57"/>
+                </a:solidFill>
+                <a:latin typeface="Helvetica Neue"/>
+                <a:ea typeface="Helvetica Neue"/>
+                <a:cs typeface="Helvetica Neue"/>
+              </a:rPr>
+              <a:t>labs/07_agents_sdk_evaluation.ipynb</a:t>
+            </a:r>
+          </a:p>
+        </p:txBody>
+      </p:sp>
+    </p:spTree>
+    <p:extLst>
+      <p:ext uri="{BB962C8B-B14F-4D97-AF65-F5344CB8AC3E}">
+        <p14:creationId xmlns:p14="http://schemas.microsoft.com/office/powerpoint/2010/main" val="1460056729"/>
       </p:ext>
     </p:extLst>
   </p:cSld>
@@ -3016,7 +5267,7 @@
           <p:cNvPr id="14" name="accent-line">
             <a:extLst xmlns:a="http://schemas.openxmlformats.org/drawingml/2006/main">
               <a:ext uri="{FF2B5EF4-FFF2-40B4-BE49-F238E27FC236}">
-                <a16:creationId xmlns:a16="http://schemas.microsoft.com/office/drawing/2014/main" id="{AD6FE570-43D6-4BDE-9884-595C4C01C59A}"/>
+                <a16:creationId xmlns:a16="http://schemas.microsoft.com/office/drawing/2014/main" id="{F7470CF9-C9EB-4099-BE7D-8DE9C4A2934E}"/>
               </a:ext>
             </a:extLst>
           </p:cNvPr>
@@ -3049,7 +5300,7 @@
           <p:cNvPr id="2" name="chapter-label">
             <a:extLst xmlns:a="http://schemas.openxmlformats.org/drawingml/2006/main">
               <a:ext uri="{FF2B5EF4-FFF2-40B4-BE49-F238E27FC236}">
-                <a16:creationId xmlns:a16="http://schemas.microsoft.com/office/drawing/2014/main" id="{AD56DCD0-AD66-48B9-B7AD-AD6C2B2F91E6}"/>
+                <a16:creationId xmlns:a16="http://schemas.microsoft.com/office/drawing/2014/main" id="{D116F542-7FEF-4FCD-93CF-F58E99FBF8C4}"/>
               </a:ext>
             </a:extLst>
           </p:cNvPr>
@@ -3107,7 +5358,7 @@
           <p:cNvPr id="3" name="slide-number">
             <a:extLst xmlns:a="http://schemas.openxmlformats.org/drawingml/2006/main">
               <a:ext uri="{FF2B5EF4-FFF2-40B4-BE49-F238E27FC236}">
-                <a16:creationId xmlns:a16="http://schemas.microsoft.com/office/drawing/2014/main" id="{9AB67B3F-9507-45D4-AD05-87D26F3BDB1F}"/>
+                <a16:creationId xmlns:a16="http://schemas.microsoft.com/office/drawing/2014/main" id="{26A470BC-F31E-44F3-A28A-E41D07B5E802}"/>
               </a:ext>
             </a:extLst>
           </p:cNvPr>
@@ -3165,7 +5416,7 @@
           <p:cNvPr id="4" name="chapter-footer">
             <a:extLst xmlns:a="http://schemas.openxmlformats.org/drawingml/2006/main">
               <a:ext uri="{FF2B5EF4-FFF2-40B4-BE49-F238E27FC236}">
-                <a16:creationId xmlns:a16="http://schemas.microsoft.com/office/drawing/2014/main" id="{212B3034-6849-4B94-A3AA-C13FD7CFF32B}"/>
+                <a16:creationId xmlns:a16="http://schemas.microsoft.com/office/drawing/2014/main" id="{4C4043DA-9010-44BB-90D4-898D7C362E6F}"/>
               </a:ext>
             </a:extLst>
           </p:cNvPr>
@@ -3223,7 +5474,7 @@
           <p:cNvPr id="5" name="objectives-title">
             <a:extLst xmlns:a="http://schemas.openxmlformats.org/drawingml/2006/main">
               <a:ext uri="{FF2B5EF4-FFF2-40B4-BE49-F238E27FC236}">
-                <a16:creationId xmlns:a16="http://schemas.microsoft.com/office/drawing/2014/main" id="{0D2D9456-CCFF-4CD2-9CE3-406D1BA9E701}"/>
+                <a16:creationId xmlns:a16="http://schemas.microsoft.com/office/drawing/2014/main" id="{AF39235B-5157-4AEF-A3A2-6E04E8C886E0}"/>
               </a:ext>
             </a:extLst>
           </p:cNvPr>
@@ -3281,7 +5532,7 @@
           <p:cNvPr id="6" name="objective-number-1">
             <a:extLst xmlns:a="http://schemas.openxmlformats.org/drawingml/2006/main">
               <a:ext uri="{FF2B5EF4-FFF2-40B4-BE49-F238E27FC236}">
-                <a16:creationId xmlns:a16="http://schemas.microsoft.com/office/drawing/2014/main" id="{53FFE72E-B32B-4AE5-B78D-500B52362CB9}"/>
+                <a16:creationId xmlns:a16="http://schemas.microsoft.com/office/drawing/2014/main" id="{85807A9A-4942-4281-B3F9-79497C0F6064}"/>
               </a:ext>
             </a:extLst>
           </p:cNvPr>
@@ -3339,7 +5590,7 @@
           <p:cNvPr id="7" name="objective-1">
             <a:extLst xmlns:a="http://schemas.openxmlformats.org/drawingml/2006/main">
               <a:ext uri="{FF2B5EF4-FFF2-40B4-BE49-F238E27FC236}">
-                <a16:creationId xmlns:a16="http://schemas.microsoft.com/office/drawing/2014/main" id="{05EC73BD-C2BC-45C6-A880-92E972C2C16F}"/>
+                <a16:creationId xmlns:a16="http://schemas.microsoft.com/office/drawing/2014/main" id="{BADFDC96-D233-4050-BA31-10D9BFDC1DC3}"/>
               </a:ext>
             </a:extLst>
           </p:cNvPr>
@@ -3397,7 +5648,7 @@
           <p:cNvPr id="8" name="objective-number-2">
             <a:extLst xmlns:a="http://schemas.openxmlformats.org/drawingml/2006/main">
               <a:ext uri="{FF2B5EF4-FFF2-40B4-BE49-F238E27FC236}">
-                <a16:creationId xmlns:a16="http://schemas.microsoft.com/office/drawing/2014/main" id="{06BAEE31-89D2-4F46-BAF1-350108B0E748}"/>
+                <a16:creationId xmlns:a16="http://schemas.microsoft.com/office/drawing/2014/main" id="{F6160326-BD2B-4558-A76C-915F01A1A0B3}"/>
               </a:ext>
             </a:extLst>
           </p:cNvPr>
@@ -3455,7 +5706,7 @@
           <p:cNvPr id="9" name="objective-2">
             <a:extLst xmlns:a="http://schemas.openxmlformats.org/drawingml/2006/main">
               <a:ext uri="{FF2B5EF4-FFF2-40B4-BE49-F238E27FC236}">
-                <a16:creationId xmlns:a16="http://schemas.microsoft.com/office/drawing/2014/main" id="{0A8A6312-1A3A-4131-B403-C4539F2CE6A8}"/>
+                <a16:creationId xmlns:a16="http://schemas.microsoft.com/office/drawing/2014/main" id="{43B49CC8-E684-4A32-B4D7-2668B3469F7E}"/>
               </a:ext>
             </a:extLst>
           </p:cNvPr>
@@ -3513,7 +5764,7 @@
           <p:cNvPr id="10" name="objective-number-3">
             <a:extLst xmlns:a="http://schemas.openxmlformats.org/drawingml/2006/main">
               <a:ext uri="{FF2B5EF4-FFF2-40B4-BE49-F238E27FC236}">
-                <a16:creationId xmlns:a16="http://schemas.microsoft.com/office/drawing/2014/main" id="{67D4D3F5-748D-4BC6-AF0F-88C101744D2F}"/>
+                <a16:creationId xmlns:a16="http://schemas.microsoft.com/office/drawing/2014/main" id="{4351A44B-941E-4D62-BFCF-3BDD99F8F494}"/>
               </a:ext>
             </a:extLst>
           </p:cNvPr>
@@ -3571,7 +5822,7 @@
           <p:cNvPr id="11" name="objective-3">
             <a:extLst xmlns:a="http://schemas.openxmlformats.org/drawingml/2006/main">
               <a:ext uri="{FF2B5EF4-FFF2-40B4-BE49-F238E27FC236}">
-                <a16:creationId xmlns:a16="http://schemas.microsoft.com/office/drawing/2014/main" id="{E371EE93-09B0-4EBD-9D44-127EE7FB9A1C}"/>
+                <a16:creationId xmlns:a16="http://schemas.microsoft.com/office/drawing/2014/main" id="{DA515FA3-4ECB-4EAF-9C5C-C1EE2C4B4172}"/>
               </a:ext>
             </a:extLst>
           </p:cNvPr>
@@ -3629,7 +5880,7 @@
           <p:cNvPr id="12" name="objective-number-4">
             <a:extLst xmlns:a="http://schemas.openxmlformats.org/drawingml/2006/main">
               <a:ext uri="{FF2B5EF4-FFF2-40B4-BE49-F238E27FC236}">
-                <a16:creationId xmlns:a16="http://schemas.microsoft.com/office/drawing/2014/main" id="{55F91860-77D8-4C84-B723-F3C5B20E7BCC}"/>
+                <a16:creationId xmlns:a16="http://schemas.microsoft.com/office/drawing/2014/main" id="{D7BB463D-CCA4-4D65-B8B9-133C27D541D7}"/>
               </a:ext>
             </a:extLst>
           </p:cNvPr>
@@ -3687,7 +5938,7 @@
           <p:cNvPr id="13" name="objective-4">
             <a:extLst xmlns:a="http://schemas.openxmlformats.org/drawingml/2006/main">
               <a:ext uri="{FF2B5EF4-FFF2-40B4-BE49-F238E27FC236}">
-                <a16:creationId xmlns:a16="http://schemas.microsoft.com/office/drawing/2014/main" id="{78C103EC-91C0-4475-9087-0273A623F225}"/>
+                <a16:creationId xmlns:a16="http://schemas.microsoft.com/office/drawing/2014/main" id="{BBC49702-E275-4F05-AA05-18C6D6F17DD5}"/>
               </a:ext>
             </a:extLst>
           </p:cNvPr>
@@ -3743,7 +5994,7 @@
     </p:spTree>
     <p:extLst>
       <p:ext uri="{BB962C8B-B14F-4D97-AF65-F5344CB8AC3E}">
-        <p14:creationId xmlns:p14="http://schemas.microsoft.com/office/powerpoint/2010/main" val="1056421765"/>
+        <p14:creationId xmlns:p14="http://schemas.microsoft.com/office/powerpoint/2010/main" val="1259316077"/>
       </p:ext>
     </p:extLst>
   </p:cSld>
@@ -3774,7 +6025,7 @@
           <p:cNvPr id="9" name="accent-line">
             <a:extLst xmlns:a="http://schemas.openxmlformats.org/drawingml/2006/main">
               <a:ext uri="{FF2B5EF4-FFF2-40B4-BE49-F238E27FC236}">
-                <a16:creationId xmlns:a16="http://schemas.microsoft.com/office/drawing/2014/main" id="{5284F6C6-A90B-44A1-8709-A46793C52EFA}"/>
+                <a16:creationId xmlns:a16="http://schemas.microsoft.com/office/drawing/2014/main" id="{43D4B94C-7340-4C1D-BB59-33DDC8E017ED}"/>
               </a:ext>
             </a:extLst>
           </p:cNvPr>
@@ -3807,7 +6058,7 @@
           <p:cNvPr id="2" name="chapter-label">
             <a:extLst xmlns:a="http://schemas.openxmlformats.org/drawingml/2006/main">
               <a:ext uri="{FF2B5EF4-FFF2-40B4-BE49-F238E27FC236}">
-                <a16:creationId xmlns:a16="http://schemas.microsoft.com/office/drawing/2014/main" id="{2F0493C6-DB72-42DC-841A-B0895E0BDA07}"/>
+                <a16:creationId xmlns:a16="http://schemas.microsoft.com/office/drawing/2014/main" id="{AAE731C0-2BD3-4E70-881A-D4396318D8D6}"/>
               </a:ext>
             </a:extLst>
           </p:cNvPr>
@@ -3865,7 +6116,7 @@
           <p:cNvPr id="3" name="slide-number">
             <a:extLst xmlns:a="http://schemas.openxmlformats.org/drawingml/2006/main">
               <a:ext uri="{FF2B5EF4-FFF2-40B4-BE49-F238E27FC236}">
-                <a16:creationId xmlns:a16="http://schemas.microsoft.com/office/drawing/2014/main" id="{31C5F5BF-9E8F-4857-A7C3-0620A62B5F5A}"/>
+                <a16:creationId xmlns:a16="http://schemas.microsoft.com/office/drawing/2014/main" id="{32568B37-A64E-41A6-B44C-6A2E1092C120}"/>
               </a:ext>
             </a:extLst>
           </p:cNvPr>
@@ -3923,7 +6174,7 @@
           <p:cNvPr id="4" name="chapter-footer">
             <a:extLst xmlns:a="http://schemas.openxmlformats.org/drawingml/2006/main">
               <a:ext uri="{FF2B5EF4-FFF2-40B4-BE49-F238E27FC236}">
-                <a16:creationId xmlns:a16="http://schemas.microsoft.com/office/drawing/2014/main" id="{68CD1D75-B00D-42FC-B685-265FCA235F57}"/>
+                <a16:creationId xmlns:a16="http://schemas.microsoft.com/office/drawing/2014/main" id="{4294B419-9F0F-47F2-9248-CCB04AA32918}"/>
               </a:ext>
             </a:extLst>
           </p:cNvPr>
@@ -3981,7 +6232,7 @@
           <p:cNvPr id="5" name="section-title">
             <a:extLst xmlns:a="http://schemas.openxmlformats.org/drawingml/2006/main">
               <a:ext uri="{FF2B5EF4-FFF2-40B4-BE49-F238E27FC236}">
-                <a16:creationId xmlns:a16="http://schemas.microsoft.com/office/drawing/2014/main" id="{944C68C5-AC60-4BC0-8229-563F9C603D66}"/>
+                <a16:creationId xmlns:a16="http://schemas.microsoft.com/office/drawing/2014/main" id="{41FDA183-D459-47E8-9308-25950D7709D8}"/>
               </a:ext>
             </a:extLst>
           </p:cNvPr>
@@ -4039,7 +6290,7 @@
           <p:cNvPr id="6" name="section-explanation">
             <a:extLst xmlns:a="http://schemas.openxmlformats.org/drawingml/2006/main">
               <a:ext uri="{FF2B5EF4-FFF2-40B4-BE49-F238E27FC236}">
-                <a16:creationId xmlns:a16="http://schemas.microsoft.com/office/drawing/2014/main" id="{EE50BA56-EDB6-4C02-9A23-C36B0712F958}"/>
+                <a16:creationId xmlns:a16="http://schemas.microsoft.com/office/drawing/2014/main" id="{18FBF09B-91C9-4BC5-903A-E0F06F7FB15F}"/>
               </a:ext>
             </a:extLst>
           </p:cNvPr>
@@ -4097,7 +6348,7 @@
           <p:cNvPr id="7" name="column-rule">
             <a:extLst xmlns:a="http://schemas.openxmlformats.org/drawingml/2006/main">
               <a:ext uri="{FF2B5EF4-FFF2-40B4-BE49-F238E27FC236}">
-                <a16:creationId xmlns:a16="http://schemas.microsoft.com/office/drawing/2014/main" id="{FE1CC404-86AA-49EB-BD2B-0F5AB5D84620}"/>
+                <a16:creationId xmlns:a16="http://schemas.microsoft.com/office/drawing/2014/main" id="{6CF14D02-5373-44FC-844E-65EDE52CD158}"/>
               </a:ext>
             </a:extLst>
           </p:cNvPr>
@@ -4130,7 +6381,7 @@
           <p:cNvPr id="8" name="section-points">
             <a:extLst xmlns:a="http://schemas.openxmlformats.org/drawingml/2006/main">
               <a:ext uri="{FF2B5EF4-FFF2-40B4-BE49-F238E27FC236}">
-                <a16:creationId xmlns:a16="http://schemas.microsoft.com/office/drawing/2014/main" id="{7F77614F-2DD5-455D-9CA1-754698BB6DF6}"/>
+                <a16:creationId xmlns:a16="http://schemas.microsoft.com/office/drawing/2014/main" id="{0FCDCB0C-ABDD-4E50-94EC-5F045BC5BFC0}"/>
               </a:ext>
             </a:extLst>
           </p:cNvPr>
@@ -4242,7 +6493,7 @@
     </p:spTree>
     <p:extLst>
       <p:ext uri="{BB962C8B-B14F-4D97-AF65-F5344CB8AC3E}">
-        <p14:creationId xmlns:p14="http://schemas.microsoft.com/office/powerpoint/2010/main" val="1458442509"/>
+        <p14:creationId xmlns:p14="http://schemas.microsoft.com/office/powerpoint/2010/main" val="1774515225"/>
       </p:ext>
     </p:extLst>
   </p:cSld>
@@ -4273,7 +6524,7 @@
           <p:cNvPr id="15" name="accent-line">
             <a:extLst xmlns:a="http://schemas.openxmlformats.org/drawingml/2006/main">
               <a:ext uri="{FF2B5EF4-FFF2-40B4-BE49-F238E27FC236}">
-                <a16:creationId xmlns:a16="http://schemas.microsoft.com/office/drawing/2014/main" id="{8E0B7B09-5032-4ADB-A178-AC3575699064}"/>
+                <a16:creationId xmlns:a16="http://schemas.microsoft.com/office/drawing/2014/main" id="{7B388CF1-F5BE-444C-B9BB-9F5348ACFA71}"/>
               </a:ext>
             </a:extLst>
           </p:cNvPr>
@@ -4306,7 +6557,7 @@
           <p:cNvPr id="2" name="chapter-label">
             <a:extLst xmlns:a="http://schemas.openxmlformats.org/drawingml/2006/main">
               <a:ext uri="{FF2B5EF4-FFF2-40B4-BE49-F238E27FC236}">
-                <a16:creationId xmlns:a16="http://schemas.microsoft.com/office/drawing/2014/main" id="{151D9500-C9A4-4D8D-B873-E03BA0256270}"/>
+                <a16:creationId xmlns:a16="http://schemas.microsoft.com/office/drawing/2014/main" id="{0632F2DC-8982-43DD-953C-11FB09D234D3}"/>
               </a:ext>
             </a:extLst>
           </p:cNvPr>
@@ -4364,7 +6615,7 @@
           <p:cNvPr id="3" name="slide-number">
             <a:extLst xmlns:a="http://schemas.openxmlformats.org/drawingml/2006/main">
               <a:ext uri="{FF2B5EF4-FFF2-40B4-BE49-F238E27FC236}">
-                <a16:creationId xmlns:a16="http://schemas.microsoft.com/office/drawing/2014/main" id="{3DB8ED5C-65CE-4E7D-B459-B5E3452B77E4}"/>
+                <a16:creationId xmlns:a16="http://schemas.microsoft.com/office/drawing/2014/main" id="{B305A114-D6F7-4757-BA75-2A2FB34549CF}"/>
               </a:ext>
             </a:extLst>
           </p:cNvPr>
@@ -4422,7 +6673,7 @@
           <p:cNvPr id="4" name="chapter-footer">
             <a:extLst xmlns:a="http://schemas.openxmlformats.org/drawingml/2006/main">
               <a:ext uri="{FF2B5EF4-FFF2-40B4-BE49-F238E27FC236}">
-                <a16:creationId xmlns:a16="http://schemas.microsoft.com/office/drawing/2014/main" id="{64F4992F-420D-4351-A684-8C2322336CEE}"/>
+                <a16:creationId xmlns:a16="http://schemas.microsoft.com/office/drawing/2014/main" id="{EFFA4289-BF6B-44B9-8D5F-5094B57C2EA1}"/>
               </a:ext>
             </a:extLst>
           </p:cNvPr>
@@ -4480,7 +6731,7 @@
           <p:cNvPr id="5" name="section-title">
             <a:extLst xmlns:a="http://schemas.openxmlformats.org/drawingml/2006/main">
               <a:ext uri="{FF2B5EF4-FFF2-40B4-BE49-F238E27FC236}">
-                <a16:creationId xmlns:a16="http://schemas.microsoft.com/office/drawing/2014/main" id="{967ED3B9-DD22-463C-B70C-B147475A3BD0}"/>
+                <a16:creationId xmlns:a16="http://schemas.microsoft.com/office/drawing/2014/main" id="{21AD7ED6-D501-4693-BF33-B0AB7846C6BD}"/>
               </a:ext>
             </a:extLst>
           </p:cNvPr>
@@ -4538,7 +6789,7 @@
           <p:cNvPr id="6" name="section-explanation">
             <a:extLst xmlns:a="http://schemas.openxmlformats.org/drawingml/2006/main">
               <a:ext uri="{FF2B5EF4-FFF2-40B4-BE49-F238E27FC236}">
-                <a16:creationId xmlns:a16="http://schemas.microsoft.com/office/drawing/2014/main" id="{D1AC0AA5-F78E-4DA9-8DF7-6C8402306D8D}"/>
+                <a16:creationId xmlns:a16="http://schemas.microsoft.com/office/drawing/2014/main" id="{E1206C8B-F80D-496C-835E-C2C502BBB73B}"/>
               </a:ext>
             </a:extLst>
           </p:cNvPr>
@@ -4596,7 +6847,7 @@
           <p:cNvPr id="7" name="point-band-1">
             <a:extLst xmlns:a="http://schemas.openxmlformats.org/drawingml/2006/main">
               <a:ext uri="{FF2B5EF4-FFF2-40B4-BE49-F238E27FC236}">
-                <a16:creationId xmlns:a16="http://schemas.microsoft.com/office/drawing/2014/main" id="{3A2E1808-5BEF-4053-93C9-0A9C9BED5B37}"/>
+                <a16:creationId xmlns:a16="http://schemas.microsoft.com/office/drawing/2014/main" id="{780D495D-766E-42CE-9009-4C9686B6864C}"/>
               </a:ext>
             </a:extLst>
           </p:cNvPr>
@@ -4629,7 +6880,7 @@
           <p:cNvPr id="8" name="point-1">
             <a:extLst xmlns:a="http://schemas.openxmlformats.org/drawingml/2006/main">
               <a:ext uri="{FF2B5EF4-FFF2-40B4-BE49-F238E27FC236}">
-                <a16:creationId xmlns:a16="http://schemas.microsoft.com/office/drawing/2014/main" id="{E279F8EE-EB2A-45B6-9017-165D126B1183}"/>
+                <a16:creationId xmlns:a16="http://schemas.microsoft.com/office/drawing/2014/main" id="{E7DCB404-B959-4082-A1B1-D4104CB3361D}"/>
               </a:ext>
             </a:extLst>
           </p:cNvPr>
@@ -4687,7 +6938,7 @@
           <p:cNvPr id="9" name="point-band-2">
             <a:extLst xmlns:a="http://schemas.openxmlformats.org/drawingml/2006/main">
               <a:ext uri="{FF2B5EF4-FFF2-40B4-BE49-F238E27FC236}">
-                <a16:creationId xmlns:a16="http://schemas.microsoft.com/office/drawing/2014/main" id="{A2CEFE42-BCD7-4B0C-B712-45B0394CE52B}"/>
+                <a16:creationId xmlns:a16="http://schemas.microsoft.com/office/drawing/2014/main" id="{4B333644-D535-4758-93D4-D8E59B05AC05}"/>
               </a:ext>
             </a:extLst>
           </p:cNvPr>
@@ -4720,7 +6971,7 @@
           <p:cNvPr id="10" name="point-2">
             <a:extLst xmlns:a="http://schemas.openxmlformats.org/drawingml/2006/main">
               <a:ext uri="{FF2B5EF4-FFF2-40B4-BE49-F238E27FC236}">
-                <a16:creationId xmlns:a16="http://schemas.microsoft.com/office/drawing/2014/main" id="{BE762698-3432-44F5-85DE-C3278CD2A0EC}"/>
+                <a16:creationId xmlns:a16="http://schemas.microsoft.com/office/drawing/2014/main" id="{98ED3113-3BD9-490A-8B1F-53ABBE7BDFC8}"/>
               </a:ext>
             </a:extLst>
           </p:cNvPr>
@@ -4778,7 +7029,7 @@
           <p:cNvPr id="11" name="point-band-3">
             <a:extLst xmlns:a="http://schemas.openxmlformats.org/drawingml/2006/main">
               <a:ext uri="{FF2B5EF4-FFF2-40B4-BE49-F238E27FC236}">
-                <a16:creationId xmlns:a16="http://schemas.microsoft.com/office/drawing/2014/main" id="{773EEDCF-8721-42EB-9846-F52885F1ABE1}"/>
+                <a16:creationId xmlns:a16="http://schemas.microsoft.com/office/drawing/2014/main" id="{79CAE361-B6FB-4678-A798-0A715909F962}"/>
               </a:ext>
             </a:extLst>
           </p:cNvPr>
@@ -4811,7 +7062,7 @@
           <p:cNvPr id="12" name="point-3">
             <a:extLst xmlns:a="http://schemas.openxmlformats.org/drawingml/2006/main">
               <a:ext uri="{FF2B5EF4-FFF2-40B4-BE49-F238E27FC236}">
-                <a16:creationId xmlns:a16="http://schemas.microsoft.com/office/drawing/2014/main" id="{96DD810E-B66E-4443-B0EB-40146EE0DC8A}"/>
+                <a16:creationId xmlns:a16="http://schemas.microsoft.com/office/drawing/2014/main" id="{4907AB8A-C7AC-46B5-B9AB-73ACEF0A8920}"/>
               </a:ext>
             </a:extLst>
           </p:cNvPr>
@@ -4869,7 +7120,7 @@
           <p:cNvPr id="13" name="point-band-4">
             <a:extLst xmlns:a="http://schemas.openxmlformats.org/drawingml/2006/main">
               <a:ext uri="{FF2B5EF4-FFF2-40B4-BE49-F238E27FC236}">
-                <a16:creationId xmlns:a16="http://schemas.microsoft.com/office/drawing/2014/main" id="{483A1A4E-348E-4A24-9ADB-D3B4CC22E90E}"/>
+                <a16:creationId xmlns:a16="http://schemas.microsoft.com/office/drawing/2014/main" id="{00CC6A4D-8185-4B63-81C3-3498645BD803}"/>
               </a:ext>
             </a:extLst>
           </p:cNvPr>
@@ -4902,7 +7153,7 @@
           <p:cNvPr id="14" name="point-4">
             <a:extLst xmlns:a="http://schemas.openxmlformats.org/drawingml/2006/main">
               <a:ext uri="{FF2B5EF4-FFF2-40B4-BE49-F238E27FC236}">
-                <a16:creationId xmlns:a16="http://schemas.microsoft.com/office/drawing/2014/main" id="{AEEB1BE9-DB75-4DD8-8ADD-436B6E7FB6D4}"/>
+                <a16:creationId xmlns:a16="http://schemas.microsoft.com/office/drawing/2014/main" id="{86971087-5550-48B8-944A-A4568550E4DD}"/>
               </a:ext>
             </a:extLst>
           </p:cNvPr>
@@ -4958,7 +7209,7 @@
     </p:spTree>
     <p:extLst>
       <p:ext uri="{BB962C8B-B14F-4D97-AF65-F5344CB8AC3E}">
-        <p14:creationId xmlns:p14="http://schemas.microsoft.com/office/powerpoint/2010/main" val="562918034"/>
+        <p14:creationId xmlns:p14="http://schemas.microsoft.com/office/powerpoint/2010/main" val="1141049805"/>
       </p:ext>
     </p:extLst>
   </p:cSld>
@@ -4989,7 +7240,7 @@
           <p:cNvPr id="9" name="accent-line">
             <a:extLst xmlns:a="http://schemas.openxmlformats.org/drawingml/2006/main">
               <a:ext uri="{FF2B5EF4-FFF2-40B4-BE49-F238E27FC236}">
-                <a16:creationId xmlns:a16="http://schemas.microsoft.com/office/drawing/2014/main" id="{579F7E89-81EE-422E-9095-B8D5AB4BB92A}"/>
+                <a16:creationId xmlns:a16="http://schemas.microsoft.com/office/drawing/2014/main" id="{5EAB2EAB-8F71-457F-9C90-9FCA7824D3CF}"/>
               </a:ext>
             </a:extLst>
           </p:cNvPr>
@@ -5022,7 +7273,7 @@
           <p:cNvPr id="2" name="chapter-label">
             <a:extLst xmlns:a="http://schemas.openxmlformats.org/drawingml/2006/main">
               <a:ext uri="{FF2B5EF4-FFF2-40B4-BE49-F238E27FC236}">
-                <a16:creationId xmlns:a16="http://schemas.microsoft.com/office/drawing/2014/main" id="{1BC18737-4F62-4B6E-B392-F6B7F3EE812D}"/>
+                <a16:creationId xmlns:a16="http://schemas.microsoft.com/office/drawing/2014/main" id="{9055C6A7-6AF2-4864-85E4-9412FA196BD5}"/>
               </a:ext>
             </a:extLst>
           </p:cNvPr>
@@ -5080,7 +7331,7 @@
           <p:cNvPr id="3" name="slide-number">
             <a:extLst xmlns:a="http://schemas.openxmlformats.org/drawingml/2006/main">
               <a:ext uri="{FF2B5EF4-FFF2-40B4-BE49-F238E27FC236}">
-                <a16:creationId xmlns:a16="http://schemas.microsoft.com/office/drawing/2014/main" id="{A94CFE0D-3EBD-4567-AE7E-E3321187B492}"/>
+                <a16:creationId xmlns:a16="http://schemas.microsoft.com/office/drawing/2014/main" id="{1607AC61-42E6-4FA7-9B68-2653F26742CA}"/>
               </a:ext>
             </a:extLst>
           </p:cNvPr>
@@ -5138,7 +7389,7 @@
           <p:cNvPr id="4" name="chapter-footer">
             <a:extLst xmlns:a="http://schemas.openxmlformats.org/drawingml/2006/main">
               <a:ext uri="{FF2B5EF4-FFF2-40B4-BE49-F238E27FC236}">
-                <a16:creationId xmlns:a16="http://schemas.microsoft.com/office/drawing/2014/main" id="{B46B6033-271C-460C-982C-9301AFE0DB62}"/>
+                <a16:creationId xmlns:a16="http://schemas.microsoft.com/office/drawing/2014/main" id="{F11BBDED-5C67-4901-939A-DB18BE50A190}"/>
               </a:ext>
             </a:extLst>
           </p:cNvPr>
@@ -5196,7 +7447,7 @@
           <p:cNvPr id="5" name="section-title">
             <a:extLst xmlns:a="http://schemas.openxmlformats.org/drawingml/2006/main">
               <a:ext uri="{FF2B5EF4-FFF2-40B4-BE49-F238E27FC236}">
-                <a16:creationId xmlns:a16="http://schemas.microsoft.com/office/drawing/2014/main" id="{B9347F6B-091B-44C4-8B6B-9B1DEC5A758C}"/>
+                <a16:creationId xmlns:a16="http://schemas.microsoft.com/office/drawing/2014/main" id="{4B0F180D-0FC7-49EC-ADD1-4C3565510542}"/>
               </a:ext>
             </a:extLst>
           </p:cNvPr>
@@ -5254,7 +7505,7 @@
           <p:cNvPr id="6" name="section-explanation">
             <a:extLst xmlns:a="http://schemas.openxmlformats.org/drawingml/2006/main">
               <a:ext uri="{FF2B5EF4-FFF2-40B4-BE49-F238E27FC236}">
-                <a16:creationId xmlns:a16="http://schemas.microsoft.com/office/drawing/2014/main" id="{F6B14222-FACA-4FD0-9630-C8776C1B2599}"/>
+                <a16:creationId xmlns:a16="http://schemas.microsoft.com/office/drawing/2014/main" id="{DADFBB17-0C92-44D5-9C2D-6F75CF122AED}"/>
               </a:ext>
             </a:extLst>
           </p:cNvPr>
@@ -5312,7 +7563,7 @@
           <p:cNvPr id="7" name="column-rule">
             <a:extLst xmlns:a="http://schemas.openxmlformats.org/drawingml/2006/main">
               <a:ext uri="{FF2B5EF4-FFF2-40B4-BE49-F238E27FC236}">
-                <a16:creationId xmlns:a16="http://schemas.microsoft.com/office/drawing/2014/main" id="{3DB7A15E-987E-4D87-9372-4F9437A92053}"/>
+                <a16:creationId xmlns:a16="http://schemas.microsoft.com/office/drawing/2014/main" id="{898C4DBE-5DFE-4E29-9537-D29C4609D064}"/>
               </a:ext>
             </a:extLst>
           </p:cNvPr>
@@ -5345,7 +7596,7 @@
           <p:cNvPr id="8" name="section-points">
             <a:extLst xmlns:a="http://schemas.openxmlformats.org/drawingml/2006/main">
               <a:ext uri="{FF2B5EF4-FFF2-40B4-BE49-F238E27FC236}">
-                <a16:creationId xmlns:a16="http://schemas.microsoft.com/office/drawing/2014/main" id="{980DEF7C-F884-475A-A098-CE0D2355C559}"/>
+                <a16:creationId xmlns:a16="http://schemas.microsoft.com/office/drawing/2014/main" id="{0713CF09-9F7D-403E-A731-15658EEC61DC}"/>
               </a:ext>
             </a:extLst>
           </p:cNvPr>
@@ -5457,7 +7708,7 @@
     </p:spTree>
     <p:extLst>
       <p:ext uri="{BB962C8B-B14F-4D97-AF65-F5344CB8AC3E}">
-        <p14:creationId xmlns:p14="http://schemas.microsoft.com/office/powerpoint/2010/main" val="2110890516"/>
+        <p14:creationId xmlns:p14="http://schemas.microsoft.com/office/powerpoint/2010/main" val="1751104906"/>
       </p:ext>
     </p:extLst>
   </p:cSld>
@@ -5488,7 +7739,7 @@
           <p:cNvPr id="15" name="accent-line">
             <a:extLst xmlns:a="http://schemas.openxmlformats.org/drawingml/2006/main">
               <a:ext uri="{FF2B5EF4-FFF2-40B4-BE49-F238E27FC236}">
-                <a16:creationId xmlns:a16="http://schemas.microsoft.com/office/drawing/2014/main" id="{00FDD79E-060B-447B-A994-BBFC7B82BB8E}"/>
+                <a16:creationId xmlns:a16="http://schemas.microsoft.com/office/drawing/2014/main" id="{1B33C1DE-1308-4514-88B5-EBF2EEB8A63D}"/>
               </a:ext>
             </a:extLst>
           </p:cNvPr>
@@ -5521,7 +7772,7 @@
           <p:cNvPr id="2" name="chapter-label">
             <a:extLst xmlns:a="http://schemas.openxmlformats.org/drawingml/2006/main">
               <a:ext uri="{FF2B5EF4-FFF2-40B4-BE49-F238E27FC236}">
-                <a16:creationId xmlns:a16="http://schemas.microsoft.com/office/drawing/2014/main" id="{26FE601C-67B8-4AE4-859B-5905F60C7FC6}"/>
+                <a16:creationId xmlns:a16="http://schemas.microsoft.com/office/drawing/2014/main" id="{C0E321AD-288E-4D3E-A9D2-C3EED4A355D1}"/>
               </a:ext>
             </a:extLst>
           </p:cNvPr>
@@ -5579,7 +7830,7 @@
           <p:cNvPr id="3" name="slide-number">
             <a:extLst xmlns:a="http://schemas.openxmlformats.org/drawingml/2006/main">
               <a:ext uri="{FF2B5EF4-FFF2-40B4-BE49-F238E27FC236}">
-                <a16:creationId xmlns:a16="http://schemas.microsoft.com/office/drawing/2014/main" id="{2FE96C16-05B2-4D65-8F9F-0A852C9C815E}"/>
+                <a16:creationId xmlns:a16="http://schemas.microsoft.com/office/drawing/2014/main" id="{5F63F50C-FC33-4AE1-A276-209144E3ED48}"/>
               </a:ext>
             </a:extLst>
           </p:cNvPr>
@@ -5637,7 +7888,7 @@
           <p:cNvPr id="4" name="chapter-footer">
             <a:extLst xmlns:a="http://schemas.openxmlformats.org/drawingml/2006/main">
               <a:ext uri="{FF2B5EF4-FFF2-40B4-BE49-F238E27FC236}">
-                <a16:creationId xmlns:a16="http://schemas.microsoft.com/office/drawing/2014/main" id="{C4B0B65F-17FF-4F38-B3A2-64F64AABA179}"/>
+                <a16:creationId xmlns:a16="http://schemas.microsoft.com/office/drawing/2014/main" id="{6BF76D45-CBED-45AD-A0A2-70E5FF771CDC}"/>
               </a:ext>
             </a:extLst>
           </p:cNvPr>
@@ -5695,7 +7946,7 @@
           <p:cNvPr id="5" name="section-title">
             <a:extLst xmlns:a="http://schemas.openxmlformats.org/drawingml/2006/main">
               <a:ext uri="{FF2B5EF4-FFF2-40B4-BE49-F238E27FC236}">
-                <a16:creationId xmlns:a16="http://schemas.microsoft.com/office/drawing/2014/main" id="{D10E5FB2-FC71-4929-B383-E282B910C7BC}"/>
+                <a16:creationId xmlns:a16="http://schemas.microsoft.com/office/drawing/2014/main" id="{8A63B7A6-3257-47CB-8272-998E3A8EA2DA}"/>
               </a:ext>
             </a:extLst>
           </p:cNvPr>
@@ -5753,7 +8004,7 @@
           <p:cNvPr id="6" name="section-explanation">
             <a:extLst xmlns:a="http://schemas.openxmlformats.org/drawingml/2006/main">
               <a:ext uri="{FF2B5EF4-FFF2-40B4-BE49-F238E27FC236}">
-                <a16:creationId xmlns:a16="http://schemas.microsoft.com/office/drawing/2014/main" id="{F5C80B49-6E6F-4AA7-BAE5-E8D335E63E20}"/>
+                <a16:creationId xmlns:a16="http://schemas.microsoft.com/office/drawing/2014/main" id="{8EB7E25F-6792-4867-83E5-9C5BB6BDBB5B}"/>
               </a:ext>
             </a:extLst>
           </p:cNvPr>
@@ -5811,7 +8062,7 @@
           <p:cNvPr id="7" name="point-band-1">
             <a:extLst xmlns:a="http://schemas.openxmlformats.org/drawingml/2006/main">
               <a:ext uri="{FF2B5EF4-FFF2-40B4-BE49-F238E27FC236}">
-                <a16:creationId xmlns:a16="http://schemas.microsoft.com/office/drawing/2014/main" id="{AA304E82-9C25-4BB1-8654-4F1B80423A31}"/>
+                <a16:creationId xmlns:a16="http://schemas.microsoft.com/office/drawing/2014/main" id="{76D220FB-89D7-463B-AC4E-3135D823AAD7}"/>
               </a:ext>
             </a:extLst>
           </p:cNvPr>
@@ -5844,7 +8095,7 @@
           <p:cNvPr id="8" name="point-1">
             <a:extLst xmlns:a="http://schemas.openxmlformats.org/drawingml/2006/main">
               <a:ext uri="{FF2B5EF4-FFF2-40B4-BE49-F238E27FC236}">
-                <a16:creationId xmlns:a16="http://schemas.microsoft.com/office/drawing/2014/main" id="{7CC51E5C-EB11-40AB-B9FA-627E2342B085}"/>
+                <a16:creationId xmlns:a16="http://schemas.microsoft.com/office/drawing/2014/main" id="{8F41FA5B-A50A-4CC5-A93F-81FC948AABA0}"/>
               </a:ext>
             </a:extLst>
           </p:cNvPr>
@@ -5902,7 +8153,7 @@
           <p:cNvPr id="9" name="point-band-2">
             <a:extLst xmlns:a="http://schemas.openxmlformats.org/drawingml/2006/main">
               <a:ext uri="{FF2B5EF4-FFF2-40B4-BE49-F238E27FC236}">
-                <a16:creationId xmlns:a16="http://schemas.microsoft.com/office/drawing/2014/main" id="{C7BF90F2-B404-4520-AEC2-80F043065B72}"/>
+                <a16:creationId xmlns:a16="http://schemas.microsoft.com/office/drawing/2014/main" id="{332A93C3-6B17-4E42-97B4-561C40C04331}"/>
               </a:ext>
             </a:extLst>
           </p:cNvPr>
@@ -5935,7 +8186,7 @@
           <p:cNvPr id="10" name="point-2">
             <a:extLst xmlns:a="http://schemas.openxmlformats.org/drawingml/2006/main">
               <a:ext uri="{FF2B5EF4-FFF2-40B4-BE49-F238E27FC236}">
-                <a16:creationId xmlns:a16="http://schemas.microsoft.com/office/drawing/2014/main" id="{BC727B59-CD39-4FCD-BF9A-A86823251453}"/>
+                <a16:creationId xmlns:a16="http://schemas.microsoft.com/office/drawing/2014/main" id="{E5C3AFB4-9B4E-4332-B77E-3E485633EAA3}"/>
               </a:ext>
             </a:extLst>
           </p:cNvPr>
@@ -5993,7 +8244,7 @@
           <p:cNvPr id="11" name="point-band-3">
             <a:extLst xmlns:a="http://schemas.openxmlformats.org/drawingml/2006/main">
               <a:ext uri="{FF2B5EF4-FFF2-40B4-BE49-F238E27FC236}">
-                <a16:creationId xmlns:a16="http://schemas.microsoft.com/office/drawing/2014/main" id="{7E212476-F785-4A75-8613-BC623473651B}"/>
+                <a16:creationId xmlns:a16="http://schemas.microsoft.com/office/drawing/2014/main" id="{343E9F92-5E11-401F-945F-04365F6F235C}"/>
               </a:ext>
             </a:extLst>
           </p:cNvPr>
@@ -6026,7 +8277,7 @@
           <p:cNvPr id="12" name="point-3">
             <a:extLst xmlns:a="http://schemas.openxmlformats.org/drawingml/2006/main">
               <a:ext uri="{FF2B5EF4-FFF2-40B4-BE49-F238E27FC236}">
-                <a16:creationId xmlns:a16="http://schemas.microsoft.com/office/drawing/2014/main" id="{61286AFA-43FB-48DF-BB2B-9C36558ECD92}"/>
+                <a16:creationId xmlns:a16="http://schemas.microsoft.com/office/drawing/2014/main" id="{9B2137AA-1AC9-4F2D-86A5-E320B53CFD68}"/>
               </a:ext>
             </a:extLst>
           </p:cNvPr>
@@ -6084,7 +8335,7 @@
           <p:cNvPr id="13" name="point-band-4">
             <a:extLst xmlns:a="http://schemas.openxmlformats.org/drawingml/2006/main">
               <a:ext uri="{FF2B5EF4-FFF2-40B4-BE49-F238E27FC236}">
-                <a16:creationId xmlns:a16="http://schemas.microsoft.com/office/drawing/2014/main" id="{1B20A271-4FAA-4FEA-BA5A-E968768C6025}"/>
+                <a16:creationId xmlns:a16="http://schemas.microsoft.com/office/drawing/2014/main" id="{CB8F9561-8615-4916-A5B9-BDCEAA656169}"/>
               </a:ext>
             </a:extLst>
           </p:cNvPr>
@@ -6117,7 +8368,7 @@
           <p:cNvPr id="14" name="point-4">
             <a:extLst xmlns:a="http://schemas.openxmlformats.org/drawingml/2006/main">
               <a:ext uri="{FF2B5EF4-FFF2-40B4-BE49-F238E27FC236}">
-                <a16:creationId xmlns:a16="http://schemas.microsoft.com/office/drawing/2014/main" id="{D5FE6767-A9C4-4FE9-B91C-9B057ED397CA}"/>
+                <a16:creationId xmlns:a16="http://schemas.microsoft.com/office/drawing/2014/main" id="{265E503C-BBDC-4164-9E2B-B89D81AE4114}"/>
               </a:ext>
             </a:extLst>
           </p:cNvPr>
@@ -6173,7 +8424,7 @@
     </p:spTree>
     <p:extLst>
       <p:ext uri="{BB962C8B-B14F-4D97-AF65-F5344CB8AC3E}">
-        <p14:creationId xmlns:p14="http://schemas.microsoft.com/office/powerpoint/2010/main" val="1451113747"/>
+        <p14:creationId xmlns:p14="http://schemas.microsoft.com/office/powerpoint/2010/main" val="627257362"/>
       </p:ext>
     </p:extLst>
   </p:cSld>
@@ -6204,7 +8455,7 @@
           <p:cNvPr id="9" name="accent-line">
             <a:extLst xmlns:a="http://schemas.openxmlformats.org/drawingml/2006/main">
               <a:ext uri="{FF2B5EF4-FFF2-40B4-BE49-F238E27FC236}">
-                <a16:creationId xmlns:a16="http://schemas.microsoft.com/office/drawing/2014/main" id="{C7EF5AA7-328F-43A5-BA80-389C2784DF4B}"/>
+                <a16:creationId xmlns:a16="http://schemas.microsoft.com/office/drawing/2014/main" id="{5CF56166-FF5D-4533-BABF-E4D8115FFB4C}"/>
               </a:ext>
             </a:extLst>
           </p:cNvPr>
@@ -6237,7 +8488,7 @@
           <p:cNvPr id="2" name="chapter-label">
             <a:extLst xmlns:a="http://schemas.openxmlformats.org/drawingml/2006/main">
               <a:ext uri="{FF2B5EF4-FFF2-40B4-BE49-F238E27FC236}">
-                <a16:creationId xmlns:a16="http://schemas.microsoft.com/office/drawing/2014/main" id="{99C23AB1-3F60-4395-A3A5-47E5AE214B32}"/>
+                <a16:creationId xmlns:a16="http://schemas.microsoft.com/office/drawing/2014/main" id="{B61D0F71-C1FB-48C6-92AE-FEC5BEB4FE46}"/>
               </a:ext>
             </a:extLst>
           </p:cNvPr>
@@ -6295,7 +8546,7 @@
           <p:cNvPr id="3" name="slide-number">
             <a:extLst xmlns:a="http://schemas.openxmlformats.org/drawingml/2006/main">
               <a:ext uri="{FF2B5EF4-FFF2-40B4-BE49-F238E27FC236}">
-                <a16:creationId xmlns:a16="http://schemas.microsoft.com/office/drawing/2014/main" id="{E7744242-6419-4DF4-AD81-29BE2CFF9E1F}"/>
+                <a16:creationId xmlns:a16="http://schemas.microsoft.com/office/drawing/2014/main" id="{CE41478E-31E3-4EE3-9721-38EAE43C9696}"/>
               </a:ext>
             </a:extLst>
           </p:cNvPr>
@@ -6353,7 +8604,7 @@
           <p:cNvPr id="4" name="chapter-footer">
             <a:extLst xmlns:a="http://schemas.openxmlformats.org/drawingml/2006/main">
               <a:ext uri="{FF2B5EF4-FFF2-40B4-BE49-F238E27FC236}">
-                <a16:creationId xmlns:a16="http://schemas.microsoft.com/office/drawing/2014/main" id="{1DA1926B-03EB-469A-8DC9-27F6F3F869DA}"/>
+                <a16:creationId xmlns:a16="http://schemas.microsoft.com/office/drawing/2014/main" id="{93B9CD1E-7569-4580-A232-54CA8577C4FE}"/>
               </a:ext>
             </a:extLst>
           </p:cNvPr>
@@ -6411,7 +8662,7 @@
           <p:cNvPr id="5" name="section-title">
             <a:extLst xmlns:a="http://schemas.openxmlformats.org/drawingml/2006/main">
               <a:ext uri="{FF2B5EF4-FFF2-40B4-BE49-F238E27FC236}">
-                <a16:creationId xmlns:a16="http://schemas.microsoft.com/office/drawing/2014/main" id="{1D4210E0-49C9-4A22-BD50-818BF5C2AB49}"/>
+                <a16:creationId xmlns:a16="http://schemas.microsoft.com/office/drawing/2014/main" id="{B180A9EB-B54E-47F1-9ABF-7F399FCFDDE0}"/>
               </a:ext>
             </a:extLst>
           </p:cNvPr>
@@ -6469,7 +8720,7 @@
           <p:cNvPr id="6" name="section-explanation">
             <a:extLst xmlns:a="http://schemas.openxmlformats.org/drawingml/2006/main">
               <a:ext uri="{FF2B5EF4-FFF2-40B4-BE49-F238E27FC236}">
-                <a16:creationId xmlns:a16="http://schemas.microsoft.com/office/drawing/2014/main" id="{1338E9EB-80F4-4C97-9CAA-E36E48937E43}"/>
+                <a16:creationId xmlns:a16="http://schemas.microsoft.com/office/drawing/2014/main" id="{12131065-3892-4BBA-9439-A8373A88C5EA}"/>
               </a:ext>
             </a:extLst>
           </p:cNvPr>
@@ -6527,7 +8778,7 @@
           <p:cNvPr id="7" name="column-rule">
             <a:extLst xmlns:a="http://schemas.openxmlformats.org/drawingml/2006/main">
               <a:ext uri="{FF2B5EF4-FFF2-40B4-BE49-F238E27FC236}">
-                <a16:creationId xmlns:a16="http://schemas.microsoft.com/office/drawing/2014/main" id="{75032879-CF6D-4984-8642-D3A074E73BB4}"/>
+                <a16:creationId xmlns:a16="http://schemas.microsoft.com/office/drawing/2014/main" id="{AD582F9D-E674-4CDA-A29B-2BFE6595F4A7}"/>
               </a:ext>
             </a:extLst>
           </p:cNvPr>
@@ -6560,7 +8811,7 @@
           <p:cNvPr id="8" name="section-points">
             <a:extLst xmlns:a="http://schemas.openxmlformats.org/drawingml/2006/main">
               <a:ext uri="{FF2B5EF4-FFF2-40B4-BE49-F238E27FC236}">
-                <a16:creationId xmlns:a16="http://schemas.microsoft.com/office/drawing/2014/main" id="{D9E2CB5B-5B00-4340-BFF6-C50FD7009D6D}"/>
+                <a16:creationId xmlns:a16="http://schemas.microsoft.com/office/drawing/2014/main" id="{7ED2A519-D344-4A2A-B98B-316B13F73E90}"/>
               </a:ext>
             </a:extLst>
           </p:cNvPr>
@@ -6672,7 +8923,7 @@
     </p:spTree>
     <p:extLst>
       <p:ext uri="{BB962C8B-B14F-4D97-AF65-F5344CB8AC3E}">
-        <p14:creationId xmlns:p14="http://schemas.microsoft.com/office/powerpoint/2010/main" val="1029923885"/>
+        <p14:creationId xmlns:p14="http://schemas.microsoft.com/office/powerpoint/2010/main" val="1710541392"/>
       </p:ext>
     </p:extLst>
   </p:cSld>
@@ -6703,7 +8954,7 @@
           <p:cNvPr id="15" name="accent-line">
             <a:extLst xmlns:a="http://schemas.openxmlformats.org/drawingml/2006/main">
               <a:ext uri="{FF2B5EF4-FFF2-40B4-BE49-F238E27FC236}">
-                <a16:creationId xmlns:a16="http://schemas.microsoft.com/office/drawing/2014/main" id="{62E3B579-9697-4AFE-83B5-393560082AD9}"/>
+                <a16:creationId xmlns:a16="http://schemas.microsoft.com/office/drawing/2014/main" id="{7B60FA47-A2D7-4F09-BD73-1B25E2389F6E}"/>
               </a:ext>
             </a:extLst>
           </p:cNvPr>
@@ -6736,7 +8987,7 @@
           <p:cNvPr id="2" name="chapter-label">
             <a:extLst xmlns:a="http://schemas.openxmlformats.org/drawingml/2006/main">
               <a:ext uri="{FF2B5EF4-FFF2-40B4-BE49-F238E27FC236}">
-                <a16:creationId xmlns:a16="http://schemas.microsoft.com/office/drawing/2014/main" id="{7887826C-2A41-4B8D-B7F7-61F95D032373}"/>
+                <a16:creationId xmlns:a16="http://schemas.microsoft.com/office/drawing/2014/main" id="{5C8D44E8-2172-43E4-94FE-C0A0D2C8E341}"/>
               </a:ext>
             </a:extLst>
           </p:cNvPr>
@@ -6794,7 +9045,7 @@
           <p:cNvPr id="3" name="slide-number">
             <a:extLst xmlns:a="http://schemas.openxmlformats.org/drawingml/2006/main">
               <a:ext uri="{FF2B5EF4-FFF2-40B4-BE49-F238E27FC236}">
-                <a16:creationId xmlns:a16="http://schemas.microsoft.com/office/drawing/2014/main" id="{78A14724-B410-4434-B10D-889279DF8313}"/>
+                <a16:creationId xmlns:a16="http://schemas.microsoft.com/office/drawing/2014/main" id="{4A7F3811-2D55-4597-8200-7A159536FAA4}"/>
               </a:ext>
             </a:extLst>
           </p:cNvPr>
@@ -6852,7 +9103,7 @@
           <p:cNvPr id="4" name="chapter-footer">
             <a:extLst xmlns:a="http://schemas.openxmlformats.org/drawingml/2006/main">
               <a:ext uri="{FF2B5EF4-FFF2-40B4-BE49-F238E27FC236}">
-                <a16:creationId xmlns:a16="http://schemas.microsoft.com/office/drawing/2014/main" id="{A84EAEEB-5FB8-4BCA-A1C6-D814F13118D3}"/>
+                <a16:creationId xmlns:a16="http://schemas.microsoft.com/office/drawing/2014/main" id="{009202D2-C13B-4E9F-8ED4-5805C441A38A}"/>
               </a:ext>
             </a:extLst>
           </p:cNvPr>
@@ -6910,7 +9161,7 @@
           <p:cNvPr id="5" name="section-title">
             <a:extLst xmlns:a="http://schemas.openxmlformats.org/drawingml/2006/main">
               <a:ext uri="{FF2B5EF4-FFF2-40B4-BE49-F238E27FC236}">
-                <a16:creationId xmlns:a16="http://schemas.microsoft.com/office/drawing/2014/main" id="{6C717BC8-6202-4672-8543-35C0F611ED9B}"/>
+                <a16:creationId xmlns:a16="http://schemas.microsoft.com/office/drawing/2014/main" id="{89053D53-690D-4C81-A522-CBC29984AF4F}"/>
               </a:ext>
             </a:extLst>
           </p:cNvPr>
@@ -6968,7 +9219,7 @@
           <p:cNvPr id="6" name="section-explanation">
             <a:extLst xmlns:a="http://schemas.openxmlformats.org/drawingml/2006/main">
               <a:ext uri="{FF2B5EF4-FFF2-40B4-BE49-F238E27FC236}">
-                <a16:creationId xmlns:a16="http://schemas.microsoft.com/office/drawing/2014/main" id="{6A6CE604-3C4A-4EEF-B1DC-2051F7D1B126}"/>
+                <a16:creationId xmlns:a16="http://schemas.microsoft.com/office/drawing/2014/main" id="{3B5988D4-D899-42FD-936F-4FECCF21B63A}"/>
               </a:ext>
             </a:extLst>
           </p:cNvPr>
@@ -7026,7 +9277,7 @@
           <p:cNvPr id="7" name="point-band-1">
             <a:extLst xmlns:a="http://schemas.openxmlformats.org/drawingml/2006/main">
               <a:ext uri="{FF2B5EF4-FFF2-40B4-BE49-F238E27FC236}">
-                <a16:creationId xmlns:a16="http://schemas.microsoft.com/office/drawing/2014/main" id="{DF1A494D-C207-49DA-ABCC-F9555E4B77A2}"/>
+                <a16:creationId xmlns:a16="http://schemas.microsoft.com/office/drawing/2014/main" id="{B9D38E36-88DF-4737-BA8C-59F2F9D077CB}"/>
               </a:ext>
             </a:extLst>
           </p:cNvPr>
@@ -7059,7 +9310,7 @@
           <p:cNvPr id="8" name="point-1">
             <a:extLst xmlns:a="http://schemas.openxmlformats.org/drawingml/2006/main">
               <a:ext uri="{FF2B5EF4-FFF2-40B4-BE49-F238E27FC236}">
-                <a16:creationId xmlns:a16="http://schemas.microsoft.com/office/drawing/2014/main" id="{B2A35C02-7FF9-4706-8255-A3CA78B9CF91}"/>
+                <a16:creationId xmlns:a16="http://schemas.microsoft.com/office/drawing/2014/main" id="{74576A42-2382-4C3E-877A-2CFEA284DA52}"/>
               </a:ext>
             </a:extLst>
           </p:cNvPr>
@@ -7117,7 +9368,7 @@
           <p:cNvPr id="9" name="point-band-2">
             <a:extLst xmlns:a="http://schemas.openxmlformats.org/drawingml/2006/main">
               <a:ext uri="{FF2B5EF4-FFF2-40B4-BE49-F238E27FC236}">
-                <a16:creationId xmlns:a16="http://schemas.microsoft.com/office/drawing/2014/main" id="{A84B404A-74D6-46B9-87AB-2994B6EE2022}"/>
+                <a16:creationId xmlns:a16="http://schemas.microsoft.com/office/drawing/2014/main" id="{6096C719-930F-42C0-A328-2E53CBA97CFA}"/>
               </a:ext>
             </a:extLst>
           </p:cNvPr>
@@ -7150,7 +9401,7 @@
           <p:cNvPr id="10" name="point-2">
             <a:extLst xmlns:a="http://schemas.openxmlformats.org/drawingml/2006/main">
               <a:ext uri="{FF2B5EF4-FFF2-40B4-BE49-F238E27FC236}">
-                <a16:creationId xmlns:a16="http://schemas.microsoft.com/office/drawing/2014/main" id="{FC8AC74D-73D5-47B3-83C5-7B9A08743BF6}"/>
+                <a16:creationId xmlns:a16="http://schemas.microsoft.com/office/drawing/2014/main" id="{AA42C408-DA12-4F57-80F3-D3716A3A064B}"/>
               </a:ext>
             </a:extLst>
           </p:cNvPr>
@@ -7208,7 +9459,7 @@
           <p:cNvPr id="11" name="point-band-3">
             <a:extLst xmlns:a="http://schemas.openxmlformats.org/drawingml/2006/main">
               <a:ext uri="{FF2B5EF4-FFF2-40B4-BE49-F238E27FC236}">
-                <a16:creationId xmlns:a16="http://schemas.microsoft.com/office/drawing/2014/main" id="{787F7C9A-0177-47B0-91B0-03D6AFDD5D64}"/>
+                <a16:creationId xmlns:a16="http://schemas.microsoft.com/office/drawing/2014/main" id="{ACDFA9BB-FF7F-4538-8E42-D457F82DB378}"/>
               </a:ext>
             </a:extLst>
           </p:cNvPr>
@@ -7241,7 +9492,7 @@
           <p:cNvPr id="12" name="point-3">
             <a:extLst xmlns:a="http://schemas.openxmlformats.org/drawingml/2006/main">
               <a:ext uri="{FF2B5EF4-FFF2-40B4-BE49-F238E27FC236}">
-                <a16:creationId xmlns:a16="http://schemas.microsoft.com/office/drawing/2014/main" id="{FA2448AB-3A70-4F49-9945-8169D9AFFA37}"/>
+                <a16:creationId xmlns:a16="http://schemas.microsoft.com/office/drawing/2014/main" id="{FE5C34AC-CCB7-4390-BA7E-2C6C2D3B69CB}"/>
               </a:ext>
             </a:extLst>
           </p:cNvPr>
@@ -7299,7 +9550,7 @@
           <p:cNvPr id="13" name="point-band-4">
             <a:extLst xmlns:a="http://schemas.openxmlformats.org/drawingml/2006/main">
               <a:ext uri="{FF2B5EF4-FFF2-40B4-BE49-F238E27FC236}">
-                <a16:creationId xmlns:a16="http://schemas.microsoft.com/office/drawing/2014/main" id="{95D93227-57F3-447F-AA2D-C85E7B953E55}"/>
+                <a16:creationId xmlns:a16="http://schemas.microsoft.com/office/drawing/2014/main" id="{2BBE974C-9DD5-43B8-877E-7AA4C6874807}"/>
               </a:ext>
             </a:extLst>
           </p:cNvPr>
@@ -7332,7 +9583,7 @@
           <p:cNvPr id="14" name="point-4">
             <a:extLst xmlns:a="http://schemas.openxmlformats.org/drawingml/2006/main">
               <a:ext uri="{FF2B5EF4-FFF2-40B4-BE49-F238E27FC236}">
-                <a16:creationId xmlns:a16="http://schemas.microsoft.com/office/drawing/2014/main" id="{5A20938D-338A-4564-A9BF-DEA386DD1C06}"/>
+                <a16:creationId xmlns:a16="http://schemas.microsoft.com/office/drawing/2014/main" id="{6A54332E-ED53-4F7C-885E-C43A8A4AB0A6}"/>
               </a:ext>
             </a:extLst>
           </p:cNvPr>
@@ -7388,7 +9639,7 @@
     </p:spTree>
     <p:extLst>
       <p:ext uri="{BB962C8B-B14F-4D97-AF65-F5344CB8AC3E}">
-        <p14:creationId xmlns:p14="http://schemas.microsoft.com/office/powerpoint/2010/main" val="1433830268"/>
+        <p14:creationId xmlns:p14="http://schemas.microsoft.com/office/powerpoint/2010/main" val="1567577147"/>
       </p:ext>
     </p:extLst>
   </p:cSld>
@@ -7416,10 +9667,10 @@
       </p:grpSpPr>
       <p:sp>
         <p:nvSpPr>
-          <p:cNvPr id="18" name="accent-line">
-            <a:extLst xmlns:a="http://schemas.openxmlformats.org/drawingml/2006/main">
-              <a:ext uri="{FF2B5EF4-FFF2-40B4-BE49-F238E27FC236}">
-                <a16:creationId xmlns:a16="http://schemas.microsoft.com/office/drawing/2014/main" id="{0CF29642-0E66-4D4E-B6CB-2FC8C4E20733}"/>
+          <p:cNvPr id="9" name="accent-line">
+            <a:extLst xmlns:a="http://schemas.openxmlformats.org/drawingml/2006/main">
+              <a:ext uri="{FF2B5EF4-FFF2-40B4-BE49-F238E27FC236}">
+                <a16:creationId xmlns:a16="http://schemas.microsoft.com/office/drawing/2014/main" id="{5274279A-B71F-44D2-95DA-D65D5F837EB1}"/>
               </a:ext>
             </a:extLst>
           </p:cNvPr>
@@ -7452,7 +9703,7 @@
           <p:cNvPr id="2" name="chapter-label">
             <a:extLst xmlns:a="http://schemas.openxmlformats.org/drawingml/2006/main">
               <a:ext uri="{FF2B5EF4-FFF2-40B4-BE49-F238E27FC236}">
-                <a16:creationId xmlns:a16="http://schemas.microsoft.com/office/drawing/2014/main" id="{62A04E1A-A6B5-48B3-8C75-E55D857CBE26}"/>
+                <a16:creationId xmlns:a16="http://schemas.microsoft.com/office/drawing/2014/main" id="{662D1F89-FD63-48BE-831C-1F00141B460A}"/>
               </a:ext>
             </a:extLst>
           </p:cNvPr>
@@ -7500,7 +9751,7 @@
                 <a:ea typeface="Helvetica Neue"/>
                 <a:cs typeface="Helvetica Neue"/>
               </a:rPr>
-              <a:t>EXAM CHECK  /  11</a:t>
+              <a:t>CORE IDEA 07  /  11</a:t>
             </a:r>
           </a:p>
         </p:txBody>
@@ -7510,7 +9761,7 @@
           <p:cNvPr id="3" name="slide-number">
             <a:extLst xmlns:a="http://schemas.openxmlformats.org/drawingml/2006/main">
               <a:ext uri="{FF2B5EF4-FFF2-40B4-BE49-F238E27FC236}">
-                <a16:creationId xmlns:a16="http://schemas.microsoft.com/office/drawing/2014/main" id="{7C9A86D9-0A5D-4057-8584-73EEE7AADCB4}"/>
+                <a16:creationId xmlns:a16="http://schemas.microsoft.com/office/drawing/2014/main" id="{FF88EE5E-1F2C-4CDB-A66F-7F7F9D92C50C}"/>
               </a:ext>
             </a:extLst>
           </p:cNvPr>
@@ -7568,7 +9819,7 @@
           <p:cNvPr id="4" name="chapter-footer">
             <a:extLst xmlns:a="http://schemas.openxmlformats.org/drawingml/2006/main">
               <a:ext uri="{FF2B5EF4-FFF2-40B4-BE49-F238E27FC236}">
-                <a16:creationId xmlns:a16="http://schemas.microsoft.com/office/drawing/2014/main" id="{62A58783-41BD-4FD2-BB0D-5E749D962036}"/>
+                <a16:creationId xmlns:a16="http://schemas.microsoft.com/office/drawing/2014/main" id="{71145BE2-31D8-4582-AB27-6B00E3BB6283}"/>
               </a:ext>
             </a:extLst>
           </p:cNvPr>
@@ -7623,138 +9874,22 @@
       </p:sp>
       <p:sp>
         <p:nvSpPr>
-          <p:cNvPr id="5" name="exam-title">
-            <a:extLst xmlns:a="http://schemas.openxmlformats.org/drawingml/2006/main">
-              <a:ext uri="{FF2B5EF4-FFF2-40B4-BE49-F238E27FC236}">
-                <a16:creationId xmlns:a16="http://schemas.microsoft.com/office/drawing/2014/main" id="{1B05CBB6-7217-4BE9-B1AA-F0AF860C2508}"/>
-              </a:ext>
-            </a:extLst>
-          </p:cNvPr>
-          <p:cNvSpPr>
-            <a:spLocks xmlns:a="http://schemas.openxmlformats.org/drawingml/2006/main" noGrp="1"/>
-          </p:cNvSpPr>
-          <p:nvPr/>
-        </p:nvSpPr>
-        <p:spPr>
-          <a:xfrm xmlns:a="http://schemas.openxmlformats.org/drawingml/2006/main">
-            <a:off x="390525" y="981075"/>
-            <a:ext cx="10668000" cy="781050"/>
-          </a:xfrm>
-          <a:prstGeom xmlns:a="http://schemas.openxmlformats.org/drawingml/2006/main" prst="rect">
-            <a:avLst/>
-          </a:prstGeom>
-          <a:noFill xmlns:a="http://schemas.openxmlformats.org/drawingml/2006/main"/>
-          <a:ln xmlns:a="http://schemas.openxmlformats.org/drawingml/2006/main" w="0">
-            <a:noFill/>
-            <a:prstDash val="solid"/>
-          </a:ln>
-        </p:spPr>
-        <p:txBody>
-          <a:bodyPr xmlns:a="http://schemas.openxmlformats.org/drawingml/2006/main" anchor="t">
-            <a:noAutofit/>
-          </a:bodyPr>
-          <a:lstStyle xmlns:a="http://schemas.openxmlformats.org/drawingml/2006/main"/>
-          <a:p xmlns:a="http://schemas.openxmlformats.org/drawingml/2006/main">
-            <a:pPr algn="l">
-              <a:defRPr sz="3150" b="1">
-                <a:solidFill>
-                  <a:srgbClr val="111111"/>
-                </a:solidFill>
-                <a:latin typeface="Helvetica Neue"/>
-                <a:ea typeface="Helvetica Neue"/>
-                <a:cs typeface="Helvetica Neue"/>
-              </a:defRPr>
-            </a:pPr>
-            <a:r>
-              <a:rPr sz="3150" b="1">
-                <a:solidFill>
-                  <a:srgbClr val="111111"/>
-                </a:solidFill>
-                <a:latin typeface="Helvetica Neue"/>
-                <a:ea typeface="Helvetica Neue"/>
-                <a:cs typeface="Helvetica Neue"/>
-              </a:rPr>
-              <a:t>Can you answer these without notes?</a:t>
-            </a:r>
-          </a:p>
-        </p:txBody>
-      </p:sp>
-      <p:sp>
-        <p:nvSpPr>
-          <p:cNvPr id="6" name="exam-number-1">
-            <a:extLst xmlns:a="http://schemas.openxmlformats.org/drawingml/2006/main">
-              <a:ext uri="{FF2B5EF4-FFF2-40B4-BE49-F238E27FC236}">
-                <a16:creationId xmlns:a16="http://schemas.microsoft.com/office/drawing/2014/main" id="{5DD84430-7477-4677-9716-0D4E4FE4BC19}"/>
-              </a:ext>
-            </a:extLst>
-          </p:cNvPr>
-          <p:cNvSpPr>
-            <a:spLocks xmlns:a="http://schemas.openxmlformats.org/drawingml/2006/main" noGrp="1"/>
-          </p:cNvSpPr>
-          <p:nvPr/>
-        </p:nvSpPr>
-        <p:spPr>
-          <a:xfrm xmlns:a="http://schemas.openxmlformats.org/drawingml/2006/main">
-            <a:off x="390525" y="2238375"/>
-            <a:ext cx="590550" cy="400050"/>
-          </a:xfrm>
-          <a:prstGeom xmlns:a="http://schemas.openxmlformats.org/drawingml/2006/main" prst="rect">
-            <a:avLst/>
-          </a:prstGeom>
-          <a:noFill xmlns:a="http://schemas.openxmlformats.org/drawingml/2006/main"/>
-          <a:ln xmlns:a="http://schemas.openxmlformats.org/drawingml/2006/main" w="0">
-            <a:noFill/>
-            <a:prstDash val="solid"/>
-          </a:ln>
-        </p:spPr>
-        <p:txBody>
-          <a:bodyPr xmlns:a="http://schemas.openxmlformats.org/drawingml/2006/main" anchor="t">
-            <a:noAutofit/>
-          </a:bodyPr>
-          <a:lstStyle xmlns:a="http://schemas.openxmlformats.org/drawingml/2006/main"/>
-          <a:p xmlns:a="http://schemas.openxmlformats.org/drawingml/2006/main">
-            <a:pPr algn="l">
-              <a:defRPr sz="1725" b="1">
-                <a:solidFill>
-                  <a:srgbClr val="C4A1FF"/>
-                </a:solidFill>
-                <a:latin typeface="Helvetica Neue"/>
-                <a:ea typeface="Helvetica Neue"/>
-                <a:cs typeface="Helvetica Neue"/>
-              </a:defRPr>
-            </a:pPr>
-            <a:r>
-              <a:rPr sz="1725" b="1">
-                <a:solidFill>
-                  <a:srgbClr val="C4A1FF"/>
-                </a:solidFill>
-                <a:latin typeface="Helvetica Neue"/>
-                <a:ea typeface="Helvetica Neue"/>
-                <a:cs typeface="Helvetica Neue"/>
-              </a:rPr>
-              <a:t>01</a:t>
-            </a:r>
-          </a:p>
-        </p:txBody>
-      </p:sp>
-      <p:sp>
-        <p:nvSpPr>
-          <p:cNvPr id="7" name="exam-question-1">
-            <a:extLst xmlns:a="http://schemas.openxmlformats.org/drawingml/2006/main">
-              <a:ext uri="{FF2B5EF4-FFF2-40B4-BE49-F238E27FC236}">
-                <a16:creationId xmlns:a16="http://schemas.microsoft.com/office/drawing/2014/main" id="{80099BD2-1D1B-4C08-86D1-CD5CB2565637}"/>
-              </a:ext>
-            </a:extLst>
-          </p:cNvPr>
-          <p:cNvSpPr>
-            <a:spLocks xmlns:a="http://schemas.openxmlformats.org/drawingml/2006/main" noGrp="1"/>
-          </p:cNvSpPr>
-          <p:nvPr/>
-        </p:nvSpPr>
-        <p:spPr>
-          <a:xfrm xmlns:a="http://schemas.openxmlformats.org/drawingml/2006/main">
-            <a:off x="1076325" y="2238375"/>
-            <a:ext cx="4762500" cy="895350"/>
+          <p:cNvPr id="5" name="section-title">
+            <a:extLst xmlns:a="http://schemas.openxmlformats.org/drawingml/2006/main">
+              <a:ext uri="{FF2B5EF4-FFF2-40B4-BE49-F238E27FC236}">
+                <a16:creationId xmlns:a16="http://schemas.microsoft.com/office/drawing/2014/main" id="{EDCA3A32-FB97-4936-B193-60AA3E51F4CD}"/>
+              </a:ext>
+            </a:extLst>
+          </p:cNvPr>
+          <p:cNvSpPr>
+            <a:spLocks xmlns:a="http://schemas.openxmlformats.org/drawingml/2006/main" noGrp="1"/>
+          </p:cNvSpPr>
+          <p:nvPr/>
+        </p:nvSpPr>
+        <p:spPr>
+          <a:xfrm xmlns:a="http://schemas.openxmlformats.org/drawingml/2006/main">
+            <a:off x="390525" y="971550"/>
+            <a:ext cx="11144250" cy="971550"/>
           </a:xfrm>
           <a:prstGeom xmlns:a="http://schemas.openxmlformats.org/drawingml/2006/main" prst="rect">
             <a:avLst/>
@@ -7772,105 +9907,47 @@
           <a:lstStyle xmlns:a="http://schemas.openxmlformats.org/drawingml/2006/main"/>
           <a:p xmlns:a="http://schemas.openxmlformats.org/drawingml/2006/main">
             <a:pPr algn="l">
-              <a:defRPr sz="1575" b="1">
-                <a:solidFill>
-                  <a:srgbClr val="111111"/>
-                </a:solidFill>
-                <a:latin typeface="Helvetica Neue"/>
-                <a:ea typeface="Helvetica Neue"/>
-                <a:cs typeface="Helvetica Neue"/>
-              </a:defRPr>
-            </a:pPr>
-            <a:r>
-              <a:rPr sz="1575" b="1">
-                <a:solidFill>
-                  <a:srgbClr val="111111"/>
-                </a:solidFill>
-                <a:latin typeface="Helvetica Neue"/>
-                <a:ea typeface="Helvetica Neue"/>
-                <a:cs typeface="Helvetica Neue"/>
-              </a:rPr>
-              <a:t>Why is agent evaluation harder than single-answer evaluation?</a:t>
-            </a:r>
-          </a:p>
-        </p:txBody>
-      </p:sp>
-      <p:sp>
-        <p:nvSpPr>
-          <p:cNvPr id="8" name="exam-number-2">
-            <a:extLst xmlns:a="http://schemas.openxmlformats.org/drawingml/2006/main">
-              <a:ext uri="{FF2B5EF4-FFF2-40B4-BE49-F238E27FC236}">
-                <a16:creationId xmlns:a16="http://schemas.microsoft.com/office/drawing/2014/main" id="{EE8E318C-F521-444A-A9F7-0E07B54323C0}"/>
-              </a:ext>
-            </a:extLst>
-          </p:cNvPr>
-          <p:cNvSpPr>
-            <a:spLocks xmlns:a="http://schemas.openxmlformats.org/drawingml/2006/main" noGrp="1"/>
-          </p:cNvSpPr>
-          <p:nvPr/>
-        </p:nvSpPr>
-        <p:spPr>
-          <a:xfrm xmlns:a="http://schemas.openxmlformats.org/drawingml/2006/main">
-            <a:off x="6191250" y="2238375"/>
-            <a:ext cx="590550" cy="400050"/>
-          </a:xfrm>
-          <a:prstGeom xmlns:a="http://schemas.openxmlformats.org/drawingml/2006/main" prst="rect">
-            <a:avLst/>
-          </a:prstGeom>
-          <a:noFill xmlns:a="http://schemas.openxmlformats.org/drawingml/2006/main"/>
-          <a:ln xmlns:a="http://schemas.openxmlformats.org/drawingml/2006/main" w="0">
-            <a:noFill/>
-            <a:prstDash val="solid"/>
-          </a:ln>
-        </p:spPr>
-        <p:txBody>
-          <a:bodyPr xmlns:a="http://schemas.openxmlformats.org/drawingml/2006/main" anchor="t">
-            <a:noAutofit/>
-          </a:bodyPr>
-          <a:lstStyle xmlns:a="http://schemas.openxmlformats.org/drawingml/2006/main"/>
-          <a:p xmlns:a="http://schemas.openxmlformats.org/drawingml/2006/main">
-            <a:pPr algn="l">
-              <a:defRPr sz="1725" b="1">
-                <a:solidFill>
-                  <a:srgbClr val="C4A1FF"/>
-                </a:solidFill>
-                <a:latin typeface="Helvetica Neue"/>
-                <a:ea typeface="Helvetica Neue"/>
-                <a:cs typeface="Helvetica Neue"/>
-              </a:defRPr>
-            </a:pPr>
-            <a:r>
-              <a:rPr sz="1725" b="1">
-                <a:solidFill>
-                  <a:srgbClr val="C4A1FF"/>
-                </a:solidFill>
-                <a:latin typeface="Helvetica Neue"/>
-                <a:ea typeface="Helvetica Neue"/>
-                <a:cs typeface="Helvetica Neue"/>
-              </a:rPr>
-              <a:t>02</a:t>
-            </a:r>
-          </a:p>
-        </p:txBody>
-      </p:sp>
-      <p:sp>
-        <p:nvSpPr>
-          <p:cNvPr id="9" name="exam-question-2">
-            <a:extLst xmlns:a="http://schemas.openxmlformats.org/drawingml/2006/main">
-              <a:ext uri="{FF2B5EF4-FFF2-40B4-BE49-F238E27FC236}">
-                <a16:creationId xmlns:a16="http://schemas.microsoft.com/office/drawing/2014/main" id="{7C6D880B-3157-447A-89C7-ABBA125A7451}"/>
-              </a:ext>
-            </a:extLst>
-          </p:cNvPr>
-          <p:cNvSpPr>
-            <a:spLocks xmlns:a="http://schemas.openxmlformats.org/drawingml/2006/main" noGrp="1"/>
-          </p:cNvSpPr>
-          <p:nvPr/>
-        </p:nvSpPr>
-        <p:spPr>
-          <a:xfrm xmlns:a="http://schemas.openxmlformats.org/drawingml/2006/main">
-            <a:off x="6877050" y="2238375"/>
-            <a:ext cx="4762500" cy="895350"/>
+              <a:defRPr sz="3000" b="1">
+                <a:solidFill>
+                  <a:srgbClr val="111111"/>
+                </a:solidFill>
+                <a:latin typeface="Helvetica Neue"/>
+                <a:ea typeface="Helvetica Neue"/>
+                <a:cs typeface="Helvetica Neue"/>
+              </a:defRPr>
+            </a:pPr>
+            <a:r>
+              <a:rPr sz="3000" b="1">
+                <a:solidFill>
+                  <a:srgbClr val="111111"/>
+                </a:solidFill>
+                <a:latin typeface="Helvetica Neue"/>
+                <a:ea typeface="Helvetica Neue"/>
+                <a:cs typeface="Helvetica Neue"/>
+              </a:rPr>
+              <a:t>A run manifest makes comparisons reviewable</a:t>
+            </a:r>
+          </a:p>
+        </p:txBody>
+      </p:sp>
+      <p:sp>
+        <p:nvSpPr>
+          <p:cNvPr id="6" name="section-explanation">
+            <a:extLst xmlns:a="http://schemas.openxmlformats.org/drawingml/2006/main">
+              <a:ext uri="{FF2B5EF4-FFF2-40B4-BE49-F238E27FC236}">
+                <a16:creationId xmlns:a16="http://schemas.microsoft.com/office/drawing/2014/main" id="{00337414-3FD6-4C73-A9C5-34C4DA520944}"/>
+              </a:ext>
+            </a:extLst>
+          </p:cNvPr>
+          <p:cNvSpPr>
+            <a:spLocks xmlns:a="http://schemas.openxmlformats.org/drawingml/2006/main" noGrp="1"/>
+          </p:cNvSpPr>
+          <p:nvPr/>
+        </p:nvSpPr>
+        <p:spPr>
+          <a:xfrm xmlns:a="http://schemas.openxmlformats.org/drawingml/2006/main">
+            <a:off x="390525" y="2381250"/>
+            <a:ext cx="4524375" cy="2905125"/>
           </a:xfrm>
           <a:prstGeom xmlns:a="http://schemas.openxmlformats.org/drawingml/2006/main" prst="rect">
             <a:avLst/>
@@ -7888,105 +9965,80 @@
           <a:lstStyle xmlns:a="http://schemas.openxmlformats.org/drawingml/2006/main"/>
           <a:p xmlns:a="http://schemas.openxmlformats.org/drawingml/2006/main">
             <a:pPr algn="l">
-              <a:defRPr sz="1575" b="1">
-                <a:solidFill>
-                  <a:srgbClr val="111111"/>
-                </a:solidFill>
-                <a:latin typeface="Helvetica Neue"/>
-                <a:ea typeface="Helvetica Neue"/>
-                <a:cs typeface="Helvetica Neue"/>
-              </a:defRPr>
-            </a:pPr>
-            <a:r>
-              <a:rPr sz="1575" b="1">
-                <a:solidFill>
-                  <a:srgbClr val="111111"/>
-                </a:solidFill>
-                <a:latin typeface="Helvetica Neue"/>
-                <a:ea typeface="Helvetica Neue"/>
-                <a:cs typeface="Helvetica Neue"/>
-              </a:rPr>
-              <a:t>Give four outcome metrics and four trajectory metrics.</a:t>
-            </a:r>
-          </a:p>
-        </p:txBody>
-      </p:sp>
-      <p:sp>
-        <p:nvSpPr>
-          <p:cNvPr id="10" name="exam-number-3">
-            <a:extLst xmlns:a="http://schemas.openxmlformats.org/drawingml/2006/main">
-              <a:ext uri="{FF2B5EF4-FFF2-40B4-BE49-F238E27FC236}">
-                <a16:creationId xmlns:a16="http://schemas.microsoft.com/office/drawing/2014/main" id="{7A6ECDA5-714A-44B9-994D-3FE9AD83FB5E}"/>
-              </a:ext>
-            </a:extLst>
-          </p:cNvPr>
-          <p:cNvSpPr>
-            <a:spLocks xmlns:a="http://schemas.openxmlformats.org/drawingml/2006/main" noGrp="1"/>
-          </p:cNvSpPr>
-          <p:nvPr/>
-        </p:nvSpPr>
-        <p:spPr>
-          <a:xfrm xmlns:a="http://schemas.openxmlformats.org/drawingml/2006/main">
-            <a:off x="390525" y="3495675"/>
-            <a:ext cx="590550" cy="400050"/>
-          </a:xfrm>
-          <a:prstGeom xmlns:a="http://schemas.openxmlformats.org/drawingml/2006/main" prst="rect">
-            <a:avLst/>
-          </a:prstGeom>
-          <a:noFill xmlns:a="http://schemas.openxmlformats.org/drawingml/2006/main"/>
-          <a:ln xmlns:a="http://schemas.openxmlformats.org/drawingml/2006/main" w="0">
-            <a:noFill/>
-            <a:prstDash val="solid"/>
-          </a:ln>
-        </p:spPr>
-        <p:txBody>
-          <a:bodyPr xmlns:a="http://schemas.openxmlformats.org/drawingml/2006/main" anchor="t">
-            <a:noAutofit/>
-          </a:bodyPr>
-          <a:lstStyle xmlns:a="http://schemas.openxmlformats.org/drawingml/2006/main"/>
-          <a:p xmlns:a="http://schemas.openxmlformats.org/drawingml/2006/main">
-            <a:pPr algn="l">
-              <a:defRPr sz="1725" b="1">
-                <a:solidFill>
-                  <a:srgbClr val="C4A1FF"/>
-                </a:solidFill>
-                <a:latin typeface="Helvetica Neue"/>
-                <a:ea typeface="Helvetica Neue"/>
-                <a:cs typeface="Helvetica Neue"/>
-              </a:defRPr>
-            </a:pPr>
-            <a:r>
-              <a:rPr sz="1725" b="1">
-                <a:solidFill>
-                  <a:srgbClr val="C4A1FF"/>
-                </a:solidFill>
-                <a:latin typeface="Helvetica Neue"/>
-                <a:ea typeface="Helvetica Neue"/>
-                <a:cs typeface="Helvetica Neue"/>
-              </a:rPr>
-              <a:t>03</a:t>
-            </a:r>
-          </a:p>
-        </p:txBody>
-      </p:sp>
-      <p:sp>
-        <p:nvSpPr>
-          <p:cNvPr id="11" name="exam-question-3">
-            <a:extLst xmlns:a="http://schemas.openxmlformats.org/drawingml/2006/main">
-              <a:ext uri="{FF2B5EF4-FFF2-40B4-BE49-F238E27FC236}">
-                <a16:creationId xmlns:a16="http://schemas.microsoft.com/office/drawing/2014/main" id="{11AD2970-98B4-442E-8E9F-F8E5E74B5B66}"/>
-              </a:ext>
-            </a:extLst>
-          </p:cNvPr>
-          <p:cNvSpPr>
-            <a:spLocks xmlns:a="http://schemas.openxmlformats.org/drawingml/2006/main" noGrp="1"/>
-          </p:cNvSpPr>
-          <p:nvPr/>
-        </p:nvSpPr>
-        <p:spPr>
-          <a:xfrm xmlns:a="http://schemas.openxmlformats.org/drawingml/2006/main">
-            <a:off x="1076325" y="3495675"/>
-            <a:ext cx="4762500" cy="895350"/>
+              <a:defRPr sz="1875" b="0">
+                <a:solidFill>
+                  <a:srgbClr val="5B5B57"/>
+                </a:solidFill>
+                <a:latin typeface="Helvetica Neue"/>
+                <a:ea typeface="Helvetica Neue"/>
+                <a:cs typeface="Helvetica Neue"/>
+              </a:defRPr>
+            </a:pPr>
+            <a:r>
+              <a:rPr sz="1875" b="0">
+                <a:solidFill>
+                  <a:srgbClr val="5B5B57"/>
+                </a:solidFill>
+                <a:latin typeface="Helvetica Neue"/>
+                <a:ea typeface="Helvetica Neue"/>
+                <a:cs typeface="Helvetica Neue"/>
+              </a:rPr>
+              <a:t>Record the complete setup and every attempted run. A completed answer can be wrong, and an infrastructure failure is a different outcome. Fixed cases and explicit denominators make a comparison inspectable.</a:t>
+            </a:r>
+          </a:p>
+        </p:txBody>
+      </p:sp>
+      <p:sp>
+        <p:nvSpPr>
+          <p:cNvPr id="7" name="column-rule">
+            <a:extLst xmlns:a="http://schemas.openxmlformats.org/drawingml/2006/main">
+              <a:ext uri="{FF2B5EF4-FFF2-40B4-BE49-F238E27FC236}">
+                <a16:creationId xmlns:a16="http://schemas.microsoft.com/office/drawing/2014/main" id="{0CE56DD6-2E4E-4DC6-B074-F4355B2DA807}"/>
+              </a:ext>
+            </a:extLst>
+          </p:cNvPr>
+          <p:cNvSpPr>
+            <a:spLocks xmlns:a="http://schemas.openxmlformats.org/drawingml/2006/main" noGrp="1"/>
+          </p:cNvSpPr>
+          <p:nvPr/>
+        </p:nvSpPr>
+        <p:spPr>
+          <a:xfrm xmlns:a="http://schemas.openxmlformats.org/drawingml/2006/main">
+            <a:off x="5334000" y="2343150"/>
+            <a:ext cx="47625" cy="3257550"/>
+          </a:xfrm>
+          <a:prstGeom xmlns:a="http://schemas.openxmlformats.org/drawingml/2006/main" prst="rect">
+            <a:avLst/>
+          </a:prstGeom>
+          <a:solidFill xmlns:a="http://schemas.openxmlformats.org/drawingml/2006/main">
+            <a:srgbClr val="C4A1FF"/>
+          </a:solidFill>
+          <a:ln xmlns:a="http://schemas.openxmlformats.org/drawingml/2006/main" w="0">
+            <a:solidFill>
+              <a:srgbClr val="C4A1FF"/>
+            </a:solidFill>
+            <a:prstDash val="solid"/>
+          </a:ln>
+        </p:spPr>
+      </p:sp>
+      <p:sp>
+        <p:nvSpPr>
+          <p:cNvPr id="8" name="section-points">
+            <a:extLst xmlns:a="http://schemas.openxmlformats.org/drawingml/2006/main">
+              <a:ext uri="{FF2B5EF4-FFF2-40B4-BE49-F238E27FC236}">
+                <a16:creationId xmlns:a16="http://schemas.microsoft.com/office/drawing/2014/main" id="{75378CEE-AF25-43A3-A649-A52743043EEF}"/>
+              </a:ext>
+            </a:extLst>
+          </p:cNvPr>
+          <p:cNvSpPr>
+            <a:spLocks xmlns:a="http://schemas.openxmlformats.org/drawingml/2006/main" noGrp="1"/>
+          </p:cNvSpPr>
+          <p:nvPr/>
+        </p:nvSpPr>
+        <p:spPr>
+          <a:xfrm xmlns:a="http://schemas.openxmlformats.org/drawingml/2006/main">
+            <a:off x="5857875" y="2343150"/>
+            <a:ext cx="5572125" cy="3429000"/>
           </a:xfrm>
           <a:prstGeom xmlns:a="http://schemas.openxmlformats.org/drawingml/2006/main" prst="rect">
             <a:avLst/>
@@ -8004,67 +10056,37 @@
           <a:lstStyle xmlns:a="http://schemas.openxmlformats.org/drawingml/2006/main"/>
           <a:p xmlns:a="http://schemas.openxmlformats.org/drawingml/2006/main">
             <a:pPr algn="l">
-              <a:defRPr sz="1575" b="1">
-                <a:solidFill>
-                  <a:srgbClr val="111111"/>
-                </a:solidFill>
-                <a:latin typeface="Helvetica Neue"/>
-                <a:ea typeface="Helvetica Neue"/>
-                <a:cs typeface="Helvetica Neue"/>
-              </a:defRPr>
-            </a:pPr>
-            <a:r>
-              <a:rPr sz="1575" b="1">
-                <a:solidFill>
-                  <a:srgbClr val="111111"/>
-                </a:solidFill>
-                <a:latin typeface="Helvetica Neue"/>
-                <a:ea typeface="Helvetica Neue"/>
-                <a:cs typeface="Helvetica Neue"/>
-              </a:rPr>
-              <a:t>What makes execution-based evaluation strong?</a:t>
-            </a:r>
-          </a:p>
-        </p:txBody>
-      </p:sp>
-      <p:sp>
-        <p:nvSpPr>
-          <p:cNvPr id="12" name="exam-number-4">
-            <a:extLst xmlns:a="http://schemas.openxmlformats.org/drawingml/2006/main">
-              <a:ext uri="{FF2B5EF4-FFF2-40B4-BE49-F238E27FC236}">
-                <a16:creationId xmlns:a16="http://schemas.microsoft.com/office/drawing/2014/main" id="{BBF5872E-1D7D-4475-8A4F-165B1387E4E3}"/>
-              </a:ext>
-            </a:extLst>
-          </p:cNvPr>
-          <p:cNvSpPr>
-            <a:spLocks xmlns:a="http://schemas.openxmlformats.org/drawingml/2006/main" noGrp="1"/>
-          </p:cNvSpPr>
-          <p:nvPr/>
-        </p:nvSpPr>
-        <p:spPr>
-          <a:xfrm xmlns:a="http://schemas.openxmlformats.org/drawingml/2006/main">
-            <a:off x="6191250" y="3495675"/>
-            <a:ext cx="590550" cy="400050"/>
-          </a:xfrm>
-          <a:prstGeom xmlns:a="http://schemas.openxmlformats.org/drawingml/2006/main" prst="rect">
-            <a:avLst/>
-          </a:prstGeom>
-          <a:noFill xmlns:a="http://schemas.openxmlformats.org/drawingml/2006/main"/>
-          <a:ln xmlns:a="http://schemas.openxmlformats.org/drawingml/2006/main" w="0">
-            <a:noFill/>
-            <a:prstDash val="solid"/>
-          </a:ln>
-        </p:spPr>
-        <p:txBody>
-          <a:bodyPr xmlns:a="http://schemas.openxmlformats.org/drawingml/2006/main" anchor="t">
-            <a:noAutofit/>
-          </a:bodyPr>
-          <a:lstStyle xmlns:a="http://schemas.openxmlformats.org/drawingml/2006/main"/>
+              <a:defRPr sz="1725" b="1">
+                <a:solidFill>
+                  <a:srgbClr val="111111"/>
+                </a:solidFill>
+                <a:latin typeface="Helvetica Neue"/>
+                <a:ea typeface="Helvetica Neue"/>
+                <a:cs typeface="Helvetica Neue"/>
+              </a:defRPr>
+            </a:pPr>
+            <a:r>
+              <a:rPr sz="1725" b="1">
+                <a:solidFill>
+                  <a:srgbClr val="111111"/>
+                </a:solidFill>
+                <a:latin typeface="Helvetica Neue"/>
+                <a:ea typeface="Helvetica Neue"/>
+                <a:cs typeface="Helvetica Neue"/>
+              </a:rPr>
+              <a:t>01  Store model ID, prompt hash, and dependency versions.</a:t>
+            </a:r>
+          </a:p>
+          <a:p xmlns:a="http://schemas.openxmlformats.org/drawingml/2006/main">
+            <a:r>
+              <a:t/>
+            </a:r>
+          </a:p>
           <a:p xmlns:a="http://schemas.openxmlformats.org/drawingml/2006/main">
             <a:pPr algn="l">
               <a:defRPr sz="1725" b="1">
                 <a:solidFill>
-                  <a:srgbClr val="C4A1FF"/>
+                  <a:srgbClr val="111111"/>
                 </a:solidFill>
                 <a:latin typeface="Helvetica Neue"/>
                 <a:ea typeface="Helvetica Neue"/>
@@ -8074,113 +10096,25 @@
             <a:r>
               <a:rPr sz="1725" b="1">
                 <a:solidFill>
-                  <a:srgbClr val="C4A1FF"/>
-                </a:solidFill>
-                <a:latin typeface="Helvetica Neue"/>
-                <a:ea typeface="Helvetica Neue"/>
-                <a:cs typeface="Helvetica Neue"/>
-              </a:rPr>
-              <a:t>04</a:t>
-            </a:r>
-          </a:p>
-        </p:txBody>
-      </p:sp>
-      <p:sp>
-        <p:nvSpPr>
-          <p:cNvPr id="13" name="exam-question-4">
-            <a:extLst xmlns:a="http://schemas.openxmlformats.org/drawingml/2006/main">
-              <a:ext uri="{FF2B5EF4-FFF2-40B4-BE49-F238E27FC236}">
-                <a16:creationId xmlns:a16="http://schemas.microsoft.com/office/drawing/2014/main" id="{1F94ED1A-F54E-4BCA-B5D6-4988CC005650}"/>
-              </a:ext>
-            </a:extLst>
-          </p:cNvPr>
-          <p:cNvSpPr>
-            <a:spLocks xmlns:a="http://schemas.openxmlformats.org/drawingml/2006/main" noGrp="1"/>
-          </p:cNvSpPr>
-          <p:nvPr/>
-        </p:nvSpPr>
-        <p:spPr>
-          <a:xfrm xmlns:a="http://schemas.openxmlformats.org/drawingml/2006/main">
-            <a:off x="6877050" y="3495675"/>
-            <a:ext cx="4762500" cy="895350"/>
-          </a:xfrm>
-          <a:prstGeom xmlns:a="http://schemas.openxmlformats.org/drawingml/2006/main" prst="rect">
-            <a:avLst/>
-          </a:prstGeom>
-          <a:noFill xmlns:a="http://schemas.openxmlformats.org/drawingml/2006/main"/>
-          <a:ln xmlns:a="http://schemas.openxmlformats.org/drawingml/2006/main" w="0">
-            <a:noFill/>
-            <a:prstDash val="solid"/>
-          </a:ln>
-        </p:spPr>
-        <p:txBody>
-          <a:bodyPr xmlns:a="http://schemas.openxmlformats.org/drawingml/2006/main" anchor="t">
-            <a:normAutofit fontScale="100000"/>
-          </a:bodyPr>
-          <a:lstStyle xmlns:a="http://schemas.openxmlformats.org/drawingml/2006/main"/>
-          <a:p xmlns:a="http://schemas.openxmlformats.org/drawingml/2006/main">
-            <a:pPr algn="l">
-              <a:defRPr sz="1575" b="1">
-                <a:solidFill>
-                  <a:srgbClr val="111111"/>
-                </a:solidFill>
-                <a:latin typeface="Helvetica Neue"/>
-                <a:ea typeface="Helvetica Neue"/>
-                <a:cs typeface="Helvetica Neue"/>
-              </a:defRPr>
-            </a:pPr>
-            <a:r>
-              <a:rPr sz="1575" b="1">
-                <a:solidFill>
-                  <a:srgbClr val="111111"/>
-                </a:solidFill>
-                <a:latin typeface="Helvetica Neue"/>
-                <a:ea typeface="Helvetica Neue"/>
-                <a:cs typeface="Helvetica Neue"/>
-              </a:rPr>
-              <a:t>How can benchmark contamination and weak tests mislead?</a:t>
-            </a:r>
-          </a:p>
-        </p:txBody>
-      </p:sp>
-      <p:sp>
-        <p:nvSpPr>
-          <p:cNvPr id="14" name="exam-number-5">
-            <a:extLst xmlns:a="http://schemas.openxmlformats.org/drawingml/2006/main">
-              <a:ext uri="{FF2B5EF4-FFF2-40B4-BE49-F238E27FC236}">
-                <a16:creationId xmlns:a16="http://schemas.microsoft.com/office/drawing/2014/main" id="{4E26E127-ED48-4FFC-A069-1C7187222FF8}"/>
-              </a:ext>
-            </a:extLst>
-          </p:cNvPr>
-          <p:cNvSpPr>
-            <a:spLocks xmlns:a="http://schemas.openxmlformats.org/drawingml/2006/main" noGrp="1"/>
-          </p:cNvSpPr>
-          <p:nvPr/>
-        </p:nvSpPr>
-        <p:spPr>
-          <a:xfrm xmlns:a="http://schemas.openxmlformats.org/drawingml/2006/main">
-            <a:off x="390525" y="4752975"/>
-            <a:ext cx="590550" cy="400050"/>
-          </a:xfrm>
-          <a:prstGeom xmlns:a="http://schemas.openxmlformats.org/drawingml/2006/main" prst="rect">
-            <a:avLst/>
-          </a:prstGeom>
-          <a:noFill xmlns:a="http://schemas.openxmlformats.org/drawingml/2006/main"/>
-          <a:ln xmlns:a="http://schemas.openxmlformats.org/drawingml/2006/main" w="0">
-            <a:noFill/>
-            <a:prstDash val="solid"/>
-          </a:ln>
-        </p:spPr>
-        <p:txBody>
-          <a:bodyPr xmlns:a="http://schemas.openxmlformats.org/drawingml/2006/main" anchor="t">
-            <a:noAutofit/>
-          </a:bodyPr>
-          <a:lstStyle xmlns:a="http://schemas.openxmlformats.org/drawingml/2006/main"/>
+                  <a:srgbClr val="111111"/>
+                </a:solidFill>
+                <a:latin typeface="Helvetica Neue"/>
+                <a:ea typeface="Helvetica Neue"/>
+                <a:cs typeface="Helvetica Neue"/>
+              </a:rPr>
+              <a:t>02  Record attempted and completed runs separately.</a:t>
+            </a:r>
+          </a:p>
+          <a:p xmlns:a="http://schemas.openxmlformats.org/drawingml/2006/main">
+            <a:r>
+              <a:t/>
+            </a:r>
+          </a:p>
           <a:p xmlns:a="http://schemas.openxmlformats.org/drawingml/2006/main">
             <a:pPr algn="l">
               <a:defRPr sz="1725" b="1">
                 <a:solidFill>
-                  <a:srgbClr val="C4A1FF"/>
+                  <a:srgbClr val="111111"/>
                 </a:solidFill>
                 <a:latin typeface="Helvetica Neue"/>
                 <a:ea typeface="Helvetica Neue"/>
@@ -8190,187 +10124,13 @@
             <a:r>
               <a:rPr sz="1725" b="1">
                 <a:solidFill>
-                  <a:srgbClr val="C4A1FF"/>
-                </a:solidFill>
-                <a:latin typeface="Helvetica Neue"/>
-                <a:ea typeface="Helvetica Neue"/>
-                <a:cs typeface="Helvetica Neue"/>
-              </a:rPr>
-              <a:t>05</a:t>
-            </a:r>
-          </a:p>
-        </p:txBody>
-      </p:sp>
-      <p:sp>
-        <p:nvSpPr>
-          <p:cNvPr id="15" name="exam-question-5">
-            <a:extLst xmlns:a="http://schemas.openxmlformats.org/drawingml/2006/main">
-              <a:ext uri="{FF2B5EF4-FFF2-40B4-BE49-F238E27FC236}">
-                <a16:creationId xmlns:a16="http://schemas.microsoft.com/office/drawing/2014/main" id="{DDBFD447-787F-4FD2-BCFF-B18F332BFB97}"/>
-              </a:ext>
-            </a:extLst>
-          </p:cNvPr>
-          <p:cNvSpPr>
-            <a:spLocks xmlns:a="http://schemas.openxmlformats.org/drawingml/2006/main" noGrp="1"/>
-          </p:cNvSpPr>
-          <p:nvPr/>
-        </p:nvSpPr>
-        <p:spPr>
-          <a:xfrm xmlns:a="http://schemas.openxmlformats.org/drawingml/2006/main">
-            <a:off x="1076325" y="4752975"/>
-            <a:ext cx="4762500" cy="895350"/>
-          </a:xfrm>
-          <a:prstGeom xmlns:a="http://schemas.openxmlformats.org/drawingml/2006/main" prst="rect">
-            <a:avLst/>
-          </a:prstGeom>
-          <a:noFill xmlns:a="http://schemas.openxmlformats.org/drawingml/2006/main"/>
-          <a:ln xmlns:a="http://schemas.openxmlformats.org/drawingml/2006/main" w="0">
-            <a:noFill/>
-            <a:prstDash val="solid"/>
-          </a:ln>
-        </p:spPr>
-        <p:txBody>
-          <a:bodyPr xmlns:a="http://schemas.openxmlformats.org/drawingml/2006/main" anchor="t">
-            <a:normAutofit fontScale="100000"/>
-          </a:bodyPr>
-          <a:lstStyle xmlns:a="http://schemas.openxmlformats.org/drawingml/2006/main"/>
-          <a:p xmlns:a="http://schemas.openxmlformats.org/drawingml/2006/main">
-            <a:pPr algn="l">
-              <a:defRPr sz="1575" b="1">
-                <a:solidFill>
-                  <a:srgbClr val="111111"/>
-                </a:solidFill>
-                <a:latin typeface="Helvetica Neue"/>
-                <a:ea typeface="Helvetica Neue"/>
-                <a:cs typeface="Helvetica Neue"/>
-              </a:defRPr>
-            </a:pPr>
-            <a:r>
-              <a:rPr sz="1575" b="1">
-                <a:solidFill>
-                  <a:srgbClr val="111111"/>
-                </a:solidFill>
-                <a:latin typeface="Helvetica Neue"/>
-                <a:ea typeface="Helvetica Neue"/>
-                <a:cs typeface="Helvetica Neue"/>
-              </a:rPr>
-              <a:t>What biases affect LLM-as-judge?</a:t>
-            </a:r>
-          </a:p>
-        </p:txBody>
-      </p:sp>
-      <p:sp>
-        <p:nvSpPr>
-          <p:cNvPr id="16" name="exam-number-6">
-            <a:extLst xmlns:a="http://schemas.openxmlformats.org/drawingml/2006/main">
-              <a:ext uri="{FF2B5EF4-FFF2-40B4-BE49-F238E27FC236}">
-                <a16:creationId xmlns:a16="http://schemas.microsoft.com/office/drawing/2014/main" id="{D3F72480-CF65-4747-B704-F6F82B1EAD99}"/>
-              </a:ext>
-            </a:extLst>
-          </p:cNvPr>
-          <p:cNvSpPr>
-            <a:spLocks xmlns:a="http://schemas.openxmlformats.org/drawingml/2006/main" noGrp="1"/>
-          </p:cNvSpPr>
-          <p:nvPr/>
-        </p:nvSpPr>
-        <p:spPr>
-          <a:xfrm xmlns:a="http://schemas.openxmlformats.org/drawingml/2006/main">
-            <a:off x="6191250" y="4752975"/>
-            <a:ext cx="590550" cy="400050"/>
-          </a:xfrm>
-          <a:prstGeom xmlns:a="http://schemas.openxmlformats.org/drawingml/2006/main" prst="rect">
-            <a:avLst/>
-          </a:prstGeom>
-          <a:noFill xmlns:a="http://schemas.openxmlformats.org/drawingml/2006/main"/>
-          <a:ln xmlns:a="http://schemas.openxmlformats.org/drawingml/2006/main" w="0">
-            <a:noFill/>
-            <a:prstDash val="solid"/>
-          </a:ln>
-        </p:spPr>
-        <p:txBody>
-          <a:bodyPr xmlns:a="http://schemas.openxmlformats.org/drawingml/2006/main" anchor="t">
-            <a:noAutofit/>
-          </a:bodyPr>
-          <a:lstStyle xmlns:a="http://schemas.openxmlformats.org/drawingml/2006/main"/>
-          <a:p xmlns:a="http://schemas.openxmlformats.org/drawingml/2006/main">
-            <a:pPr algn="l">
-              <a:defRPr sz="1725" b="1">
-                <a:solidFill>
-                  <a:srgbClr val="C4A1FF"/>
-                </a:solidFill>
-                <a:latin typeface="Helvetica Neue"/>
-                <a:ea typeface="Helvetica Neue"/>
-                <a:cs typeface="Helvetica Neue"/>
-              </a:defRPr>
-            </a:pPr>
-            <a:r>
-              <a:rPr sz="1725" b="1">
-                <a:solidFill>
-                  <a:srgbClr val="C4A1FF"/>
-                </a:solidFill>
-                <a:latin typeface="Helvetica Neue"/>
-                <a:ea typeface="Helvetica Neue"/>
-                <a:cs typeface="Helvetica Neue"/>
-              </a:rPr>
-              <a:t>06</a:t>
-            </a:r>
-          </a:p>
-        </p:txBody>
-      </p:sp>
-      <p:sp>
-        <p:nvSpPr>
-          <p:cNvPr id="17" name="exam-question-6">
-            <a:extLst xmlns:a="http://schemas.openxmlformats.org/drawingml/2006/main">
-              <a:ext uri="{FF2B5EF4-FFF2-40B4-BE49-F238E27FC236}">
-                <a16:creationId xmlns:a16="http://schemas.microsoft.com/office/drawing/2014/main" id="{46F29CD6-92B5-49C6-B2E3-70FA57B3FBC4}"/>
-              </a:ext>
-            </a:extLst>
-          </p:cNvPr>
-          <p:cNvSpPr>
-            <a:spLocks xmlns:a="http://schemas.openxmlformats.org/drawingml/2006/main" noGrp="1"/>
-          </p:cNvSpPr>
-          <p:nvPr/>
-        </p:nvSpPr>
-        <p:spPr>
-          <a:xfrm xmlns:a="http://schemas.openxmlformats.org/drawingml/2006/main">
-            <a:off x="6877050" y="4752975"/>
-            <a:ext cx="4762500" cy="895350"/>
-          </a:xfrm>
-          <a:prstGeom xmlns:a="http://schemas.openxmlformats.org/drawingml/2006/main" prst="rect">
-            <a:avLst/>
-          </a:prstGeom>
-          <a:noFill xmlns:a="http://schemas.openxmlformats.org/drawingml/2006/main"/>
-          <a:ln xmlns:a="http://schemas.openxmlformats.org/drawingml/2006/main" w="0">
-            <a:noFill/>
-            <a:prstDash val="solid"/>
-          </a:ln>
-        </p:spPr>
-        <p:txBody>
-          <a:bodyPr xmlns:a="http://schemas.openxmlformats.org/drawingml/2006/main" anchor="t">
-            <a:normAutofit fontScale="100000"/>
-          </a:bodyPr>
-          <a:lstStyle xmlns:a="http://schemas.openxmlformats.org/drawingml/2006/main"/>
-          <a:p xmlns:a="http://schemas.openxmlformats.org/drawingml/2006/main">
-            <a:pPr algn="l">
-              <a:defRPr sz="1575" b="1">
-                <a:solidFill>
-                  <a:srgbClr val="111111"/>
-                </a:solidFill>
-                <a:latin typeface="Helvetica Neue"/>
-                <a:ea typeface="Helvetica Neue"/>
-                <a:cs typeface="Helvetica Neue"/>
-              </a:defRPr>
-            </a:pPr>
-            <a:r>
-              <a:rPr sz="1575" b="1">
-                <a:solidFill>
-                  <a:srgbClr val="111111"/>
-                </a:solidFill>
-                <a:latin typeface="Helvetica Neue"/>
-                <a:ea typeface="Helvetica Neue"/>
-                <a:cs typeface="Helvetica Neue"/>
-              </a:rPr>
-              <a:t>What should a trace span record, and how does eval-in-CI use it?</a:t>
+                  <a:srgbClr val="111111"/>
+                </a:solidFill>
+                <a:latin typeface="Helvetica Neue"/>
+                <a:ea typeface="Helvetica Neue"/>
+                <a:cs typeface="Helvetica Neue"/>
+              </a:rPr>
+              <a:t>03  Keep outcome scoring separate from resource use.</a:t>
             </a:r>
           </a:p>
         </p:txBody>
@@ -8378,7 +10138,7 @@
     </p:spTree>
     <p:extLst>
       <p:ext uri="{BB962C8B-B14F-4D97-AF65-F5344CB8AC3E}">
-        <p14:creationId xmlns:p14="http://schemas.microsoft.com/office/powerpoint/2010/main" val="853946805"/>
+        <p14:creationId xmlns:p14="http://schemas.microsoft.com/office/powerpoint/2010/main" val="1184173051"/>
       </p:ext>
     </p:extLst>
   </p:cSld>
@@ -8386,9 +10146,9 @@
 </file>
 
 <file path=ppt/theme/theme1.xml><?xml version="1.0" encoding="utf-8"?>
-<a:theme xmlns:a="http://schemas.openxmlformats.org/drawingml/2006/main" name="ChatGPT">
+<a:theme xmlns:a="http://schemas.openxmlformats.org/drawingml/2006/main" name="Course">
   <a:themeElements>
-    <a:clrScheme name="ChatGPT">
+    <a:clrScheme name="Course">
       <a:dk1>
         <a:srgbClr val="000000"/>
       </a:dk1>
@@ -8438,7 +10198,7 @@
         <a:cs typeface="Calibri"/>
       </a:minorFont>
     </a:fontScheme>
-    <a:fmtScheme name="ChatGPT">
+    <a:fmtScheme name="Course">
       <a:fillStyleLst>
         <a:solidFill>
           <a:schemeClr val="phClr"/>
